--- a/figures/datasetgenerationflowchart.pptx
+++ b/figures/datasetgenerationflowchart.pptx
@@ -6,6 +6,8 @@
   </p:sldMasterIdLst>
   <p:sldIdLst>
     <p:sldId id="256" r:id="rId2"/>
+    <p:sldId id="257" r:id="rId3"/>
+    <p:sldId id="258" r:id="rId4"/>
   </p:sldIdLst>
   <p:sldSz cx="6858000" cy="12192000"/>
   <p:notesSz cx="6858000" cy="9144000"/>
@@ -261,7 +263,7 @@
           <a:p>
             <a:fld id="{0DAF61AA-5A98-4049-A93E-477E5505141A}" type="datetimeFigureOut">
               <a:rPr lang="en-US" smtClean="0"/>
-              <a:t>8/20/2026</a:t>
+              <a:t>9/11/2026</a:t>
             </a:fld>
             <a:endParaRPr lang="en-US" dirty="0"/>
           </a:p>
@@ -461,7 +463,7 @@
           <a:p>
             <a:fld id="{0DAF61AA-5A98-4049-A93E-477E5505141A}" type="datetimeFigureOut">
               <a:rPr lang="en-US" smtClean="0"/>
-              <a:t>8/20/2026</a:t>
+              <a:t>9/11/2026</a:t>
             </a:fld>
             <a:endParaRPr lang="en-US"/>
           </a:p>
@@ -671,7 +673,7 @@
           <a:p>
             <a:fld id="{0DAF61AA-5A98-4049-A93E-477E5505141A}" type="datetimeFigureOut">
               <a:rPr lang="en-US" smtClean="0"/>
-              <a:t>8/20/2026</a:t>
+              <a:t>9/11/2026</a:t>
             </a:fld>
             <a:endParaRPr lang="en-US"/>
           </a:p>
@@ -871,7 +873,7 @@
           <a:p>
             <a:fld id="{0DAF61AA-5A98-4049-A93E-477E5505141A}" type="datetimeFigureOut">
               <a:rPr lang="en-US" smtClean="0"/>
-              <a:t>8/20/2026</a:t>
+              <a:t>9/11/2026</a:t>
             </a:fld>
             <a:endParaRPr lang="en-US"/>
           </a:p>
@@ -1147,7 +1149,7 @@
           <a:p>
             <a:fld id="{0DAF61AA-5A98-4049-A93E-477E5505141A}" type="datetimeFigureOut">
               <a:rPr lang="en-US" smtClean="0"/>
-              <a:t>8/20/2026</a:t>
+              <a:t>9/11/2026</a:t>
             </a:fld>
             <a:endParaRPr lang="en-US"/>
           </a:p>
@@ -1415,7 +1417,7 @@
           <a:p>
             <a:fld id="{0DAF61AA-5A98-4049-A93E-477E5505141A}" type="datetimeFigureOut">
               <a:rPr lang="en-US" smtClean="0"/>
-              <a:t>8/20/2026</a:t>
+              <a:t>9/11/2026</a:t>
             </a:fld>
             <a:endParaRPr lang="en-US"/>
           </a:p>
@@ -1830,7 +1832,7 @@
           <a:p>
             <a:fld id="{0DAF61AA-5A98-4049-A93E-477E5505141A}" type="datetimeFigureOut">
               <a:rPr lang="en-US" smtClean="0"/>
-              <a:t>8/20/2026</a:t>
+              <a:t>9/11/2026</a:t>
             </a:fld>
             <a:endParaRPr lang="en-US"/>
           </a:p>
@@ -1972,7 +1974,7 @@
           <a:p>
             <a:fld id="{0DAF61AA-5A98-4049-A93E-477E5505141A}" type="datetimeFigureOut">
               <a:rPr lang="en-US" smtClean="0"/>
-              <a:t>8/20/2026</a:t>
+              <a:t>9/11/2026</a:t>
             </a:fld>
             <a:endParaRPr lang="en-US"/>
           </a:p>
@@ -2085,7 +2087,7 @@
           <a:p>
             <a:fld id="{0DAF61AA-5A98-4049-A93E-477E5505141A}" type="datetimeFigureOut">
               <a:rPr lang="en-US" smtClean="0"/>
-              <a:t>8/20/2026</a:t>
+              <a:t>9/11/2026</a:t>
             </a:fld>
             <a:endParaRPr lang="en-US"/>
           </a:p>
@@ -2398,7 +2400,7 @@
           <a:p>
             <a:fld id="{0DAF61AA-5A98-4049-A93E-477E5505141A}" type="datetimeFigureOut">
               <a:rPr lang="en-US" smtClean="0"/>
-              <a:t>8/20/2026</a:t>
+              <a:t>9/11/2026</a:t>
             </a:fld>
             <a:endParaRPr lang="en-US"/>
           </a:p>
@@ -2691,7 +2693,7 @@
           <a:p>
             <a:fld id="{0DAF61AA-5A98-4049-A93E-477E5505141A}" type="datetimeFigureOut">
               <a:rPr lang="en-US" smtClean="0"/>
-              <a:t>8/20/2026</a:t>
+              <a:t>9/11/2026</a:t>
             </a:fld>
             <a:endParaRPr lang="en-US"/>
           </a:p>
@@ -6404,7 +6406,7 @@
             <a:fld id="{0DAF61AA-5A98-4049-A93E-477E5505141A}" type="datetimeFigureOut">
               <a:rPr lang="en-US" smtClean="0"/>
               <a:pPr/>
-              <a:t>8/20/2026</a:t>
+              <a:t>9/11/2026</a:t>
             </a:fld>
             <a:endParaRPr lang="en-US" dirty="0"/>
           </a:p>
@@ -6988,7 +6990,7 @@
         </p:nvSpPr>
         <p:spPr>
           <a:xfrm>
-            <a:off x="694592" y="2412999"/>
+            <a:off x="694592" y="4143828"/>
             <a:ext cx="5468816" cy="5762873"/>
           </a:xfrm>
           <a:prstGeom prst="rect">
@@ -7023,34 +7025,13 @@
           <a:p>
             <a:pPr algn="ctr"/>
             <a:r>
-              <a:rPr lang="en-US" sz="1600" dirty="0" err="1">
+              <a:rPr lang="en-US" sz="1600" dirty="0">
                 <a:solidFill>
                   <a:sysClr val="windowText" lastClr="000000"/>
                 </a:solidFill>
                 <a:latin typeface="Abadi" panose="020B0604020104020204" pitchFamily="34" charset="0"/>
               </a:rPr>
-              <a:t>RBPnet</a:t>
-            </a:r>
-            <a:r>
-              <a:rPr lang="en-US" sz="1600" dirty="0">
-                <a:solidFill>
-                  <a:sysClr val="windowText" lastClr="000000"/>
-                </a:solidFill>
-                <a:latin typeface="Abadi" panose="020B0604020104020204" pitchFamily="34" charset="0"/>
-              </a:rPr>
-              <a:t> PRPF8 predictions across introns 242,946 Peaks</a:t>
-            </a:r>
-          </a:p>
-          <a:p>
-            <a:pPr algn="ctr"/>
-            <a:r>
-              <a:rPr lang="en-US" sz="1600" dirty="0">
-                <a:solidFill>
-                  <a:sysClr val="windowText" lastClr="000000"/>
-                </a:solidFill>
-                <a:latin typeface="Abadi" panose="020B0604020104020204" pitchFamily="34" charset="0"/>
-              </a:rPr>
-              <a:t>rbpnet_clippy_f50_rollmean10_minHeightAdjust1.0_minPromAdjust1.0_minGeneCount5_Peaks.bed</a:t>
+              <a:t>Intersect –v to remove splice sites within 100 bp of canonical splice sites</a:t>
             </a:r>
           </a:p>
           <a:p>
@@ -7065,62 +7046,119 @@
           <a:p>
             <a:pPr algn="ctr"/>
             <a:r>
-              <a:rPr lang="en-US" sz="1600" dirty="0">
-                <a:solidFill>
-                  <a:sysClr val="windowText" lastClr="000000"/>
-                </a:solidFill>
-                <a:latin typeface="Abadi" panose="020B0604020104020204" pitchFamily="34" charset="0"/>
-              </a:rPr>
-              <a:t>Merged PRPF8 </a:t>
-            </a:r>
-            <a:r>
               <a:rPr lang="en-US" sz="1600" dirty="0" err="1">
                 <a:solidFill>
-                  <a:sysClr val="windowText" lastClr="000000"/>
-                </a:solidFill>
-                <a:latin typeface="Abadi" panose="020B0604020104020204" pitchFamily="34" charset="0"/>
-              </a:rPr>
-              <a:t>eCLIP</a:t>
-            </a:r>
-            <a:r>
-              <a:rPr lang="en-US" sz="1600" dirty="0">
-                <a:solidFill>
-                  <a:sysClr val="windowText" lastClr="000000"/>
-                </a:solidFill>
-                <a:latin typeface="Abadi" panose="020B0604020104020204" pitchFamily="34" charset="0"/>
-              </a:rPr>
-              <a:t> and </a:t>
-            </a:r>
-            <a:r>
-              <a:rPr lang="en-US" sz="1600" dirty="0" err="1">
-                <a:solidFill>
-                  <a:sysClr val="windowText" lastClr="000000"/>
-                </a:solidFill>
-                <a:latin typeface="Abadi" panose="020B0604020104020204" pitchFamily="34" charset="0"/>
-              </a:rPr>
-              <a:t>iCLIP</a:t>
-            </a:r>
-            <a:r>
-              <a:rPr lang="en-US" sz="1600" dirty="0">
-                <a:solidFill>
-                  <a:sysClr val="windowText" lastClr="000000"/>
-                </a:solidFill>
-                <a:latin typeface="Abadi" panose="020B0604020104020204" pitchFamily="34" charset="0"/>
-              </a:rPr>
-              <a:t> 227,651 Peaks</a:t>
-            </a:r>
+                  <a:schemeClr val="accent1"/>
+                </a:solidFill>
+                <a:latin typeface="Abadi" panose="020B0604020104020204" pitchFamily="34" charset="0"/>
+              </a:rPr>
+              <a:t>Wide_canonical_splice_sites.bed</a:t>
+            </a:r>
+            <a:endParaRPr lang="en-US" sz="1600" dirty="0">
+              <a:solidFill>
+                <a:schemeClr val="accent1"/>
+              </a:solidFill>
+              <a:latin typeface="Abadi" panose="020B0604020104020204" pitchFamily="34" charset="0"/>
+            </a:endParaRPr>
           </a:p>
           <a:p>
             <a:pPr algn="ctr"/>
-            <a:r>
-              <a:rPr lang="en-US" sz="1600" dirty="0">
-                <a:solidFill>
-                  <a:sysClr val="windowText" lastClr="000000"/>
-                </a:solidFill>
-                <a:latin typeface="Abadi" panose="020B0604020104020204" pitchFamily="34" charset="0"/>
-              </a:rPr>
-              <a:t>PRPF8_clippy_w0.5_rollmean80_minHeightAdjust3.0_minPromAdjust3.0_minGeneCount5_Peaks.bed</a:t>
-            </a:r>
+            <a:endParaRPr lang="en-US" sz="1600" dirty="0">
+              <a:solidFill>
+                <a:schemeClr val="accent1"/>
+              </a:solidFill>
+              <a:latin typeface="Abadi" panose="020B0604020104020204" pitchFamily="34" charset="0"/>
+            </a:endParaRPr>
+          </a:p>
+          <a:p>
+            <a:pPr algn="ctr"/>
+            <a:endParaRPr lang="en-US" sz="1600" dirty="0">
+              <a:solidFill>
+                <a:schemeClr val="accent1"/>
+              </a:solidFill>
+              <a:latin typeface="Abadi" panose="020B0604020104020204" pitchFamily="34" charset="0"/>
+            </a:endParaRPr>
+          </a:p>
+          <a:p>
+            <a:pPr algn="ctr"/>
+            <a:endParaRPr lang="en-US" sz="1600" dirty="0">
+              <a:solidFill>
+                <a:schemeClr val="accent1"/>
+              </a:solidFill>
+              <a:latin typeface="Abadi" panose="020B0604020104020204" pitchFamily="34" charset="0"/>
+            </a:endParaRPr>
+          </a:p>
+          <a:p>
+            <a:pPr algn="ctr"/>
+            <a:endParaRPr lang="en-US" sz="1600" dirty="0">
+              <a:solidFill>
+                <a:schemeClr val="accent1"/>
+              </a:solidFill>
+              <a:latin typeface="Abadi" panose="020B0604020104020204" pitchFamily="34" charset="0"/>
+            </a:endParaRPr>
+          </a:p>
+          <a:p>
+            <a:pPr algn="ctr"/>
+            <a:endParaRPr lang="en-US" sz="1600" dirty="0">
+              <a:solidFill>
+                <a:schemeClr val="accent1"/>
+              </a:solidFill>
+              <a:latin typeface="Abadi" panose="020B0604020104020204" pitchFamily="34" charset="0"/>
+            </a:endParaRPr>
+          </a:p>
+          <a:p>
+            <a:pPr algn="ctr"/>
+            <a:endParaRPr lang="en-US" sz="1600" dirty="0">
+              <a:solidFill>
+                <a:schemeClr val="accent1"/>
+              </a:solidFill>
+              <a:latin typeface="Abadi" panose="020B0604020104020204" pitchFamily="34" charset="0"/>
+            </a:endParaRPr>
+          </a:p>
+          <a:p>
+            <a:pPr algn="ctr"/>
+            <a:endParaRPr lang="en-US" sz="1600" dirty="0">
+              <a:solidFill>
+                <a:schemeClr val="accent1"/>
+              </a:solidFill>
+              <a:latin typeface="Abadi" panose="020B0604020104020204" pitchFamily="34" charset="0"/>
+            </a:endParaRPr>
+          </a:p>
+          <a:p>
+            <a:pPr algn="ctr"/>
+            <a:endParaRPr lang="en-US" sz="1600" dirty="0">
+              <a:solidFill>
+                <a:schemeClr val="accent1"/>
+              </a:solidFill>
+              <a:latin typeface="Abadi" panose="020B0604020104020204" pitchFamily="34" charset="0"/>
+            </a:endParaRPr>
+          </a:p>
+          <a:p>
+            <a:pPr algn="ctr"/>
+            <a:endParaRPr lang="en-US" sz="1600" dirty="0">
+              <a:solidFill>
+                <a:schemeClr val="accent1"/>
+              </a:solidFill>
+              <a:latin typeface="Abadi" panose="020B0604020104020204" pitchFamily="34" charset="0"/>
+            </a:endParaRPr>
+          </a:p>
+          <a:p>
+            <a:pPr algn="ctr"/>
+            <a:endParaRPr lang="en-US" sz="1600" dirty="0">
+              <a:solidFill>
+                <a:schemeClr val="accent1"/>
+              </a:solidFill>
+              <a:latin typeface="Abadi" panose="020B0604020104020204" pitchFamily="34" charset="0"/>
+            </a:endParaRPr>
+          </a:p>
+          <a:p>
+            <a:pPr algn="ctr"/>
+            <a:endParaRPr lang="en-US" sz="1600" dirty="0">
+              <a:solidFill>
+                <a:schemeClr val="accent1"/>
+              </a:solidFill>
+              <a:latin typeface="Abadi" panose="020B0604020104020204" pitchFamily="34" charset="0"/>
+            </a:endParaRPr>
           </a:p>
           <a:p>
             <a:pPr algn="ctr"/>
@@ -7134,6 +7172,111 @@
           <a:p>
             <a:pPr algn="ctr"/>
             <a:r>
+              <a:rPr lang="en-US" sz="1600" dirty="0" err="1">
+                <a:solidFill>
+                  <a:sysClr val="windowText" lastClr="000000"/>
+                </a:solidFill>
+                <a:latin typeface="Abadi" panose="020B0604020104020204" pitchFamily="34" charset="0"/>
+              </a:rPr>
+              <a:t>RBPnet</a:t>
+            </a:r>
+            <a:r>
+              <a:rPr lang="en-US" sz="1600" dirty="0">
+                <a:solidFill>
+                  <a:sysClr val="windowText" lastClr="000000"/>
+                </a:solidFill>
+                <a:latin typeface="Abadi" panose="020B0604020104020204" pitchFamily="34" charset="0"/>
+              </a:rPr>
+              <a:t> </a:t>
+            </a:r>
+            <a:r>
+              <a:rPr lang="en-US" sz="1600" dirty="0">
+                <a:solidFill>
+                  <a:schemeClr val="accent1"/>
+                </a:solidFill>
+                <a:latin typeface="Abadi" panose="020B0604020104020204" pitchFamily="34" charset="0"/>
+              </a:rPr>
+              <a:t>PRPF8</a:t>
+            </a:r>
+            <a:r>
+              <a:rPr lang="en-US" sz="1600" dirty="0">
+                <a:solidFill>
+                  <a:sysClr val="windowText" lastClr="000000"/>
+                </a:solidFill>
+                <a:latin typeface="Abadi" panose="020B0604020104020204" pitchFamily="34" charset="0"/>
+              </a:rPr>
+              <a:t> predictions across introns 242,946 Peaks</a:t>
+            </a:r>
+          </a:p>
+          <a:p>
+            <a:pPr algn="ctr"/>
+            <a:r>
+              <a:rPr lang="en-US" sz="1600" dirty="0">
+                <a:solidFill>
+                  <a:sysClr val="windowText" lastClr="000000"/>
+                </a:solidFill>
+                <a:latin typeface="Abadi" panose="020B0604020104020204" pitchFamily="34" charset="0"/>
+              </a:rPr>
+              <a:t>Merged </a:t>
+            </a:r>
+            <a:r>
+              <a:rPr lang="en-US" sz="1600" dirty="0">
+                <a:solidFill>
+                  <a:schemeClr val="accent1"/>
+                </a:solidFill>
+                <a:latin typeface="Abadi" panose="020B0604020104020204" pitchFamily="34" charset="0"/>
+              </a:rPr>
+              <a:t>PRPF8 </a:t>
+            </a:r>
+            <a:r>
+              <a:rPr lang="en-US" sz="1600" dirty="0" err="1">
+                <a:solidFill>
+                  <a:schemeClr val="accent1"/>
+                </a:solidFill>
+                <a:latin typeface="Abadi" panose="020B0604020104020204" pitchFamily="34" charset="0"/>
+              </a:rPr>
+              <a:t>eCLIP</a:t>
+            </a:r>
+            <a:r>
+              <a:rPr lang="en-US" sz="1600" dirty="0">
+                <a:solidFill>
+                  <a:schemeClr val="accent1"/>
+                </a:solidFill>
+                <a:latin typeface="Abadi" panose="020B0604020104020204" pitchFamily="34" charset="0"/>
+              </a:rPr>
+              <a:t> and </a:t>
+            </a:r>
+            <a:r>
+              <a:rPr lang="en-US" sz="1600" dirty="0" err="1">
+                <a:solidFill>
+                  <a:schemeClr val="accent1"/>
+                </a:solidFill>
+                <a:latin typeface="Abadi" panose="020B0604020104020204" pitchFamily="34" charset="0"/>
+              </a:rPr>
+              <a:t>iCLIP</a:t>
+            </a:r>
+            <a:r>
+              <a:rPr lang="en-US" sz="1600" dirty="0">
+                <a:solidFill>
+                  <a:schemeClr val="accent1"/>
+                </a:solidFill>
+                <a:latin typeface="Abadi" panose="020B0604020104020204" pitchFamily="34" charset="0"/>
+              </a:rPr>
+              <a:t> </a:t>
+            </a:r>
+            <a:r>
+              <a:rPr lang="en-US" sz="1600" dirty="0">
+                <a:solidFill>
+                  <a:sysClr val="windowText" lastClr="000000"/>
+                </a:solidFill>
+                <a:latin typeface="Abadi" panose="020B0604020104020204" pitchFamily="34" charset="0"/>
+              </a:rPr>
+              <a:t>227,651 Peaks</a:t>
+            </a:r>
+          </a:p>
+          <a:p>
+            <a:pPr algn="ctr"/>
+            <a:r>
               <a:rPr lang="en-GB" sz="1600" dirty="0">
                 <a:solidFill>
                   <a:sysClr val="windowText" lastClr="000000"/>
@@ -7145,50 +7288,47 @@
             <a:r>
               <a:rPr lang="en-GB" sz="1600" dirty="0" err="1">
                 <a:solidFill>
+                  <a:schemeClr val="accent1"/>
+                </a:solidFill>
+                <a:latin typeface="Abadi" panose="020B0604020104020204" pitchFamily="34" charset="0"/>
+              </a:rPr>
+              <a:t>SmB</a:t>
+            </a:r>
+            <a:r>
+              <a:rPr lang="en-GB" sz="1600" dirty="0">
+                <a:solidFill>
+                  <a:schemeClr val="accent1"/>
+                </a:solidFill>
+                <a:latin typeface="Abadi" panose="020B0604020104020204" pitchFamily="34" charset="0"/>
+              </a:rPr>
+              <a:t> </a:t>
+            </a:r>
+            <a:r>
+              <a:rPr lang="en-GB" sz="1600" dirty="0" err="1">
+                <a:solidFill>
+                  <a:schemeClr val="accent1"/>
+                </a:solidFill>
+                <a:latin typeface="Abadi" panose="020B0604020104020204" pitchFamily="34" charset="0"/>
+              </a:rPr>
+              <a:t>iCLIP</a:t>
+            </a:r>
+            <a:r>
+              <a:rPr lang="en-GB" sz="1600" dirty="0">
+                <a:solidFill>
+                  <a:schemeClr val="accent1"/>
+                </a:solidFill>
+                <a:latin typeface="Abadi" panose="020B0604020104020204" pitchFamily="34" charset="0"/>
+              </a:rPr>
+              <a:t> </a:t>
+            </a:r>
+            <a:r>
+              <a:rPr lang="en-GB" sz="1600" dirty="0">
+                <a:solidFill>
                   <a:sysClr val="windowText" lastClr="000000"/>
                 </a:solidFill>
                 <a:latin typeface="Abadi" panose="020B0604020104020204" pitchFamily="34" charset="0"/>
               </a:rPr>
-              <a:t>SmB</a:t>
-            </a:r>
-            <a:r>
-              <a:rPr lang="en-GB" sz="1600" dirty="0">
-                <a:solidFill>
-                  <a:sysClr val="windowText" lastClr="000000"/>
-                </a:solidFill>
-                <a:latin typeface="Abadi" panose="020B0604020104020204" pitchFamily="34" charset="0"/>
-              </a:rPr>
-              <a:t> </a:t>
-            </a:r>
-            <a:r>
-              <a:rPr lang="en-GB" sz="1600" dirty="0" err="1">
-                <a:solidFill>
-                  <a:sysClr val="windowText" lastClr="000000"/>
-                </a:solidFill>
-                <a:latin typeface="Abadi" panose="020B0604020104020204" pitchFamily="34" charset="0"/>
-              </a:rPr>
-              <a:t>iCLIP</a:t>
-            </a:r>
-            <a:r>
-              <a:rPr lang="en-GB" sz="1600" dirty="0">
-                <a:solidFill>
-                  <a:sysClr val="windowText" lastClr="000000"/>
-                </a:solidFill>
-                <a:latin typeface="Abadi" panose="020B0604020104020204" pitchFamily="34" charset="0"/>
-              </a:rPr>
-              <a:t> 152,983 Peaks </a:t>
-            </a:r>
-          </a:p>
-          <a:p>
-            <a:pPr algn="ctr"/>
-            <a:r>
-              <a:rPr lang="en-GB" sz="1600" dirty="0">
-                <a:solidFill>
-                  <a:sysClr val="windowText" lastClr="000000"/>
-                </a:solidFill>
-                <a:latin typeface="Abadi" panose="020B0604020104020204" pitchFamily="34" charset="0"/>
-              </a:rPr>
-              <a:t>SmB_clippy_n40_w0.5_rollmean40_minHeightAdjust8.0_minPromAdjust5.0_minGeneCount5_Peaks.bed</a:t>
+              <a:t>152,983 Peaks </a:t>
             </a:r>
           </a:p>
           <a:p>
@@ -7203,154 +7343,29 @@
           <a:p>
             <a:pPr algn="ctr"/>
             <a:r>
-              <a:rPr lang="en-GB" sz="1400" dirty="0">
+              <a:rPr lang="en-US" sz="1400" dirty="0">
                 <a:solidFill>
                   <a:sysClr val="windowText" lastClr="000000"/>
                 </a:solidFill>
-                <a:latin typeface="SimHei" panose="020B0503020204020204" pitchFamily="49" charset="-122"/>
-                <a:ea typeface="SimHei" panose="020B0503020204020204" pitchFamily="49" charset="-122"/>
-              </a:rPr>
-              <a:t>bedtools intersect \</a:t>
-            </a:r>
-          </a:p>
-          <a:p>
-            <a:pPr algn="ctr"/>
-            <a:r>
-              <a:rPr lang="en-GB" sz="1400" dirty="0">
+                <a:latin typeface="Abadi" panose="020B0604020104020204" pitchFamily="34" charset="0"/>
+              </a:rPr>
+              <a:t>Need to use Granges AGAIN, to remove exons from intronic regions in decoys/</a:t>
+            </a:r>
+            <a:r>
+              <a:rPr lang="en-US" sz="1400" dirty="0" err="1">
                 <a:solidFill>
                   <a:sysClr val="windowText" lastClr="000000"/>
                 </a:solidFill>
-                <a:latin typeface="SimHei" panose="020B0503020204020204" pitchFamily="49" charset="-122"/>
-                <a:ea typeface="SimHei" panose="020B0503020204020204" pitchFamily="49" charset="-122"/>
-              </a:rPr>
-              <a:t>-a \</a:t>
-            </a:r>
-          </a:p>
-          <a:p>
-            <a:pPr algn="ctr"/>
-            <a:r>
-              <a:rPr lang="en-GB" sz="1400" dirty="0">
-                <a:solidFill>
-                  <a:sysClr val="windowText" lastClr="000000"/>
-                </a:solidFill>
-                <a:latin typeface="SimHei" panose="020B0503020204020204" pitchFamily="49" charset="-122"/>
-                <a:ea typeface="SimHei" panose="020B0503020204020204" pitchFamily="49" charset="-122"/>
-              </a:rPr>
-              <a:t>-b \</a:t>
-            </a:r>
-            <a:br>
-              <a:rPr lang="en-GB" sz="1400" dirty="0">
-                <a:solidFill>
-                  <a:sysClr val="windowText" lastClr="000000"/>
-                </a:solidFill>
-                <a:latin typeface="SimHei" panose="020B0503020204020204" pitchFamily="49" charset="-122"/>
-                <a:ea typeface="SimHei" panose="020B0503020204020204" pitchFamily="49" charset="-122"/>
-              </a:rPr>
-            </a:br>
-            <a:r>
-              <a:rPr lang="en-GB" sz="1400" dirty="0">
-                <a:solidFill>
-                  <a:sysClr val="windowText" lastClr="000000"/>
-                </a:solidFill>
-                <a:latin typeface="SimHei" panose="020B0503020204020204" pitchFamily="49" charset="-122"/>
-                <a:ea typeface="SimHei" panose="020B0503020204020204" pitchFamily="49" charset="-122"/>
-              </a:rPr>
-              <a:t>-c \</a:t>
-            </a:r>
-          </a:p>
-          <a:p>
-            <a:pPr algn="ctr"/>
-            <a:r>
-              <a:rPr lang="en-GB" sz="1400" dirty="0">
-                <a:solidFill>
-                  <a:sysClr val="windowText" lastClr="000000"/>
-                </a:solidFill>
-                <a:latin typeface="SimHei" panose="020B0503020204020204" pitchFamily="49" charset="-122"/>
-                <a:ea typeface="SimHei" panose="020B0503020204020204" pitchFamily="49" charset="-122"/>
-              </a:rPr>
-              <a:t>-s \</a:t>
-            </a:r>
-          </a:p>
-          <a:p>
-            <a:pPr algn="ctr"/>
-            <a:r>
-              <a:rPr lang="en-GB" sz="1400" dirty="0">
-                <a:solidFill>
-                  <a:sysClr val="windowText" lastClr="000000"/>
-                </a:solidFill>
-                <a:latin typeface="SimHei" panose="020B0503020204020204" pitchFamily="49" charset="-122"/>
-                <a:ea typeface="SimHei" panose="020B0503020204020204" pitchFamily="49" charset="-122"/>
-              </a:rPr>
-              <a:t>| awk ‘$NF &gt; 0’ </a:t>
-            </a:r>
-            <a:r>
-              <a:rPr lang="en-GB" sz="1400" dirty="0" err="1">
-                <a:solidFill>
-                  <a:sysClr val="windowText" lastClr="000000"/>
-                </a:solidFill>
-                <a:latin typeface="SimHei" panose="020B0503020204020204" pitchFamily="49" charset="-122"/>
-                <a:ea typeface="SimHei" panose="020B0503020204020204" pitchFamily="49" charset="-122"/>
-              </a:rPr>
-              <a:t>SupportedSpliceSites.bed</a:t>
-            </a:r>
-            <a:endParaRPr lang="en-GB" sz="1600" dirty="0">
-              <a:solidFill>
-                <a:sysClr val="windowText" lastClr="000000"/>
-              </a:solidFill>
-              <a:latin typeface="SimHei" panose="020B0503020204020204" pitchFamily="49" charset="-122"/>
-              <a:ea typeface="SimHei" panose="020B0503020204020204" pitchFamily="49" charset="-122"/>
-            </a:endParaRPr>
-          </a:p>
-          <a:p>
-            <a:pPr algn="ctr"/>
-            <a:br>
-              <a:rPr lang="en-GB" sz="1600" dirty="0">
-                <a:solidFill>
-                  <a:sysClr val="windowText" lastClr="000000"/>
-                </a:solidFill>
-                <a:latin typeface="SimHei" panose="020B0503020204020204" pitchFamily="49" charset="-122"/>
-                <a:ea typeface="SimHei" panose="020B0503020204020204" pitchFamily="49" charset="-122"/>
-              </a:rPr>
-            </a:br>
-            <a:r>
-              <a:rPr lang="en-US" sz="1600" dirty="0">
-                <a:solidFill>
-                  <a:sysClr val="windowText" lastClr="000000"/>
-                </a:solidFill>
-                <a:latin typeface="Abadi" panose="020B0604020104020204" pitchFamily="34" charset="0"/>
-              </a:rPr>
-              <a:t>Repeat with –v to remove splice sites within 100 bp of canonical splice sites</a:t>
-            </a:r>
-          </a:p>
-          <a:p>
-            <a:pPr algn="ctr"/>
-            <a:r>
-              <a:rPr lang="en-US" sz="1600" dirty="0" err="1">
-                <a:solidFill>
-                  <a:sysClr val="windowText" lastClr="000000"/>
-                </a:solidFill>
-                <a:latin typeface="Abadi" panose="020B0604020104020204" pitchFamily="34" charset="0"/>
-              </a:rPr>
-              <a:t>Wide_canonical_splice_sites.bed</a:t>
-            </a:r>
-            <a:endParaRPr lang="en-US" sz="1600" dirty="0">
+                <a:latin typeface="Abadi" panose="020B0604020104020204" pitchFamily="34" charset="0"/>
+              </a:rPr>
+              <a:t>cryptics</a:t>
+            </a:r>
+            <a:endParaRPr lang="en-US" sz="1400" dirty="0">
               <a:solidFill>
                 <a:sysClr val="windowText" lastClr="000000"/>
               </a:solidFill>
               <a:latin typeface="Abadi" panose="020B0604020104020204" pitchFamily="34" charset="0"/>
             </a:endParaRPr>
-          </a:p>
-          <a:p>
-            <a:pPr algn="ctr"/>
-            <a:r>
-              <a:rPr lang="en-US" sz="1600" dirty="0">
-                <a:solidFill>
-                  <a:sysClr val="windowText" lastClr="000000"/>
-                </a:solidFill>
-                <a:latin typeface="Abadi" panose="020B0604020104020204" pitchFamily="34" charset="0"/>
-              </a:rPr>
-              <a:t>Total: 36,240 Predicted splice sites</a:t>
-            </a:r>
           </a:p>
         </p:txBody>
       </p:sp>
@@ -7427,7 +7442,7 @@
         </p:nvSpPr>
         <p:spPr>
           <a:xfrm>
-            <a:off x="2127250" y="2216150"/>
+            <a:off x="2127250" y="3946979"/>
             <a:ext cx="2603500" cy="393700"/>
           </a:xfrm>
           <a:prstGeom prst="rect">
@@ -7486,7 +7501,7 @@
         </p:nvSpPr>
         <p:spPr>
           <a:xfrm>
-            <a:off x="694592" y="8667998"/>
+            <a:off x="694592" y="2369514"/>
             <a:ext cx="5468816" cy="1280258"/>
           </a:xfrm>
           <a:prstGeom prst="rect">
@@ -7527,7 +7542,7 @@
                 </a:solidFill>
                 <a:latin typeface="Abadi" panose="020B0604020104020204" pitchFamily="34" charset="0"/>
               </a:rPr>
-              <a:t>Remove exon overlaps with Granges, keep only “</a:t>
+              <a:t>Using </a:t>
             </a:r>
             <a:r>
               <a:rPr lang="en-US" sz="1600" dirty="0" err="1">
@@ -7536,6 +7551,24 @@
                 </a:solidFill>
                 <a:latin typeface="Abadi" panose="020B0604020104020204" pitchFamily="34" charset="0"/>
               </a:rPr>
+              <a:t>GRanges</a:t>
+            </a:r>
+            <a:r>
+              <a:rPr lang="en-US" sz="1600" dirty="0">
+                <a:solidFill>
+                  <a:sysClr val="windowText" lastClr="000000"/>
+                </a:solidFill>
+                <a:latin typeface="Abadi" panose="020B0604020104020204" pitchFamily="34" charset="0"/>
+              </a:rPr>
+              <a:t>, keep only “</a:t>
+            </a:r>
+            <a:r>
+              <a:rPr lang="en-US" sz="1600" dirty="0" err="1">
+                <a:solidFill>
+                  <a:sysClr val="windowText" lastClr="000000"/>
+                </a:solidFill>
+                <a:latin typeface="Abadi" panose="020B0604020104020204" pitchFamily="34" charset="0"/>
+              </a:rPr>
               <a:t>protein_coding</a:t>
             </a:r>
             <a:r>
@@ -7545,7 +7578,7 @@
                 </a:solidFill>
                 <a:latin typeface="Abadi" panose="020B0604020104020204" pitchFamily="34" charset="0"/>
               </a:rPr>
-              <a:t>” introns in Gencode.v49.annotation.gtf</a:t>
+              <a:t>” regions in Gencode.v49.annotation.gtf</a:t>
             </a:r>
           </a:p>
           <a:p>
@@ -7557,7 +7590,7 @@
                 </a:solidFill>
                 <a:latin typeface="Abadi" panose="020B0604020104020204" pitchFamily="34" charset="0"/>
               </a:rPr>
-              <a:t>19,945 Predicted splice sites</a:t>
+              <a:t>* Predicted splice sites</a:t>
             </a:r>
           </a:p>
         </p:txBody>
@@ -7617,17 +7650,20 @@
                 </a:solidFill>
                 <a:latin typeface="Abadi" panose="020B0604020104020204" pitchFamily="34" charset="0"/>
               </a:rPr>
-              <a:t>Pull FASTA using BED coordinates using SpliceAI_Inference.py to re-score inferences over a ±24nt window surrounding the loci</a:t>
+              <a:t>Pull FASTA using BED coordinates with SpliceAI_Inference.py to re-score inferences over a ±24nt window surrounding the loci, filter to &gt; 0.1 Donor Score</a:t>
             </a:r>
           </a:p>
           <a:p>
             <a:pPr algn="ctr"/>
-            <a:endParaRPr lang="en-US" sz="1600" dirty="0">
-              <a:solidFill>
-                <a:sysClr val="windowText" lastClr="000000"/>
-              </a:solidFill>
-              <a:latin typeface="Abadi" panose="020B0604020104020204" pitchFamily="34" charset="0"/>
-            </a:endParaRPr>
+            <a:r>
+              <a:rPr lang="en-US" sz="1600" dirty="0">
+                <a:solidFill>
+                  <a:sysClr val="windowText" lastClr="000000"/>
+                </a:solidFill>
+                <a:latin typeface="Abadi" panose="020B0604020104020204" pitchFamily="34" charset="0"/>
+              </a:rPr>
+              <a:t>7022 Predicted Splice Sites</a:t>
+            </a:r>
           </a:p>
         </p:txBody>
       </p:sp>
@@ -7645,7 +7681,7 @@
         </p:nvSpPr>
         <p:spPr>
           <a:xfrm>
-            <a:off x="2127250" y="8471148"/>
+            <a:off x="2127250" y="2172664"/>
             <a:ext cx="2603500" cy="393700"/>
           </a:xfrm>
           <a:prstGeom prst="rect">
@@ -7704,7 +7740,7 @@
         </p:nvSpPr>
         <p:spPr>
           <a:xfrm>
-            <a:off x="5945663" y="2573839"/>
+            <a:off x="5945663" y="4304668"/>
             <a:ext cx="300349" cy="3014187"/>
           </a:xfrm>
           <a:prstGeom prst="rightBrace">
@@ -7807,7 +7843,7 @@
         </p:nvSpPr>
         <p:spPr>
           <a:xfrm>
-            <a:off x="6030438" y="3833283"/>
+            <a:off x="6030438" y="5564112"/>
             <a:ext cx="508000" cy="495300"/>
           </a:xfrm>
           <a:prstGeom prst="ellipse">
@@ -7841,10 +7877,4040 @@
           </a:p>
         </p:txBody>
       </p:sp>
+      <p:pic>
+        <p:nvPicPr>
+          <p:cNvPr id="6" name="Picture 5">
+            <a:extLst>
+              <a:ext uri="{FF2B5EF4-FFF2-40B4-BE49-F238E27FC236}">
+                <a16:creationId xmlns:a16="http://schemas.microsoft.com/office/drawing/2014/main" id="{9FB30D7F-2777-4174-C8AB-D0DE9459BC7E}"/>
+              </a:ext>
+            </a:extLst>
+          </p:cNvPr>
+          <p:cNvPicPr>
+            <a:picLocks noChangeAspect="1"/>
+          </p:cNvPicPr>
+          <p:nvPr/>
+        </p:nvPicPr>
+        <p:blipFill>
+          <a:blip r:embed="rId2"/>
+          <a:srcRect t="24837" r="20597"/>
+          <a:stretch>
+            <a:fillRect/>
+          </a:stretch>
+        </p:blipFill>
+        <p:spPr>
+          <a:xfrm>
+            <a:off x="402166" y="5403328"/>
+            <a:ext cx="5708780" cy="2855747"/>
+          </a:xfrm>
+          <a:prstGeom prst="rect">
+            <a:avLst/>
+          </a:prstGeom>
+          <a:ln w="19050">
+            <a:solidFill>
+              <a:schemeClr val="tx1"/>
+            </a:solidFill>
+          </a:ln>
+        </p:spPr>
+      </p:pic>
+      <p:cxnSp>
+        <p:nvCxnSpPr>
+          <p:cNvPr id="11" name="Straight Arrow Connector 10">
+            <a:extLst>
+              <a:ext uri="{FF2B5EF4-FFF2-40B4-BE49-F238E27FC236}">
+                <a16:creationId xmlns:a16="http://schemas.microsoft.com/office/drawing/2014/main" id="{5E99D58F-D8A1-36D1-08B2-D4B2D1CF4EA6}"/>
+              </a:ext>
+            </a:extLst>
+          </p:cNvPr>
+          <p:cNvCxnSpPr>
+            <a:cxnSpLocks/>
+          </p:cNvCxnSpPr>
+          <p:nvPr/>
+        </p:nvCxnSpPr>
+        <p:spPr>
+          <a:xfrm>
+            <a:off x="3971925" y="5403328"/>
+            <a:ext cx="457200" cy="892697"/>
+          </a:xfrm>
+          <a:prstGeom prst="straightConnector1">
+            <a:avLst/>
+          </a:prstGeom>
+          <a:ln>
+            <a:tailEnd type="triangle"/>
+          </a:ln>
+        </p:spPr>
+        <p:style>
+          <a:lnRef idx="3">
+            <a:schemeClr val="accent1"/>
+          </a:lnRef>
+          <a:fillRef idx="0">
+            <a:schemeClr val="accent1"/>
+          </a:fillRef>
+          <a:effectRef idx="2">
+            <a:schemeClr val="accent1"/>
+          </a:effectRef>
+          <a:fontRef idx="minor">
+            <a:schemeClr val="tx1"/>
+          </a:fontRef>
+        </p:style>
+      </p:cxnSp>
+      <p:cxnSp>
+        <p:nvCxnSpPr>
+          <p:cNvPr id="14" name="Straight Arrow Connector 13">
+            <a:extLst>
+              <a:ext uri="{FF2B5EF4-FFF2-40B4-BE49-F238E27FC236}">
+                <a16:creationId xmlns:a16="http://schemas.microsoft.com/office/drawing/2014/main" id="{9159153F-C10D-2CF6-4421-32D3C2D17193}"/>
+              </a:ext>
+            </a:extLst>
+          </p:cNvPr>
+          <p:cNvCxnSpPr>
+            <a:cxnSpLocks/>
+          </p:cNvCxnSpPr>
+          <p:nvPr/>
+        </p:nvCxnSpPr>
+        <p:spPr>
+          <a:xfrm>
+            <a:off x="4452938" y="6767513"/>
+            <a:ext cx="0" cy="1382185"/>
+          </a:xfrm>
+          <a:prstGeom prst="straightConnector1">
+            <a:avLst/>
+          </a:prstGeom>
+          <a:ln>
+            <a:tailEnd type="triangle"/>
+          </a:ln>
+        </p:spPr>
+        <p:style>
+          <a:lnRef idx="3">
+            <a:schemeClr val="accent1"/>
+          </a:lnRef>
+          <a:fillRef idx="0">
+            <a:schemeClr val="accent1"/>
+          </a:fillRef>
+          <a:effectRef idx="2">
+            <a:schemeClr val="accent1"/>
+          </a:effectRef>
+          <a:fontRef idx="minor">
+            <a:schemeClr val="tx1"/>
+          </a:fontRef>
+        </p:style>
+      </p:cxnSp>
+      <p:sp>
+        <p:nvSpPr>
+          <p:cNvPr id="3" name="TextBox 2">
+            <a:extLst>
+              <a:ext uri="{FF2B5EF4-FFF2-40B4-BE49-F238E27FC236}">
+                <a16:creationId xmlns:a16="http://schemas.microsoft.com/office/drawing/2014/main" id="{23254414-C9FD-7817-C8C3-17BE8AC59B65}"/>
+              </a:ext>
+            </a:extLst>
+          </p:cNvPr>
+          <p:cNvSpPr txBox="1"/>
+          <p:nvPr/>
+        </p:nvSpPr>
+        <p:spPr>
+          <a:xfrm>
+            <a:off x="0" y="0"/>
+            <a:ext cx="2127250" cy="523220"/>
+          </a:xfrm>
+          <a:prstGeom prst="rect">
+            <a:avLst/>
+          </a:prstGeom>
+          <a:noFill/>
+        </p:spPr>
+        <p:txBody>
+          <a:bodyPr wrap="square" rtlCol="0">
+            <a:spAutoFit/>
+          </a:bodyPr>
+          <a:lstStyle/>
+          <a:p>
+            <a:r>
+              <a:rPr lang="en-US" sz="2800" dirty="0"/>
+              <a:t>CURRENT</a:t>
+            </a:r>
+            <a:endParaRPr lang="en-GB" sz="2800" dirty="0"/>
+          </a:p>
+        </p:txBody>
+      </p:sp>
     </p:spTree>
     <p:extLst>
       <p:ext uri="{BB962C8B-B14F-4D97-AF65-F5344CB8AC3E}">
         <p14:creationId xmlns:p14="http://schemas.microsoft.com/office/powerpoint/2010/main" val="72113033"/>
+      </p:ext>
+    </p:extLst>
+  </p:cSld>
+  <p:clrMapOvr>
+    <a:masterClrMapping/>
+  </p:clrMapOvr>
+</p:sld>
+</file>
+
+<file path=ppt/slides/slide2.xml><?xml version="1.0" encoding="utf-8"?>
+<p:sld xmlns:a="http://schemas.openxmlformats.org/drawingml/2006/main" xmlns:r="http://schemas.openxmlformats.org/officeDocument/2006/relationships" xmlns:p="http://schemas.openxmlformats.org/presentationml/2006/main">
+  <p:cSld>
+    <p:spTree>
+      <p:nvGrpSpPr>
+        <p:cNvPr id="1" name="">
+          <a:extLst>
+            <a:ext uri="{FF2B5EF4-FFF2-40B4-BE49-F238E27FC236}">
+              <a16:creationId xmlns:a16="http://schemas.microsoft.com/office/drawing/2014/main" id="{7E346146-B82F-C9BA-9347-5B1D9E5F6438}"/>
+            </a:ext>
+          </a:extLst>
+        </p:cNvPr>
+        <p:cNvGrpSpPr/>
+        <p:nvPr/>
+      </p:nvGrpSpPr>
+      <p:grpSpPr>
+        <a:xfrm>
+          <a:off x="0" y="0"/>
+          <a:ext cx="0" cy="0"/>
+          <a:chOff x="0" y="0"/>
+          <a:chExt cx="0" cy="0"/>
+        </a:xfrm>
+      </p:grpSpPr>
+      <p:cxnSp>
+        <p:nvCxnSpPr>
+          <p:cNvPr id="50" name="Straight Arrow Connector 49">
+            <a:extLst>
+              <a:ext uri="{FF2B5EF4-FFF2-40B4-BE49-F238E27FC236}">
+                <a16:creationId xmlns:a16="http://schemas.microsoft.com/office/drawing/2014/main" id="{81F23D2E-2079-4704-8564-AA968031C0D2}"/>
+              </a:ext>
+            </a:extLst>
+          </p:cNvPr>
+          <p:cNvCxnSpPr>
+            <a:cxnSpLocks/>
+          </p:cNvCxnSpPr>
+          <p:nvPr/>
+        </p:nvCxnSpPr>
+        <p:spPr>
+          <a:xfrm>
+            <a:off x="1133475" y="9953343"/>
+            <a:ext cx="3193248" cy="1351291"/>
+          </a:xfrm>
+          <a:prstGeom prst="straightConnector1">
+            <a:avLst/>
+          </a:prstGeom>
+          <a:ln>
+            <a:tailEnd type="triangle"/>
+          </a:ln>
+        </p:spPr>
+        <p:style>
+          <a:lnRef idx="3">
+            <a:schemeClr val="accent1"/>
+          </a:lnRef>
+          <a:fillRef idx="0">
+            <a:schemeClr val="accent1"/>
+          </a:fillRef>
+          <a:effectRef idx="2">
+            <a:schemeClr val="accent1"/>
+          </a:effectRef>
+          <a:fontRef idx="minor">
+            <a:schemeClr val="tx1"/>
+          </a:fontRef>
+        </p:style>
+      </p:cxnSp>
+      <p:sp>
+        <p:nvSpPr>
+          <p:cNvPr id="4" name="Rectangle 3">
+            <a:extLst>
+              <a:ext uri="{FF2B5EF4-FFF2-40B4-BE49-F238E27FC236}">
+                <a16:creationId xmlns:a16="http://schemas.microsoft.com/office/drawing/2014/main" id="{F36FDDD2-8D43-A135-5329-ED20464B5E0F}"/>
+              </a:ext>
+            </a:extLst>
+          </p:cNvPr>
+          <p:cNvSpPr/>
+          <p:nvPr/>
+        </p:nvSpPr>
+        <p:spPr>
+          <a:xfrm>
+            <a:off x="694592" y="618391"/>
+            <a:ext cx="5468816" cy="1014525"/>
+          </a:xfrm>
+          <a:prstGeom prst="rect">
+            <a:avLst/>
+          </a:prstGeom>
+          <a:solidFill>
+            <a:schemeClr val="accent1">
+              <a:lumMod val="40000"/>
+              <a:lumOff val="60000"/>
+            </a:schemeClr>
+          </a:solidFill>
+        </p:spPr>
+        <p:style>
+          <a:lnRef idx="2">
+            <a:schemeClr val="accent1">
+              <a:shade val="15000"/>
+            </a:schemeClr>
+          </a:lnRef>
+          <a:fillRef idx="1">
+            <a:schemeClr val="accent1"/>
+          </a:fillRef>
+          <a:effectRef idx="0">
+            <a:schemeClr val="accent1"/>
+          </a:effectRef>
+          <a:fontRef idx="minor">
+            <a:schemeClr val="lt1"/>
+          </a:fontRef>
+        </p:style>
+        <p:txBody>
+          <a:bodyPr rtlCol="0" anchor="ctr"/>
+          <a:lstStyle/>
+          <a:p>
+            <a:pPr algn="ctr"/>
+            <a:r>
+              <a:rPr lang="en-US" sz="1400" dirty="0" err="1">
+                <a:solidFill>
+                  <a:sysClr val="windowText" lastClr="000000"/>
+                </a:solidFill>
+                <a:latin typeface="Abadi" panose="020B0604020104020204" pitchFamily="34" charset="0"/>
+              </a:rPr>
+              <a:t>SpliceAI</a:t>
+            </a:r>
+            <a:r>
+              <a:rPr lang="en-US" sz="1400" dirty="0">
+                <a:solidFill>
+                  <a:sysClr val="windowText" lastClr="000000"/>
+                </a:solidFill>
+                <a:latin typeface="Abadi" panose="020B0604020104020204" pitchFamily="34" charset="0"/>
+              </a:rPr>
+              <a:t> inferences generated across whole introns and filtered to remove signal below 0.05</a:t>
+            </a:r>
+          </a:p>
+          <a:p>
+            <a:pPr algn="ctr"/>
+            <a:r>
+              <a:rPr lang="en-US" sz="1400" dirty="0">
+                <a:solidFill>
+                  <a:sysClr val="windowText" lastClr="000000"/>
+                </a:solidFill>
+                <a:latin typeface="Abadi" panose="020B0604020104020204" pitchFamily="34" charset="0"/>
+              </a:rPr>
+              <a:t>794,192 splice site inferences</a:t>
+            </a:r>
+            <a:endParaRPr lang="en-GB" sz="1400" dirty="0">
+              <a:solidFill>
+                <a:sysClr val="windowText" lastClr="000000"/>
+              </a:solidFill>
+              <a:latin typeface="Abadi" panose="020B0604020104020204" pitchFamily="34" charset="0"/>
+            </a:endParaRPr>
+          </a:p>
+        </p:txBody>
+      </p:sp>
+      <p:sp>
+        <p:nvSpPr>
+          <p:cNvPr id="7" name="Rectangle 6">
+            <a:extLst>
+              <a:ext uri="{FF2B5EF4-FFF2-40B4-BE49-F238E27FC236}">
+                <a16:creationId xmlns:a16="http://schemas.microsoft.com/office/drawing/2014/main" id="{01EF1563-0C33-BE4B-F0E6-CE5448F4BE4F}"/>
+              </a:ext>
+            </a:extLst>
+          </p:cNvPr>
+          <p:cNvSpPr/>
+          <p:nvPr/>
+        </p:nvSpPr>
+        <p:spPr>
+          <a:xfrm>
+            <a:off x="694592" y="3464631"/>
+            <a:ext cx="5468816" cy="1015181"/>
+          </a:xfrm>
+          <a:prstGeom prst="rect">
+            <a:avLst/>
+          </a:prstGeom>
+          <a:solidFill>
+            <a:schemeClr val="accent1">
+              <a:lumMod val="40000"/>
+              <a:lumOff val="60000"/>
+            </a:schemeClr>
+          </a:solidFill>
+        </p:spPr>
+        <p:style>
+          <a:lnRef idx="2">
+            <a:schemeClr val="accent1">
+              <a:shade val="15000"/>
+            </a:schemeClr>
+          </a:lnRef>
+          <a:fillRef idx="1">
+            <a:schemeClr val="accent1"/>
+          </a:fillRef>
+          <a:effectRef idx="0">
+            <a:schemeClr val="accent1"/>
+          </a:effectRef>
+          <a:fontRef idx="minor">
+            <a:schemeClr val="lt1"/>
+          </a:fontRef>
+        </p:style>
+        <p:txBody>
+          <a:bodyPr rtlCol="0" anchor="ctr"/>
+          <a:lstStyle/>
+          <a:p>
+            <a:pPr algn="ctr"/>
+            <a:r>
+              <a:rPr lang="en-US" sz="1400" dirty="0">
+                <a:solidFill>
+                  <a:sysClr val="windowText" lastClr="000000"/>
+                </a:solidFill>
+                <a:latin typeface="Abadi" panose="020B0604020104020204" pitchFamily="34" charset="0"/>
+              </a:rPr>
+              <a:t>Create a new exonic bed to filter splice sites within 100 bp of exon boundaries</a:t>
+            </a:r>
+          </a:p>
+          <a:p>
+            <a:pPr algn="ctr"/>
+            <a:r>
+              <a:rPr lang="en-US" sz="1400" dirty="0">
+                <a:solidFill>
+                  <a:schemeClr val="accent1"/>
+                </a:solidFill>
+                <a:latin typeface="Abadi" panose="020B0604020104020204" pitchFamily="34" charset="0"/>
+              </a:rPr>
+              <a:t>50nt_exonic_loci.bed</a:t>
+            </a:r>
+          </a:p>
+        </p:txBody>
+      </p:sp>
+      <p:sp>
+        <p:nvSpPr>
+          <p:cNvPr id="8" name="Rectangle 7">
+            <a:extLst>
+              <a:ext uri="{FF2B5EF4-FFF2-40B4-BE49-F238E27FC236}">
+                <a16:creationId xmlns:a16="http://schemas.microsoft.com/office/drawing/2014/main" id="{855B8832-A681-E024-AF34-09BED346DF87}"/>
+              </a:ext>
+            </a:extLst>
+          </p:cNvPr>
+          <p:cNvSpPr/>
+          <p:nvPr/>
+        </p:nvSpPr>
+        <p:spPr>
+          <a:xfrm>
+            <a:off x="2127250" y="421541"/>
+            <a:ext cx="2603500" cy="393700"/>
+          </a:xfrm>
+          <a:prstGeom prst="rect">
+            <a:avLst/>
+          </a:prstGeom>
+          <a:ln w="19050">
+            <a:solidFill>
+              <a:schemeClr val="tx1"/>
+            </a:solidFill>
+          </a:ln>
+        </p:spPr>
+        <p:style>
+          <a:lnRef idx="2">
+            <a:schemeClr val="accent1"/>
+          </a:lnRef>
+          <a:fillRef idx="1">
+            <a:schemeClr val="lt1"/>
+          </a:fillRef>
+          <a:effectRef idx="0">
+            <a:schemeClr val="accent1"/>
+          </a:effectRef>
+          <a:fontRef idx="minor">
+            <a:schemeClr val="dk1"/>
+          </a:fontRef>
+        </p:style>
+        <p:txBody>
+          <a:bodyPr rtlCol="0" anchor="ctr"/>
+          <a:lstStyle/>
+          <a:p>
+            <a:pPr algn="ctr"/>
+            <a:r>
+              <a:rPr lang="en-US" b="1" dirty="0" err="1">
+                <a:latin typeface="Raleway" pitchFamily="2" charset="0"/>
+                <a:cs typeface="Posterama" panose="020B0504020200020000" pitchFamily="34" charset="0"/>
+              </a:rPr>
+              <a:t>SpliceAI</a:t>
+            </a:r>
+            <a:endParaRPr lang="en-GB" b="1" dirty="0">
+              <a:latin typeface="Raleway" pitchFamily="2" charset="0"/>
+              <a:cs typeface="Posterama" panose="020B0504020200020000" pitchFamily="34" charset="0"/>
+            </a:endParaRPr>
+          </a:p>
+        </p:txBody>
+      </p:sp>
+      <p:sp>
+        <p:nvSpPr>
+          <p:cNvPr id="20" name="Rectangle 19">
+            <a:extLst>
+              <a:ext uri="{FF2B5EF4-FFF2-40B4-BE49-F238E27FC236}">
+                <a16:creationId xmlns:a16="http://schemas.microsoft.com/office/drawing/2014/main" id="{827BB162-2D86-44A6-4FAC-AF1178C52E17}"/>
+              </a:ext>
+            </a:extLst>
+          </p:cNvPr>
+          <p:cNvSpPr/>
+          <p:nvPr/>
+        </p:nvSpPr>
+        <p:spPr>
+          <a:xfrm>
+            <a:off x="694592" y="1975814"/>
+            <a:ext cx="5468816" cy="1130298"/>
+          </a:xfrm>
+          <a:prstGeom prst="rect">
+            <a:avLst/>
+          </a:prstGeom>
+          <a:solidFill>
+            <a:schemeClr val="accent1">
+              <a:lumMod val="40000"/>
+              <a:lumOff val="60000"/>
+            </a:schemeClr>
+          </a:solidFill>
+        </p:spPr>
+        <p:style>
+          <a:lnRef idx="2">
+            <a:schemeClr val="accent1">
+              <a:shade val="15000"/>
+            </a:schemeClr>
+          </a:lnRef>
+          <a:fillRef idx="1">
+            <a:schemeClr val="accent1"/>
+          </a:fillRef>
+          <a:effectRef idx="0">
+            <a:schemeClr val="accent1"/>
+          </a:effectRef>
+          <a:fontRef idx="minor">
+            <a:schemeClr val="lt1"/>
+          </a:fontRef>
+        </p:style>
+        <p:txBody>
+          <a:bodyPr rtlCol="0" anchor="ctr"/>
+          <a:lstStyle/>
+          <a:p>
+            <a:pPr algn="ctr"/>
+            <a:r>
+              <a:rPr lang="en-US" sz="1400" dirty="0">
+                <a:solidFill>
+                  <a:sysClr val="windowText" lastClr="000000"/>
+                </a:solidFill>
+                <a:latin typeface="Abadi" panose="020B0604020104020204" pitchFamily="34" charset="0"/>
+              </a:rPr>
+              <a:t>Using </a:t>
+            </a:r>
+            <a:r>
+              <a:rPr lang="en-US" sz="1400" dirty="0" err="1">
+                <a:solidFill>
+                  <a:sysClr val="windowText" lastClr="000000"/>
+                </a:solidFill>
+                <a:latin typeface="Abadi" panose="020B0604020104020204" pitchFamily="34" charset="0"/>
+              </a:rPr>
+              <a:t>GRanges</a:t>
+            </a:r>
+            <a:r>
+              <a:rPr lang="en-US" sz="1400" dirty="0">
+                <a:solidFill>
+                  <a:sysClr val="windowText" lastClr="000000"/>
+                </a:solidFill>
+                <a:latin typeface="Abadi" panose="020B0604020104020204" pitchFamily="34" charset="0"/>
+              </a:rPr>
+              <a:t>, keep only “</a:t>
+            </a:r>
+            <a:r>
+              <a:rPr lang="en-US" sz="1400" dirty="0" err="1">
+                <a:solidFill>
+                  <a:sysClr val="windowText" lastClr="000000"/>
+                </a:solidFill>
+                <a:latin typeface="Abadi" panose="020B0604020104020204" pitchFamily="34" charset="0"/>
+              </a:rPr>
+              <a:t>protein_coding</a:t>
+            </a:r>
+            <a:r>
+              <a:rPr lang="en-US" sz="1400" dirty="0">
+                <a:solidFill>
+                  <a:sysClr val="windowText" lastClr="000000"/>
+                </a:solidFill>
+                <a:latin typeface="Abadi" panose="020B0604020104020204" pitchFamily="34" charset="0"/>
+              </a:rPr>
+              <a:t>” regions in Gencode.v49.annotation.gtf</a:t>
+            </a:r>
+          </a:p>
+          <a:p>
+            <a:pPr algn="ctr"/>
+            <a:r>
+              <a:rPr lang="en-US" sz="1400" dirty="0" err="1">
+                <a:solidFill>
+                  <a:schemeClr val="accent1"/>
+                </a:solidFill>
+                <a:latin typeface="Abadi" panose="020B0604020104020204" pitchFamily="34" charset="0"/>
+              </a:rPr>
+              <a:t>Protein_coding_sites.bed</a:t>
+            </a:r>
+            <a:endParaRPr lang="en-US" sz="1400" dirty="0">
+              <a:solidFill>
+                <a:schemeClr val="accent1"/>
+              </a:solidFill>
+              <a:latin typeface="Abadi" panose="020B0604020104020204" pitchFamily="34" charset="0"/>
+            </a:endParaRPr>
+          </a:p>
+        </p:txBody>
+      </p:sp>
+      <p:sp>
+        <p:nvSpPr>
+          <p:cNvPr id="24" name="Rectangle 23">
+            <a:extLst>
+              <a:ext uri="{FF2B5EF4-FFF2-40B4-BE49-F238E27FC236}">
+                <a16:creationId xmlns:a16="http://schemas.microsoft.com/office/drawing/2014/main" id="{B4CD350F-DE7C-600B-2C59-379360BFA161}"/>
+              </a:ext>
+            </a:extLst>
+          </p:cNvPr>
+          <p:cNvSpPr/>
+          <p:nvPr/>
+        </p:nvSpPr>
+        <p:spPr>
+          <a:xfrm>
+            <a:off x="2127250" y="1778964"/>
+            <a:ext cx="2603500" cy="393700"/>
+          </a:xfrm>
+          <a:prstGeom prst="rect">
+            <a:avLst/>
+          </a:prstGeom>
+          <a:ln w="19050">
+            <a:solidFill>
+              <a:schemeClr val="tx1"/>
+            </a:solidFill>
+          </a:ln>
+        </p:spPr>
+        <p:style>
+          <a:lnRef idx="2">
+            <a:schemeClr val="accent1"/>
+          </a:lnRef>
+          <a:fillRef idx="1">
+            <a:schemeClr val="lt1"/>
+          </a:fillRef>
+          <a:effectRef idx="0">
+            <a:schemeClr val="accent1"/>
+          </a:effectRef>
+          <a:fontRef idx="minor">
+            <a:schemeClr val="dk1"/>
+          </a:fontRef>
+        </p:style>
+        <p:txBody>
+          <a:bodyPr rtlCol="0" anchor="ctr"/>
+          <a:lstStyle/>
+          <a:p>
+            <a:pPr algn="ctr"/>
+            <a:r>
+              <a:rPr lang="en-US" b="1" dirty="0">
+                <a:latin typeface="Raleway" pitchFamily="2" charset="0"/>
+                <a:cs typeface="Posterama" panose="020B0504020200020000" pitchFamily="34" charset="0"/>
+              </a:rPr>
+              <a:t>Genomic Ranges</a:t>
+            </a:r>
+            <a:endParaRPr lang="en-GB" b="1" dirty="0">
+              <a:latin typeface="Raleway" pitchFamily="2" charset="0"/>
+              <a:cs typeface="Posterama" panose="020B0504020200020000" pitchFamily="34" charset="0"/>
+            </a:endParaRPr>
+          </a:p>
+        </p:txBody>
+      </p:sp>
+      <p:pic>
+        <p:nvPicPr>
+          <p:cNvPr id="6" name="Picture 5">
+            <a:extLst>
+              <a:ext uri="{FF2B5EF4-FFF2-40B4-BE49-F238E27FC236}">
+                <a16:creationId xmlns:a16="http://schemas.microsoft.com/office/drawing/2014/main" id="{3F9560D4-C02F-4894-8EAD-C2116003F603}"/>
+              </a:ext>
+            </a:extLst>
+          </p:cNvPr>
+          <p:cNvPicPr>
+            <a:picLocks noChangeAspect="1"/>
+          </p:cNvPicPr>
+          <p:nvPr/>
+        </p:nvPicPr>
+        <p:blipFill>
+          <a:blip r:embed="rId2"/>
+          <a:srcRect t="39377" r="20597"/>
+          <a:stretch>
+            <a:fillRect/>
+          </a:stretch>
+        </p:blipFill>
+        <p:spPr>
+          <a:xfrm>
+            <a:off x="574610" y="4838331"/>
+            <a:ext cx="5708780" cy="2303297"/>
+          </a:xfrm>
+          <a:prstGeom prst="rect">
+            <a:avLst/>
+          </a:prstGeom>
+          <a:ln w="19050">
+            <a:solidFill>
+              <a:schemeClr val="tx1"/>
+            </a:solidFill>
+          </a:ln>
+        </p:spPr>
+      </p:pic>
+      <p:cxnSp>
+        <p:nvCxnSpPr>
+          <p:cNvPr id="11" name="Straight Arrow Connector 10">
+            <a:extLst>
+              <a:ext uri="{FF2B5EF4-FFF2-40B4-BE49-F238E27FC236}">
+                <a16:creationId xmlns:a16="http://schemas.microsoft.com/office/drawing/2014/main" id="{88C74F9B-5EE0-B602-61CE-8304D5B4E442}"/>
+              </a:ext>
+            </a:extLst>
+          </p:cNvPr>
+          <p:cNvCxnSpPr>
+            <a:cxnSpLocks/>
+          </p:cNvCxnSpPr>
+          <p:nvPr/>
+        </p:nvCxnSpPr>
+        <p:spPr>
+          <a:xfrm>
+            <a:off x="4326723" y="4301330"/>
+            <a:ext cx="525671" cy="895520"/>
+          </a:xfrm>
+          <a:prstGeom prst="straightConnector1">
+            <a:avLst/>
+          </a:prstGeom>
+          <a:ln>
+            <a:tailEnd type="triangle"/>
+          </a:ln>
+        </p:spPr>
+        <p:style>
+          <a:lnRef idx="3">
+            <a:schemeClr val="accent1"/>
+          </a:lnRef>
+          <a:fillRef idx="0">
+            <a:schemeClr val="accent1"/>
+          </a:fillRef>
+          <a:effectRef idx="2">
+            <a:schemeClr val="accent1"/>
+          </a:effectRef>
+          <a:fontRef idx="minor">
+            <a:schemeClr val="tx1"/>
+          </a:fontRef>
+        </p:style>
+      </p:cxnSp>
+      <p:cxnSp>
+        <p:nvCxnSpPr>
+          <p:cNvPr id="14" name="Straight Arrow Connector 13">
+            <a:extLst>
+              <a:ext uri="{FF2B5EF4-FFF2-40B4-BE49-F238E27FC236}">
+                <a16:creationId xmlns:a16="http://schemas.microsoft.com/office/drawing/2014/main" id="{B939BD0A-E98E-7F5F-546D-DD10B661AE50}"/>
+              </a:ext>
+            </a:extLst>
+          </p:cNvPr>
+          <p:cNvCxnSpPr>
+            <a:cxnSpLocks/>
+          </p:cNvCxnSpPr>
+          <p:nvPr/>
+        </p:nvCxnSpPr>
+        <p:spPr>
+          <a:xfrm>
+            <a:off x="4625382" y="5650066"/>
+            <a:ext cx="0" cy="1382185"/>
+          </a:xfrm>
+          <a:prstGeom prst="straightConnector1">
+            <a:avLst/>
+          </a:prstGeom>
+          <a:ln>
+            <a:tailEnd type="triangle"/>
+          </a:ln>
+        </p:spPr>
+        <p:style>
+          <a:lnRef idx="3">
+            <a:schemeClr val="accent1"/>
+          </a:lnRef>
+          <a:fillRef idx="0">
+            <a:schemeClr val="accent1"/>
+          </a:fillRef>
+          <a:effectRef idx="2">
+            <a:schemeClr val="accent1"/>
+          </a:effectRef>
+          <a:fontRef idx="minor">
+            <a:schemeClr val="tx1"/>
+          </a:fontRef>
+        </p:style>
+      </p:cxnSp>
+      <p:sp>
+        <p:nvSpPr>
+          <p:cNvPr id="3" name="Rectangle 2">
+            <a:extLst>
+              <a:ext uri="{FF2B5EF4-FFF2-40B4-BE49-F238E27FC236}">
+                <a16:creationId xmlns:a16="http://schemas.microsoft.com/office/drawing/2014/main" id="{50C5DF0C-5B73-6093-285E-5B4DE3EA7FBF}"/>
+              </a:ext>
+            </a:extLst>
+          </p:cNvPr>
+          <p:cNvSpPr/>
+          <p:nvPr/>
+        </p:nvSpPr>
+        <p:spPr>
+          <a:xfrm>
+            <a:off x="4852394" y="5296053"/>
+            <a:ext cx="525671" cy="110969"/>
+          </a:xfrm>
+          <a:prstGeom prst="rect">
+            <a:avLst/>
+          </a:prstGeom>
+        </p:spPr>
+        <p:style>
+          <a:lnRef idx="2">
+            <a:schemeClr val="accent1">
+              <a:shade val="15000"/>
+            </a:schemeClr>
+          </a:lnRef>
+          <a:fillRef idx="1">
+            <a:schemeClr val="accent1"/>
+          </a:fillRef>
+          <a:effectRef idx="0">
+            <a:schemeClr val="accent1"/>
+          </a:effectRef>
+          <a:fontRef idx="minor">
+            <a:schemeClr val="lt1"/>
+          </a:fontRef>
+        </p:style>
+        <p:txBody>
+          <a:bodyPr rtlCol="0" anchor="ctr"/>
+          <a:lstStyle/>
+          <a:p>
+            <a:pPr algn="ctr"/>
+            <a:endParaRPr lang="en-GB"/>
+          </a:p>
+        </p:txBody>
+      </p:sp>
+      <p:cxnSp>
+        <p:nvCxnSpPr>
+          <p:cNvPr id="9" name="Straight Arrow Connector 8">
+            <a:extLst>
+              <a:ext uri="{FF2B5EF4-FFF2-40B4-BE49-F238E27FC236}">
+                <a16:creationId xmlns:a16="http://schemas.microsoft.com/office/drawing/2014/main" id="{AD512864-D50D-2AD6-7FBE-43E8FD8FE5D0}"/>
+              </a:ext>
+            </a:extLst>
+          </p:cNvPr>
+          <p:cNvCxnSpPr>
+            <a:cxnSpLocks/>
+          </p:cNvCxnSpPr>
+          <p:nvPr/>
+        </p:nvCxnSpPr>
+        <p:spPr>
+          <a:xfrm>
+            <a:off x="5234982" y="5650066"/>
+            <a:ext cx="0" cy="1382185"/>
+          </a:xfrm>
+          <a:prstGeom prst="straightConnector1">
+            <a:avLst/>
+          </a:prstGeom>
+          <a:ln>
+            <a:tailEnd type="triangle"/>
+          </a:ln>
+        </p:spPr>
+        <p:style>
+          <a:lnRef idx="3">
+            <a:schemeClr val="accent1"/>
+          </a:lnRef>
+          <a:fillRef idx="0">
+            <a:schemeClr val="accent1"/>
+          </a:fillRef>
+          <a:effectRef idx="2">
+            <a:schemeClr val="accent1"/>
+          </a:effectRef>
+          <a:fontRef idx="minor">
+            <a:schemeClr val="tx1"/>
+          </a:fontRef>
+        </p:style>
+      </p:cxnSp>
+      <p:sp>
+        <p:nvSpPr>
+          <p:cNvPr id="16" name="Rectangle 15">
+            <a:extLst>
+              <a:ext uri="{FF2B5EF4-FFF2-40B4-BE49-F238E27FC236}">
+                <a16:creationId xmlns:a16="http://schemas.microsoft.com/office/drawing/2014/main" id="{1A203446-C53A-CA4E-ED61-017C4703609F}"/>
+              </a:ext>
+            </a:extLst>
+          </p:cNvPr>
+          <p:cNvSpPr/>
+          <p:nvPr/>
+        </p:nvSpPr>
+        <p:spPr>
+          <a:xfrm>
+            <a:off x="114297" y="7537530"/>
+            <a:ext cx="6619875" cy="909119"/>
+          </a:xfrm>
+          <a:prstGeom prst="rect">
+            <a:avLst/>
+          </a:prstGeom>
+          <a:solidFill>
+            <a:schemeClr val="accent1">
+              <a:lumMod val="40000"/>
+              <a:lumOff val="60000"/>
+            </a:schemeClr>
+          </a:solidFill>
+        </p:spPr>
+        <p:style>
+          <a:lnRef idx="2">
+            <a:schemeClr val="accent1">
+              <a:shade val="15000"/>
+            </a:schemeClr>
+          </a:lnRef>
+          <a:fillRef idx="1">
+            <a:schemeClr val="accent1"/>
+          </a:fillRef>
+          <a:effectRef idx="0">
+            <a:schemeClr val="accent1"/>
+          </a:effectRef>
+          <a:fontRef idx="minor">
+            <a:schemeClr val="lt1"/>
+          </a:fontRef>
+        </p:style>
+        <p:txBody>
+          <a:bodyPr numCol="2" rtlCol="0" anchor="ctr"/>
+          <a:lstStyle/>
+          <a:p>
+            <a:pPr algn="ctr"/>
+            <a:endParaRPr lang="en-GB" sz="1400" dirty="0">
+              <a:solidFill>
+                <a:sysClr val="windowText" lastClr="000000"/>
+              </a:solidFill>
+              <a:latin typeface="SimHei" panose="020B0503020204020204" pitchFamily="49" charset="-122"/>
+              <a:ea typeface="SimHei" panose="020B0503020204020204" pitchFamily="49" charset="-122"/>
+            </a:endParaRPr>
+          </a:p>
+          <a:p>
+            <a:pPr algn="ctr"/>
+            <a:r>
+              <a:rPr lang="en-GB" sz="1400" dirty="0">
+                <a:solidFill>
+                  <a:sysClr val="windowText" lastClr="000000"/>
+                </a:solidFill>
+                <a:latin typeface="SimHei" panose="020B0503020204020204" pitchFamily="49" charset="-122"/>
+                <a:ea typeface="SimHei" panose="020B0503020204020204" pitchFamily="49" charset="-122"/>
+              </a:rPr>
+              <a:t>bedtools intersect -v (does not overlap) 50nt_exonic_loci.bed</a:t>
+            </a:r>
+            <a:br>
+              <a:rPr lang="en-GB" sz="1400" dirty="0">
+                <a:solidFill>
+                  <a:sysClr val="windowText" lastClr="000000"/>
+                </a:solidFill>
+                <a:latin typeface="SimHei" panose="020B0503020204020204" pitchFamily="49" charset="-122"/>
+                <a:ea typeface="SimHei" panose="020B0503020204020204" pitchFamily="49" charset="-122"/>
+              </a:rPr>
+            </a:br>
+            <a:r>
+              <a:rPr lang="en-GB" sz="1400" dirty="0">
+                <a:solidFill>
+                  <a:sysClr val="windowText" lastClr="000000"/>
+                </a:solidFill>
+                <a:latin typeface="SimHei" panose="020B0503020204020204" pitchFamily="49" charset="-122"/>
+                <a:ea typeface="SimHei" panose="020B0503020204020204" pitchFamily="49" charset="-122"/>
+              </a:rPr>
+              <a:t>== </a:t>
+            </a:r>
+            <a:r>
+              <a:rPr lang="en-GB" sz="1400" dirty="0" err="1">
+                <a:solidFill>
+                  <a:schemeClr val="accent1"/>
+                </a:solidFill>
+                <a:latin typeface="SimHei" panose="020B0503020204020204" pitchFamily="49" charset="-122"/>
+                <a:ea typeface="SimHei" panose="020B0503020204020204" pitchFamily="49" charset="-122"/>
+              </a:rPr>
+              <a:t>deep_intronic_sites.bed</a:t>
+            </a:r>
+            <a:endParaRPr lang="en-GB" sz="1400" dirty="0">
+              <a:solidFill>
+                <a:schemeClr val="accent1"/>
+              </a:solidFill>
+              <a:latin typeface="SimHei" panose="020B0503020204020204" pitchFamily="49" charset="-122"/>
+              <a:ea typeface="SimHei" panose="020B0503020204020204" pitchFamily="49" charset="-122"/>
+            </a:endParaRPr>
+          </a:p>
+          <a:p>
+            <a:pPr algn="ctr"/>
+            <a:endParaRPr lang="en-GB" sz="1400" dirty="0">
+              <a:solidFill>
+                <a:sysClr val="windowText" lastClr="000000"/>
+              </a:solidFill>
+              <a:latin typeface="SimHei" panose="020B0503020204020204" pitchFamily="49" charset="-122"/>
+              <a:ea typeface="SimHei" panose="020B0503020204020204" pitchFamily="49" charset="-122"/>
+            </a:endParaRPr>
+          </a:p>
+          <a:p>
+            <a:pPr algn="ctr"/>
+            <a:endParaRPr lang="en-GB" sz="1400" dirty="0">
+              <a:solidFill>
+                <a:sysClr val="windowText" lastClr="000000"/>
+              </a:solidFill>
+              <a:latin typeface="SimHei" panose="020B0503020204020204" pitchFamily="49" charset="-122"/>
+              <a:ea typeface="SimHei" panose="020B0503020204020204" pitchFamily="49" charset="-122"/>
+            </a:endParaRPr>
+          </a:p>
+          <a:p>
+            <a:pPr algn="ctr"/>
+            <a:endParaRPr lang="en-GB" sz="1400" dirty="0">
+              <a:solidFill>
+                <a:sysClr val="windowText" lastClr="000000"/>
+              </a:solidFill>
+              <a:latin typeface="SimHei" panose="020B0503020204020204" pitchFamily="49" charset="-122"/>
+              <a:ea typeface="SimHei" panose="020B0503020204020204" pitchFamily="49" charset="-122"/>
+            </a:endParaRPr>
+          </a:p>
+          <a:p>
+            <a:pPr algn="ctr"/>
+            <a:r>
+              <a:rPr lang="en-GB" sz="1400" dirty="0">
+                <a:solidFill>
+                  <a:sysClr val="windowText" lastClr="000000"/>
+                </a:solidFill>
+                <a:latin typeface="SimHei" panose="020B0503020204020204" pitchFamily="49" charset="-122"/>
+                <a:ea typeface="SimHei" panose="020B0503020204020204" pitchFamily="49" charset="-122"/>
+              </a:rPr>
+              <a:t>bedtools intersect -c (does overlap) 50nt_exonic_loci.bed</a:t>
+            </a:r>
+            <a:br>
+              <a:rPr lang="en-GB" sz="1400" dirty="0">
+                <a:solidFill>
+                  <a:sysClr val="windowText" lastClr="000000"/>
+                </a:solidFill>
+                <a:latin typeface="SimHei" panose="020B0503020204020204" pitchFamily="49" charset="-122"/>
+                <a:ea typeface="SimHei" panose="020B0503020204020204" pitchFamily="49" charset="-122"/>
+              </a:rPr>
+            </a:br>
+            <a:r>
+              <a:rPr lang="en-GB" sz="1400" dirty="0">
+                <a:solidFill>
+                  <a:sysClr val="windowText" lastClr="000000"/>
+                </a:solidFill>
+                <a:latin typeface="SimHei" panose="020B0503020204020204" pitchFamily="49" charset="-122"/>
+                <a:ea typeface="SimHei" panose="020B0503020204020204" pitchFamily="49" charset="-122"/>
+              </a:rPr>
+              <a:t>== </a:t>
+            </a:r>
+            <a:r>
+              <a:rPr lang="en-GB" sz="1400" dirty="0" err="1">
+                <a:solidFill>
+                  <a:schemeClr val="accent1"/>
+                </a:solidFill>
+                <a:latin typeface="SimHei" panose="020B0503020204020204" pitchFamily="49" charset="-122"/>
+                <a:ea typeface="SimHei" panose="020B0503020204020204" pitchFamily="49" charset="-122"/>
+              </a:rPr>
+              <a:t>exonic.bed</a:t>
+            </a:r>
+            <a:endParaRPr lang="en-US" sz="1400" dirty="0">
+              <a:solidFill>
+                <a:schemeClr val="accent1"/>
+              </a:solidFill>
+              <a:latin typeface="Abadi" panose="020B0604020104020204" pitchFamily="34" charset="0"/>
+            </a:endParaRPr>
+          </a:p>
+          <a:p>
+            <a:pPr algn="ctr"/>
+            <a:endParaRPr lang="en-US" dirty="0">
+              <a:solidFill>
+                <a:sysClr val="windowText" lastClr="000000"/>
+              </a:solidFill>
+              <a:latin typeface="Abadi" panose="020B0604020104020204" pitchFamily="34" charset="0"/>
+            </a:endParaRPr>
+          </a:p>
+        </p:txBody>
+      </p:sp>
+      <p:sp>
+        <p:nvSpPr>
+          <p:cNvPr id="10" name="Rectangle 9">
+            <a:extLst>
+              <a:ext uri="{FF2B5EF4-FFF2-40B4-BE49-F238E27FC236}">
+                <a16:creationId xmlns:a16="http://schemas.microsoft.com/office/drawing/2014/main" id="{7986058C-5F08-E956-A26E-19F8D99BD785}"/>
+              </a:ext>
+            </a:extLst>
+          </p:cNvPr>
+          <p:cNvSpPr/>
+          <p:nvPr/>
+        </p:nvSpPr>
+        <p:spPr>
+          <a:xfrm>
+            <a:off x="2127250" y="7221972"/>
+            <a:ext cx="2603500" cy="393700"/>
+          </a:xfrm>
+          <a:prstGeom prst="rect">
+            <a:avLst/>
+          </a:prstGeom>
+          <a:ln w="19050">
+            <a:solidFill>
+              <a:schemeClr val="tx1"/>
+            </a:solidFill>
+          </a:ln>
+        </p:spPr>
+        <p:style>
+          <a:lnRef idx="2">
+            <a:schemeClr val="accent1"/>
+          </a:lnRef>
+          <a:fillRef idx="1">
+            <a:schemeClr val="lt1"/>
+          </a:fillRef>
+          <a:effectRef idx="0">
+            <a:schemeClr val="accent1"/>
+          </a:effectRef>
+          <a:fontRef idx="minor">
+            <a:schemeClr val="dk1"/>
+          </a:fontRef>
+        </p:style>
+        <p:txBody>
+          <a:bodyPr rtlCol="0" anchor="ctr"/>
+          <a:lstStyle/>
+          <a:p>
+            <a:pPr algn="ctr"/>
+            <a:r>
+              <a:rPr lang="en-US" b="1" dirty="0">
+                <a:latin typeface="Raleway" pitchFamily="2" charset="0"/>
+                <a:cs typeface="Posterama" panose="020B0504020200020000" pitchFamily="34" charset="0"/>
+              </a:rPr>
+              <a:t>Bedtools intersect</a:t>
+            </a:r>
+            <a:endParaRPr lang="en-GB" b="1" dirty="0">
+              <a:latin typeface="Raleway" pitchFamily="2" charset="0"/>
+              <a:cs typeface="Posterama" panose="020B0504020200020000" pitchFamily="34" charset="0"/>
+            </a:endParaRPr>
+          </a:p>
+        </p:txBody>
+      </p:sp>
+      <p:sp>
+        <p:nvSpPr>
+          <p:cNvPr id="21" name="Rectangle 20">
+            <a:extLst>
+              <a:ext uri="{FF2B5EF4-FFF2-40B4-BE49-F238E27FC236}">
+                <a16:creationId xmlns:a16="http://schemas.microsoft.com/office/drawing/2014/main" id="{A78BE0AB-C7A5-4A64-AB8A-3FDFA8307852}"/>
+              </a:ext>
+            </a:extLst>
+          </p:cNvPr>
+          <p:cNvSpPr/>
+          <p:nvPr/>
+        </p:nvSpPr>
+        <p:spPr>
+          <a:xfrm>
+            <a:off x="1847054" y="3227259"/>
+            <a:ext cx="3154360" cy="393700"/>
+          </a:xfrm>
+          <a:prstGeom prst="rect">
+            <a:avLst/>
+          </a:prstGeom>
+          <a:ln w="19050">
+            <a:solidFill>
+              <a:schemeClr val="tx1"/>
+            </a:solidFill>
+          </a:ln>
+        </p:spPr>
+        <p:style>
+          <a:lnRef idx="2">
+            <a:schemeClr val="accent1"/>
+          </a:lnRef>
+          <a:fillRef idx="1">
+            <a:schemeClr val="lt1"/>
+          </a:fillRef>
+          <a:effectRef idx="0">
+            <a:schemeClr val="accent1"/>
+          </a:effectRef>
+          <a:fontRef idx="minor">
+            <a:schemeClr val="dk1"/>
+          </a:fontRef>
+        </p:style>
+        <p:txBody>
+          <a:bodyPr rtlCol="0" anchor="ctr"/>
+          <a:lstStyle/>
+          <a:p>
+            <a:pPr algn="ctr"/>
+            <a:r>
+              <a:rPr lang="en-US" b="1" dirty="0">
+                <a:latin typeface="Raleway" pitchFamily="2" charset="0"/>
+                <a:cs typeface="Posterama" panose="020B0504020200020000" pitchFamily="34" charset="0"/>
+              </a:rPr>
+              <a:t>VAST-DB MAIN-PSI-TABLE</a:t>
+            </a:r>
+            <a:endParaRPr lang="en-GB" b="1" dirty="0">
+              <a:latin typeface="Raleway" pitchFamily="2" charset="0"/>
+              <a:cs typeface="Posterama" panose="020B0504020200020000" pitchFamily="34" charset="0"/>
+            </a:endParaRPr>
+          </a:p>
+        </p:txBody>
+      </p:sp>
+      <p:sp>
+        <p:nvSpPr>
+          <p:cNvPr id="25" name="Rectangle 24">
+            <a:extLst>
+              <a:ext uri="{FF2B5EF4-FFF2-40B4-BE49-F238E27FC236}">
+                <a16:creationId xmlns:a16="http://schemas.microsoft.com/office/drawing/2014/main" id="{0639E164-C200-CA46-95AD-8E6D551016C1}"/>
+              </a:ext>
+            </a:extLst>
+          </p:cNvPr>
+          <p:cNvSpPr/>
+          <p:nvPr/>
+        </p:nvSpPr>
+        <p:spPr>
+          <a:xfrm>
+            <a:off x="114298" y="8522406"/>
+            <a:ext cx="3314702" cy="1488369"/>
+          </a:xfrm>
+          <a:prstGeom prst="rect">
+            <a:avLst/>
+          </a:prstGeom>
+          <a:solidFill>
+            <a:schemeClr val="accent1">
+              <a:lumMod val="40000"/>
+              <a:lumOff val="60000"/>
+            </a:schemeClr>
+          </a:solidFill>
+        </p:spPr>
+        <p:style>
+          <a:lnRef idx="2">
+            <a:schemeClr val="accent1">
+              <a:shade val="15000"/>
+            </a:schemeClr>
+          </a:lnRef>
+          <a:fillRef idx="1">
+            <a:schemeClr val="accent1"/>
+          </a:fillRef>
+          <a:effectRef idx="0">
+            <a:schemeClr val="accent1"/>
+          </a:effectRef>
+          <a:fontRef idx="minor">
+            <a:schemeClr val="lt1"/>
+          </a:fontRef>
+        </p:style>
+        <p:txBody>
+          <a:bodyPr numCol="2" rtlCol="0" anchor="ctr"/>
+          <a:lstStyle/>
+          <a:p>
+            <a:pPr algn="ctr"/>
+            <a:r>
+              <a:rPr lang="en-US" sz="1200" dirty="0">
+                <a:solidFill>
+                  <a:schemeClr val="tx1"/>
+                </a:solidFill>
+                <a:latin typeface="Abadi" panose="020B0604020104020204" pitchFamily="34" charset="0"/>
+              </a:rPr>
+              <a:t>Intersect </a:t>
+            </a:r>
+            <a:r>
+              <a:rPr lang="en-US" sz="1200" dirty="0" err="1">
+                <a:solidFill>
+                  <a:schemeClr val="tx1"/>
+                </a:solidFill>
+                <a:latin typeface="Abadi" panose="020B0604020104020204" pitchFamily="34" charset="0"/>
+              </a:rPr>
+              <a:t>deep_intronic_sites.bed</a:t>
+            </a:r>
+            <a:r>
+              <a:rPr lang="en-US" sz="1200" dirty="0">
+                <a:solidFill>
+                  <a:schemeClr val="tx1"/>
+                </a:solidFill>
+                <a:latin typeface="Abadi" panose="020B0604020104020204" pitchFamily="34" charset="0"/>
+              </a:rPr>
+              <a:t> </a:t>
+            </a:r>
+            <a:br>
+              <a:rPr lang="en-US" sz="1200" dirty="0">
+                <a:solidFill>
+                  <a:schemeClr val="accent1"/>
+                </a:solidFill>
+                <a:latin typeface="Abadi" panose="020B0604020104020204" pitchFamily="34" charset="0"/>
+              </a:rPr>
+            </a:br>
+            <a:r>
+              <a:rPr lang="en-US" sz="1200" dirty="0" err="1">
+                <a:solidFill>
+                  <a:schemeClr val="accent1"/>
+                </a:solidFill>
+                <a:latin typeface="Abadi" panose="020B0604020104020204" pitchFamily="34" charset="0"/>
+              </a:rPr>
+              <a:t>RBPnet</a:t>
+            </a:r>
+            <a:r>
+              <a:rPr lang="en-US" sz="1200" dirty="0">
+                <a:solidFill>
+                  <a:schemeClr val="accent1"/>
+                </a:solidFill>
+                <a:latin typeface="Abadi" panose="020B0604020104020204" pitchFamily="34" charset="0"/>
+              </a:rPr>
+              <a:t> PRPF8 predictions </a:t>
+            </a:r>
+          </a:p>
+          <a:p>
+            <a:pPr algn="ctr"/>
+            <a:r>
+              <a:rPr lang="en-US" sz="1200" dirty="0">
+                <a:solidFill>
+                  <a:schemeClr val="tx1"/>
+                </a:solidFill>
+                <a:latin typeface="Abadi" panose="020B0604020104020204" pitchFamily="34" charset="0"/>
+              </a:rPr>
+              <a:t>and/or </a:t>
+            </a:r>
+            <a:r>
+              <a:rPr lang="en-US" sz="1200" dirty="0">
+                <a:solidFill>
+                  <a:schemeClr val="accent1"/>
+                </a:solidFill>
+                <a:latin typeface="Abadi" panose="020B0604020104020204" pitchFamily="34" charset="0"/>
+              </a:rPr>
+              <a:t>PRPF8 Peaks </a:t>
+            </a:r>
+          </a:p>
+          <a:p>
+            <a:pPr algn="ctr"/>
+            <a:r>
+              <a:rPr lang="en-US" sz="1200" dirty="0">
+                <a:solidFill>
+                  <a:schemeClr val="tx1"/>
+                </a:solidFill>
+                <a:latin typeface="Abadi" panose="020B0604020104020204" pitchFamily="34" charset="0"/>
+              </a:rPr>
+              <a:t>and/or </a:t>
+            </a:r>
+            <a:r>
+              <a:rPr lang="en-US" sz="1200" dirty="0" err="1">
+                <a:solidFill>
+                  <a:schemeClr val="accent1"/>
+                </a:solidFill>
+                <a:latin typeface="Abadi" panose="020B0604020104020204" pitchFamily="34" charset="0"/>
+              </a:rPr>
+              <a:t>SmB</a:t>
+            </a:r>
+            <a:r>
+              <a:rPr lang="en-US" sz="1200" dirty="0">
+                <a:solidFill>
+                  <a:schemeClr val="accent1"/>
+                </a:solidFill>
+                <a:latin typeface="Abadi" panose="020B0604020104020204" pitchFamily="34" charset="0"/>
+              </a:rPr>
+              <a:t> Peaks</a:t>
+            </a:r>
+          </a:p>
+          <a:p>
+            <a:pPr algn="ctr"/>
+            <a:r>
+              <a:rPr lang="en-US" sz="1200" dirty="0">
+                <a:solidFill>
+                  <a:schemeClr val="tx1"/>
+                </a:solidFill>
+                <a:latin typeface="Abadi" panose="020B0604020104020204" pitchFamily="34" charset="0"/>
+              </a:rPr>
+              <a:t>== </a:t>
+            </a:r>
+            <a:r>
+              <a:rPr lang="en-US" sz="1200" dirty="0" err="1">
+                <a:solidFill>
+                  <a:schemeClr val="tx1"/>
+                </a:solidFill>
+                <a:latin typeface="Abadi" panose="020B0604020104020204" pitchFamily="34" charset="0"/>
+              </a:rPr>
+              <a:t>decoys.bed</a:t>
+            </a:r>
+            <a:br>
+              <a:rPr lang="en-US" sz="1200" dirty="0">
+                <a:solidFill>
+                  <a:schemeClr val="tx1"/>
+                </a:solidFill>
+                <a:latin typeface="Abadi" panose="020B0604020104020204" pitchFamily="34" charset="0"/>
+              </a:rPr>
+            </a:br>
+            <a:r>
+              <a:rPr lang="en-US" sz="1200" dirty="0">
+                <a:solidFill>
+                  <a:schemeClr val="tx1"/>
+                </a:solidFill>
+                <a:latin typeface="Abadi" panose="020B0604020104020204" pitchFamily="34" charset="0"/>
+              </a:rPr>
+              <a:t>Intersect </a:t>
+            </a:r>
+            <a:r>
+              <a:rPr lang="en-US" sz="1200" dirty="0" err="1">
+                <a:solidFill>
+                  <a:schemeClr val="tx1"/>
+                </a:solidFill>
+                <a:latin typeface="Abadi" panose="020B0604020104020204" pitchFamily="34" charset="0"/>
+              </a:rPr>
+              <a:t>deep_intronic_sites.bed</a:t>
+            </a:r>
+            <a:br>
+              <a:rPr lang="en-US" sz="1200" dirty="0">
+                <a:solidFill>
+                  <a:schemeClr val="tx1"/>
+                </a:solidFill>
+                <a:latin typeface="Abadi" panose="020B0604020104020204" pitchFamily="34" charset="0"/>
+              </a:rPr>
+            </a:br>
+            <a:r>
+              <a:rPr lang="en-US" sz="1200" dirty="0">
+                <a:solidFill>
+                  <a:schemeClr val="tx1"/>
+                </a:solidFill>
+                <a:latin typeface="Abadi" panose="020B0604020104020204" pitchFamily="34" charset="0"/>
+              </a:rPr>
+              <a:t>None of </a:t>
+            </a:r>
+            <a:r>
+              <a:rPr lang="en-US" sz="1200" dirty="0" err="1">
+                <a:solidFill>
+                  <a:schemeClr val="accent1"/>
+                </a:solidFill>
+                <a:latin typeface="Abadi" panose="020B0604020104020204" pitchFamily="34" charset="0"/>
+              </a:rPr>
+              <a:t>RBPnet</a:t>
+            </a:r>
+            <a:r>
+              <a:rPr lang="en-US" sz="1200" dirty="0">
+                <a:solidFill>
+                  <a:schemeClr val="accent1"/>
+                </a:solidFill>
+                <a:latin typeface="Abadi" panose="020B0604020104020204" pitchFamily="34" charset="0"/>
+              </a:rPr>
+              <a:t> PRPF8 predictions </a:t>
+            </a:r>
+          </a:p>
+          <a:p>
+            <a:pPr algn="ctr"/>
+            <a:r>
+              <a:rPr lang="en-US" sz="1200" dirty="0">
+                <a:solidFill>
+                  <a:schemeClr val="tx1"/>
+                </a:solidFill>
+                <a:latin typeface="Abadi" panose="020B0604020104020204" pitchFamily="34" charset="0"/>
+              </a:rPr>
+              <a:t>or </a:t>
+            </a:r>
+            <a:r>
+              <a:rPr lang="en-US" sz="1200" dirty="0">
+                <a:solidFill>
+                  <a:schemeClr val="accent1"/>
+                </a:solidFill>
+                <a:latin typeface="Abadi" panose="020B0604020104020204" pitchFamily="34" charset="0"/>
+              </a:rPr>
+              <a:t>PRPF8 Peaks </a:t>
+            </a:r>
+          </a:p>
+          <a:p>
+            <a:pPr algn="ctr"/>
+            <a:r>
+              <a:rPr lang="en-US" sz="1200" dirty="0">
+                <a:solidFill>
+                  <a:schemeClr val="tx1"/>
+                </a:solidFill>
+                <a:latin typeface="Abadi" panose="020B0604020104020204" pitchFamily="34" charset="0"/>
+              </a:rPr>
+              <a:t>or </a:t>
+            </a:r>
+            <a:r>
+              <a:rPr lang="en-US" sz="1200" dirty="0" err="1">
+                <a:solidFill>
+                  <a:schemeClr val="accent1"/>
+                </a:solidFill>
+                <a:latin typeface="Abadi" panose="020B0604020104020204" pitchFamily="34" charset="0"/>
+              </a:rPr>
+              <a:t>SmB</a:t>
+            </a:r>
+            <a:r>
+              <a:rPr lang="en-US" sz="1200" dirty="0">
+                <a:solidFill>
+                  <a:schemeClr val="accent1"/>
+                </a:solidFill>
+                <a:latin typeface="Abadi" panose="020B0604020104020204" pitchFamily="34" charset="0"/>
+              </a:rPr>
+              <a:t> Peaks</a:t>
+            </a:r>
+          </a:p>
+          <a:p>
+            <a:pPr algn="ctr"/>
+            <a:r>
+              <a:rPr lang="en-US" sz="1200" dirty="0">
+                <a:solidFill>
+                  <a:schemeClr val="tx1"/>
+                </a:solidFill>
+                <a:latin typeface="Abadi" panose="020B0604020104020204" pitchFamily="34" charset="0"/>
+              </a:rPr>
+              <a:t>== </a:t>
+            </a:r>
+            <a:r>
+              <a:rPr lang="en-US" sz="1200" dirty="0" err="1">
+                <a:solidFill>
+                  <a:schemeClr val="tx1"/>
+                </a:solidFill>
+                <a:latin typeface="Abadi" panose="020B0604020104020204" pitchFamily="34" charset="0"/>
+              </a:rPr>
+              <a:t>cryptic_sites.bed</a:t>
+            </a:r>
+            <a:endParaRPr lang="en-US" sz="1200" dirty="0">
+              <a:solidFill>
+                <a:schemeClr val="tx1"/>
+              </a:solidFill>
+              <a:latin typeface="Abadi" panose="020B0604020104020204" pitchFamily="34" charset="0"/>
+            </a:endParaRPr>
+          </a:p>
+        </p:txBody>
+      </p:sp>
+      <p:sp>
+        <p:nvSpPr>
+          <p:cNvPr id="28" name="Rectangle 27">
+            <a:extLst>
+              <a:ext uri="{FF2B5EF4-FFF2-40B4-BE49-F238E27FC236}">
+                <a16:creationId xmlns:a16="http://schemas.microsoft.com/office/drawing/2014/main" id="{8E9C454C-497A-EEF9-9806-1AD272B5DBF2}"/>
+              </a:ext>
+            </a:extLst>
+          </p:cNvPr>
+          <p:cNvSpPr/>
+          <p:nvPr/>
+        </p:nvSpPr>
+        <p:spPr>
+          <a:xfrm>
+            <a:off x="4051997" y="8656821"/>
+            <a:ext cx="2346918" cy="909119"/>
+          </a:xfrm>
+          <a:prstGeom prst="rect">
+            <a:avLst/>
+          </a:prstGeom>
+          <a:solidFill>
+            <a:schemeClr val="accent1">
+              <a:lumMod val="40000"/>
+              <a:lumOff val="60000"/>
+            </a:schemeClr>
+          </a:solidFill>
+        </p:spPr>
+        <p:style>
+          <a:lnRef idx="2">
+            <a:schemeClr val="accent1">
+              <a:shade val="15000"/>
+            </a:schemeClr>
+          </a:lnRef>
+          <a:fillRef idx="1">
+            <a:schemeClr val="accent1"/>
+          </a:fillRef>
+          <a:effectRef idx="0">
+            <a:schemeClr val="accent1"/>
+          </a:effectRef>
+          <a:fontRef idx="minor">
+            <a:schemeClr val="lt1"/>
+          </a:fontRef>
+        </p:style>
+        <p:txBody>
+          <a:bodyPr numCol="1" rtlCol="0" anchor="ctr"/>
+          <a:lstStyle/>
+          <a:p>
+            <a:pPr algn="ctr"/>
+            <a:r>
+              <a:rPr lang="en-US" sz="1200" dirty="0">
+                <a:solidFill>
+                  <a:schemeClr val="tx1"/>
+                </a:solidFill>
+                <a:latin typeface="Abadi" panose="020B0604020104020204" pitchFamily="34" charset="0"/>
+              </a:rPr>
+              <a:t>Intersect </a:t>
+            </a:r>
+            <a:r>
+              <a:rPr lang="en-US" sz="1200" dirty="0" err="1">
+                <a:solidFill>
+                  <a:schemeClr val="tx1"/>
+                </a:solidFill>
+                <a:latin typeface="Abadi" panose="020B0604020104020204" pitchFamily="34" charset="0"/>
+              </a:rPr>
+              <a:t>exonic.bed</a:t>
+            </a:r>
+            <a:r>
+              <a:rPr lang="en-US" sz="1200" dirty="0">
+                <a:solidFill>
+                  <a:schemeClr val="tx1"/>
+                </a:solidFill>
+                <a:latin typeface="Abadi" panose="020B0604020104020204" pitchFamily="34" charset="0"/>
+              </a:rPr>
+              <a:t> -v</a:t>
+            </a:r>
+            <a:br>
+              <a:rPr lang="en-US" sz="1200" dirty="0">
+                <a:solidFill>
+                  <a:schemeClr val="accent1"/>
+                </a:solidFill>
+                <a:latin typeface="Abadi" panose="020B0604020104020204" pitchFamily="34" charset="0"/>
+              </a:rPr>
+            </a:br>
+            <a:r>
+              <a:rPr lang="en-US" sz="1200" dirty="0" err="1">
+                <a:solidFill>
+                  <a:schemeClr val="accent1"/>
+                </a:solidFill>
+                <a:latin typeface="Abadi" panose="020B0604020104020204" pitchFamily="34" charset="0"/>
+              </a:rPr>
+              <a:t>canonical_splice_sites.bed</a:t>
+            </a:r>
+            <a:endParaRPr lang="en-US" sz="1200" dirty="0">
+              <a:solidFill>
+                <a:schemeClr val="accent1"/>
+              </a:solidFill>
+              <a:latin typeface="Abadi" panose="020B0604020104020204" pitchFamily="34" charset="0"/>
+            </a:endParaRPr>
+          </a:p>
+          <a:p>
+            <a:pPr algn="ctr"/>
+            <a:r>
+              <a:rPr lang="en-US" sz="1200" dirty="0">
+                <a:solidFill>
+                  <a:schemeClr val="tx1"/>
+                </a:solidFill>
+                <a:latin typeface="Abadi" panose="020B0604020104020204" pitchFamily="34" charset="0"/>
+              </a:rPr>
+              <a:t>== alt5_splice_sites.bed</a:t>
+            </a:r>
+          </a:p>
+        </p:txBody>
+      </p:sp>
+      <p:sp>
+        <p:nvSpPr>
+          <p:cNvPr id="30" name="Rectangle 29">
+            <a:extLst>
+              <a:ext uri="{FF2B5EF4-FFF2-40B4-BE49-F238E27FC236}">
+                <a16:creationId xmlns:a16="http://schemas.microsoft.com/office/drawing/2014/main" id="{BBCDD2FF-01BE-CB9E-D112-F3133CBDA1A6}"/>
+              </a:ext>
+            </a:extLst>
+          </p:cNvPr>
+          <p:cNvSpPr/>
+          <p:nvPr/>
+        </p:nvSpPr>
+        <p:spPr>
+          <a:xfrm>
+            <a:off x="114297" y="10167597"/>
+            <a:ext cx="3879434" cy="1778964"/>
+          </a:xfrm>
+          <a:prstGeom prst="rect">
+            <a:avLst/>
+          </a:prstGeom>
+          <a:solidFill>
+            <a:schemeClr val="accent1">
+              <a:lumMod val="40000"/>
+              <a:lumOff val="60000"/>
+            </a:schemeClr>
+          </a:solidFill>
+        </p:spPr>
+        <p:style>
+          <a:lnRef idx="2">
+            <a:schemeClr val="accent1">
+              <a:shade val="15000"/>
+            </a:schemeClr>
+          </a:lnRef>
+          <a:fillRef idx="1">
+            <a:schemeClr val="accent1"/>
+          </a:fillRef>
+          <a:effectRef idx="0">
+            <a:schemeClr val="accent1"/>
+          </a:effectRef>
+          <a:fontRef idx="minor">
+            <a:schemeClr val="lt1"/>
+          </a:fontRef>
+        </p:style>
+        <p:txBody>
+          <a:bodyPr numCol="1" rtlCol="0" anchor="ctr"/>
+          <a:lstStyle/>
+          <a:p>
+            <a:pPr algn="ctr"/>
+            <a:r>
+              <a:rPr lang="en-US" sz="1200" dirty="0">
+                <a:solidFill>
+                  <a:schemeClr val="tx1"/>
+                </a:solidFill>
+                <a:latin typeface="Abadi" panose="020B0604020104020204" pitchFamily="34" charset="0"/>
+              </a:rPr>
+              <a:t>Create new dataset, intersect </a:t>
+            </a:r>
+            <a:r>
+              <a:rPr lang="en-US" sz="1200" dirty="0" err="1">
+                <a:solidFill>
+                  <a:schemeClr val="tx1"/>
+                </a:solidFill>
+                <a:latin typeface="Abadi" panose="020B0604020104020204" pitchFamily="34" charset="0"/>
+              </a:rPr>
+              <a:t>Canonical_splice_sites.bed</a:t>
+            </a:r>
+            <a:endParaRPr lang="en-US" sz="1200" dirty="0">
+              <a:solidFill>
+                <a:schemeClr val="tx1"/>
+              </a:solidFill>
+              <a:latin typeface="Abadi" panose="020B0604020104020204" pitchFamily="34" charset="0"/>
+            </a:endParaRPr>
+          </a:p>
+          <a:p>
+            <a:pPr algn="ctr"/>
+            <a:r>
+              <a:rPr lang="en-US" sz="1200" dirty="0" err="1">
+                <a:solidFill>
+                  <a:schemeClr val="accent1"/>
+                </a:solidFill>
+                <a:latin typeface="Abadi" panose="020B0604020104020204" pitchFamily="34" charset="0"/>
+              </a:rPr>
+              <a:t>RBPnet</a:t>
+            </a:r>
+            <a:r>
+              <a:rPr lang="en-US" sz="1200" dirty="0">
+                <a:solidFill>
+                  <a:schemeClr val="accent1"/>
+                </a:solidFill>
+                <a:latin typeface="Abadi" panose="020B0604020104020204" pitchFamily="34" charset="0"/>
+              </a:rPr>
+              <a:t> PRPF8 predictions </a:t>
+            </a:r>
+          </a:p>
+          <a:p>
+            <a:pPr algn="ctr"/>
+            <a:r>
+              <a:rPr lang="en-US" sz="1200" dirty="0">
+                <a:solidFill>
+                  <a:schemeClr val="tx1"/>
+                </a:solidFill>
+                <a:latin typeface="Abadi" panose="020B0604020104020204" pitchFamily="34" charset="0"/>
+              </a:rPr>
+              <a:t>and/or </a:t>
+            </a:r>
+            <a:r>
+              <a:rPr lang="en-US" sz="1200" dirty="0">
+                <a:solidFill>
+                  <a:schemeClr val="accent1"/>
+                </a:solidFill>
+                <a:latin typeface="Abadi" panose="020B0604020104020204" pitchFamily="34" charset="0"/>
+              </a:rPr>
+              <a:t>PRPF8 Peaks </a:t>
+            </a:r>
+          </a:p>
+          <a:p>
+            <a:pPr algn="ctr"/>
+            <a:r>
+              <a:rPr lang="en-US" sz="1200" dirty="0">
+                <a:solidFill>
+                  <a:schemeClr val="tx1"/>
+                </a:solidFill>
+                <a:latin typeface="Abadi" panose="020B0604020104020204" pitchFamily="34" charset="0"/>
+              </a:rPr>
+              <a:t>and/or </a:t>
+            </a:r>
+            <a:r>
+              <a:rPr lang="en-US" sz="1200" dirty="0" err="1">
+                <a:solidFill>
+                  <a:schemeClr val="accent1"/>
+                </a:solidFill>
+                <a:latin typeface="Abadi" panose="020B0604020104020204" pitchFamily="34" charset="0"/>
+              </a:rPr>
+              <a:t>SmB</a:t>
+            </a:r>
+            <a:r>
+              <a:rPr lang="en-US" sz="1200" dirty="0">
+                <a:solidFill>
+                  <a:schemeClr val="accent1"/>
+                </a:solidFill>
+                <a:latin typeface="Abadi" panose="020B0604020104020204" pitchFamily="34" charset="0"/>
+              </a:rPr>
+              <a:t> Peaks</a:t>
+            </a:r>
+          </a:p>
+          <a:p>
+            <a:pPr algn="ctr"/>
+            <a:br>
+              <a:rPr lang="en-US" sz="1200" dirty="0">
+                <a:solidFill>
+                  <a:schemeClr val="tx1"/>
+                </a:solidFill>
+                <a:latin typeface="Abadi" panose="020B0604020104020204" pitchFamily="34" charset="0"/>
+              </a:rPr>
+            </a:br>
+            <a:r>
+              <a:rPr lang="en-US" sz="1200" dirty="0">
+                <a:solidFill>
+                  <a:schemeClr val="tx1"/>
+                </a:solidFill>
+                <a:latin typeface="Abadi" panose="020B0604020104020204" pitchFamily="34" charset="0"/>
+              </a:rPr>
+              <a:t>Build overlap with introns and </a:t>
+            </a:r>
+            <a:r>
+              <a:rPr lang="en-US" sz="1200" dirty="0" err="1">
+                <a:solidFill>
+                  <a:schemeClr val="tx1"/>
+                </a:solidFill>
+                <a:latin typeface="Abadi" panose="020B0604020104020204" pitchFamily="34" charset="0"/>
+              </a:rPr>
+              <a:t>GRanges</a:t>
+            </a:r>
+            <a:r>
+              <a:rPr lang="en-US" sz="1200" dirty="0">
+                <a:solidFill>
+                  <a:schemeClr val="tx1"/>
+                </a:solidFill>
+                <a:latin typeface="Abadi" panose="020B0604020104020204" pitchFamily="34" charset="0"/>
+              </a:rPr>
+              <a:t> for </a:t>
+            </a:r>
+            <a:r>
+              <a:rPr lang="en-US" sz="1200" dirty="0" err="1">
+                <a:solidFill>
+                  <a:schemeClr val="tx1"/>
+                </a:solidFill>
+                <a:latin typeface="Abadi" panose="020B0604020104020204" pitchFamily="34" charset="0"/>
+              </a:rPr>
+              <a:t>cryptic_sites.bed</a:t>
+            </a:r>
+            <a:r>
+              <a:rPr lang="en-US" sz="1200" dirty="0">
+                <a:solidFill>
+                  <a:schemeClr val="tx1"/>
+                </a:solidFill>
+                <a:latin typeface="Abadi" panose="020B0604020104020204" pitchFamily="34" charset="0"/>
+              </a:rPr>
+              <a:t> </a:t>
+            </a:r>
+            <a:br>
+              <a:rPr lang="en-US" sz="1200" dirty="0">
+                <a:solidFill>
+                  <a:schemeClr val="accent1"/>
+                </a:solidFill>
+                <a:latin typeface="Abadi" panose="020B0604020104020204" pitchFamily="34" charset="0"/>
+              </a:rPr>
+            </a:br>
+            <a:r>
+              <a:rPr lang="en-US" sz="1200" dirty="0">
+                <a:solidFill>
+                  <a:schemeClr val="tx1">
+                    <a:lumMod val="95000"/>
+                    <a:lumOff val="5000"/>
+                  </a:schemeClr>
+                </a:solidFill>
+                <a:latin typeface="Abadi" panose="020B0604020104020204" pitchFamily="34" charset="0"/>
+              </a:rPr>
+              <a:t>with</a:t>
+            </a:r>
+            <a:r>
+              <a:rPr lang="en-US" sz="1200" dirty="0">
+                <a:solidFill>
+                  <a:schemeClr val="accent1"/>
+                </a:solidFill>
+                <a:latin typeface="Abadi" panose="020B0604020104020204" pitchFamily="34" charset="0"/>
+              </a:rPr>
+              <a:t> </a:t>
+            </a:r>
+            <a:r>
+              <a:rPr lang="en-US" sz="1200" dirty="0" err="1">
+                <a:solidFill>
+                  <a:schemeClr val="accent1"/>
+                </a:solidFill>
+                <a:latin typeface="Abadi" panose="020B0604020104020204" pitchFamily="34" charset="0"/>
+              </a:rPr>
+              <a:t>canonical_supported_sites.bed</a:t>
+            </a:r>
+            <a:endParaRPr lang="en-US" sz="1200" dirty="0">
+              <a:solidFill>
+                <a:schemeClr val="accent1"/>
+              </a:solidFill>
+              <a:latin typeface="Abadi" panose="020B0604020104020204" pitchFamily="34" charset="0"/>
+            </a:endParaRPr>
+          </a:p>
+          <a:p>
+            <a:pPr algn="ctr"/>
+            <a:r>
+              <a:rPr lang="en-US" sz="1200" dirty="0">
+                <a:solidFill>
+                  <a:schemeClr val="accent1"/>
+                </a:solidFill>
+                <a:latin typeface="Abadi" panose="020B0604020104020204" pitchFamily="34" charset="0"/>
+              </a:rPr>
+              <a:t>== </a:t>
+            </a:r>
+            <a:r>
+              <a:rPr lang="en-US" sz="1200" dirty="0" err="1">
+                <a:solidFill>
+                  <a:schemeClr val="accent1"/>
+                </a:solidFill>
+                <a:latin typeface="Abadi" panose="020B0604020104020204" pitchFamily="34" charset="0"/>
+              </a:rPr>
+              <a:t>cryptics_supported.bed</a:t>
+            </a:r>
+            <a:endParaRPr lang="en-US" sz="1200" dirty="0">
+              <a:solidFill>
+                <a:schemeClr val="accent1"/>
+              </a:solidFill>
+              <a:latin typeface="Abadi" panose="020B0604020104020204" pitchFamily="34" charset="0"/>
+            </a:endParaRPr>
+          </a:p>
+        </p:txBody>
+      </p:sp>
+      <p:cxnSp>
+        <p:nvCxnSpPr>
+          <p:cNvPr id="32" name="Connector: Curved 31">
+            <a:extLst>
+              <a:ext uri="{FF2B5EF4-FFF2-40B4-BE49-F238E27FC236}">
+                <a16:creationId xmlns:a16="http://schemas.microsoft.com/office/drawing/2014/main" id="{0F39E967-6144-B1AE-9CD6-F5523B6FE432}"/>
+              </a:ext>
+            </a:extLst>
+          </p:cNvPr>
+          <p:cNvCxnSpPr>
+            <a:cxnSpLocks/>
+          </p:cNvCxnSpPr>
+          <p:nvPr/>
+        </p:nvCxnSpPr>
+        <p:spPr>
+          <a:xfrm rot="16200000" flipH="1">
+            <a:off x="2441276" y="10369849"/>
+            <a:ext cx="1209679" cy="491531"/>
+          </a:xfrm>
+          <a:prstGeom prst="curvedConnector3">
+            <a:avLst>
+              <a:gd name="adj1" fmla="val 50000"/>
+            </a:avLst>
+          </a:prstGeom>
+          <a:ln>
+            <a:tailEnd type="triangle"/>
+          </a:ln>
+        </p:spPr>
+        <p:style>
+          <a:lnRef idx="3">
+            <a:schemeClr val="accent1"/>
+          </a:lnRef>
+          <a:fillRef idx="0">
+            <a:schemeClr val="accent1"/>
+          </a:fillRef>
+          <a:effectRef idx="2">
+            <a:schemeClr val="accent1"/>
+          </a:effectRef>
+          <a:fontRef idx="minor">
+            <a:schemeClr val="tx1"/>
+          </a:fontRef>
+        </p:style>
+      </p:cxnSp>
+      <p:cxnSp>
+        <p:nvCxnSpPr>
+          <p:cNvPr id="40" name="Straight Arrow Connector 39">
+            <a:extLst>
+              <a:ext uri="{FF2B5EF4-FFF2-40B4-BE49-F238E27FC236}">
+                <a16:creationId xmlns:a16="http://schemas.microsoft.com/office/drawing/2014/main" id="{4F7900BE-0022-626E-D64B-2254BD0F9118}"/>
+              </a:ext>
+            </a:extLst>
+          </p:cNvPr>
+          <p:cNvCxnSpPr>
+            <a:cxnSpLocks/>
+          </p:cNvCxnSpPr>
+          <p:nvPr/>
+        </p:nvCxnSpPr>
+        <p:spPr>
+          <a:xfrm>
+            <a:off x="1771649" y="8334375"/>
+            <a:ext cx="0" cy="349301"/>
+          </a:xfrm>
+          <a:prstGeom prst="straightConnector1">
+            <a:avLst/>
+          </a:prstGeom>
+          <a:ln>
+            <a:tailEnd type="triangle"/>
+          </a:ln>
+        </p:spPr>
+        <p:style>
+          <a:lnRef idx="3">
+            <a:schemeClr val="accent1"/>
+          </a:lnRef>
+          <a:fillRef idx="0">
+            <a:schemeClr val="accent1"/>
+          </a:fillRef>
+          <a:effectRef idx="2">
+            <a:schemeClr val="accent1"/>
+          </a:effectRef>
+          <a:fontRef idx="minor">
+            <a:schemeClr val="tx1"/>
+          </a:fontRef>
+        </p:style>
+      </p:cxnSp>
+      <p:cxnSp>
+        <p:nvCxnSpPr>
+          <p:cNvPr id="42" name="Straight Arrow Connector 41">
+            <a:extLst>
+              <a:ext uri="{FF2B5EF4-FFF2-40B4-BE49-F238E27FC236}">
+                <a16:creationId xmlns:a16="http://schemas.microsoft.com/office/drawing/2014/main" id="{DADC1EF0-6792-562E-8FCC-7100A09C72A9}"/>
+              </a:ext>
+            </a:extLst>
+          </p:cNvPr>
+          <p:cNvCxnSpPr>
+            <a:cxnSpLocks/>
+          </p:cNvCxnSpPr>
+          <p:nvPr/>
+        </p:nvCxnSpPr>
+        <p:spPr>
+          <a:xfrm flipH="1">
+            <a:off x="5225456" y="8334375"/>
+            <a:ext cx="9526" cy="313747"/>
+          </a:xfrm>
+          <a:prstGeom prst="straightConnector1">
+            <a:avLst/>
+          </a:prstGeom>
+          <a:ln>
+            <a:tailEnd type="triangle"/>
+          </a:ln>
+        </p:spPr>
+        <p:style>
+          <a:lnRef idx="3">
+            <a:schemeClr val="accent1"/>
+          </a:lnRef>
+          <a:fillRef idx="0">
+            <a:schemeClr val="accent1"/>
+          </a:fillRef>
+          <a:effectRef idx="2">
+            <a:schemeClr val="accent1"/>
+          </a:effectRef>
+          <a:fontRef idx="minor">
+            <a:schemeClr val="tx1"/>
+          </a:fontRef>
+        </p:style>
+      </p:cxnSp>
+      <p:sp>
+        <p:nvSpPr>
+          <p:cNvPr id="44" name="Rectangle 43">
+            <a:extLst>
+              <a:ext uri="{FF2B5EF4-FFF2-40B4-BE49-F238E27FC236}">
+                <a16:creationId xmlns:a16="http://schemas.microsoft.com/office/drawing/2014/main" id="{18BC3F71-301D-B74D-8E87-3247AB52F4BF}"/>
+              </a:ext>
+            </a:extLst>
+          </p:cNvPr>
+          <p:cNvSpPr/>
+          <p:nvPr/>
+        </p:nvSpPr>
+        <p:spPr>
+          <a:xfrm>
+            <a:off x="4332865" y="10147960"/>
+            <a:ext cx="2346918" cy="1778964"/>
+          </a:xfrm>
+          <a:prstGeom prst="rect">
+            <a:avLst/>
+          </a:prstGeom>
+          <a:solidFill>
+            <a:schemeClr val="accent1">
+              <a:lumMod val="40000"/>
+              <a:lumOff val="60000"/>
+            </a:schemeClr>
+          </a:solidFill>
+        </p:spPr>
+        <p:style>
+          <a:lnRef idx="2">
+            <a:schemeClr val="accent1">
+              <a:shade val="15000"/>
+            </a:schemeClr>
+          </a:lnRef>
+          <a:fillRef idx="1">
+            <a:schemeClr val="accent1"/>
+          </a:fillRef>
+          <a:effectRef idx="0">
+            <a:schemeClr val="accent1"/>
+          </a:effectRef>
+          <a:fontRef idx="minor">
+            <a:schemeClr val="lt1"/>
+          </a:fontRef>
+        </p:style>
+        <p:txBody>
+          <a:bodyPr numCol="1" rtlCol="0" anchor="ctr"/>
+          <a:lstStyle/>
+          <a:p>
+            <a:pPr algn="ctr"/>
+            <a:r>
+              <a:rPr lang="en-US" sz="1200" dirty="0">
+                <a:solidFill>
+                  <a:schemeClr val="tx1"/>
+                </a:solidFill>
+                <a:latin typeface="Abadi" panose="020B0604020104020204" pitchFamily="34" charset="0"/>
+              </a:rPr>
+              <a:t>FOUR FINAL DATASETS</a:t>
+            </a:r>
+          </a:p>
+          <a:p>
+            <a:pPr algn="ctr"/>
+            <a:endParaRPr lang="en-US" sz="1200" dirty="0">
+              <a:solidFill>
+                <a:schemeClr val="tx1"/>
+              </a:solidFill>
+              <a:latin typeface="Abadi" panose="020B0604020104020204" pitchFamily="34" charset="0"/>
+            </a:endParaRPr>
+          </a:p>
+          <a:p>
+            <a:pPr marL="228600" indent="-228600">
+              <a:buFont typeface="+mj-lt"/>
+              <a:buAutoNum type="arabicPeriod"/>
+            </a:pPr>
+            <a:r>
+              <a:rPr lang="en-US" sz="1200" dirty="0" err="1">
+                <a:solidFill>
+                  <a:schemeClr val="tx1"/>
+                </a:solidFill>
+                <a:latin typeface="Abadi" panose="020B0604020104020204" pitchFamily="34" charset="0"/>
+              </a:rPr>
+              <a:t>Canonical_splice_sites.bed</a:t>
+            </a:r>
+            <a:endParaRPr lang="en-US" sz="1200" dirty="0">
+              <a:solidFill>
+                <a:schemeClr val="tx1"/>
+              </a:solidFill>
+              <a:latin typeface="Abadi" panose="020B0604020104020204" pitchFamily="34" charset="0"/>
+            </a:endParaRPr>
+          </a:p>
+          <a:p>
+            <a:pPr marL="228600" indent="-228600">
+              <a:buFont typeface="+mj-lt"/>
+              <a:buAutoNum type="arabicPeriod"/>
+            </a:pPr>
+            <a:r>
+              <a:rPr lang="en-US" sz="1200" dirty="0">
+                <a:solidFill>
+                  <a:schemeClr val="tx1"/>
+                </a:solidFill>
+                <a:latin typeface="Abadi" panose="020B0604020104020204" pitchFamily="34" charset="0"/>
+              </a:rPr>
+              <a:t>Alt5_splice_sites.bed</a:t>
+            </a:r>
+          </a:p>
+          <a:p>
+            <a:pPr marL="228600" indent="-228600">
+              <a:buFont typeface="+mj-lt"/>
+              <a:buAutoNum type="arabicPeriod"/>
+            </a:pPr>
+            <a:r>
+              <a:rPr lang="en-US" sz="1200" dirty="0" err="1">
+                <a:solidFill>
+                  <a:schemeClr val="tx1"/>
+                </a:solidFill>
+                <a:latin typeface="Abadi" panose="020B0604020104020204" pitchFamily="34" charset="0"/>
+              </a:rPr>
+              <a:t>Decoys.bed</a:t>
+            </a:r>
+            <a:endParaRPr lang="en-US" sz="1200" dirty="0">
+              <a:solidFill>
+                <a:schemeClr val="tx1"/>
+              </a:solidFill>
+              <a:latin typeface="Abadi" panose="020B0604020104020204" pitchFamily="34" charset="0"/>
+            </a:endParaRPr>
+          </a:p>
+          <a:p>
+            <a:pPr marL="228600" indent="-228600">
+              <a:buFont typeface="+mj-lt"/>
+              <a:buAutoNum type="arabicPeriod"/>
+            </a:pPr>
+            <a:r>
+              <a:rPr lang="en-US" sz="1200" dirty="0" err="1">
+                <a:solidFill>
+                  <a:schemeClr val="tx1"/>
+                </a:solidFill>
+                <a:latin typeface="Abadi" panose="020B0604020104020204" pitchFamily="34" charset="0"/>
+              </a:rPr>
+              <a:t>Cryptics_supported.bed</a:t>
+            </a:r>
+            <a:endParaRPr lang="en-US" sz="1200" dirty="0">
+              <a:solidFill>
+                <a:schemeClr val="tx1"/>
+              </a:solidFill>
+              <a:latin typeface="Abadi" panose="020B0604020104020204" pitchFamily="34" charset="0"/>
+            </a:endParaRPr>
+          </a:p>
+        </p:txBody>
+      </p:sp>
+      <p:sp>
+        <p:nvSpPr>
+          <p:cNvPr id="46" name="Rectangle 45">
+            <a:extLst>
+              <a:ext uri="{FF2B5EF4-FFF2-40B4-BE49-F238E27FC236}">
+                <a16:creationId xmlns:a16="http://schemas.microsoft.com/office/drawing/2014/main" id="{D0EBDD17-E857-FAD9-ECF4-2CDFD6B87B2B}"/>
+              </a:ext>
+            </a:extLst>
+          </p:cNvPr>
+          <p:cNvSpPr/>
+          <p:nvPr/>
+        </p:nvSpPr>
+        <p:spPr>
+          <a:xfrm>
+            <a:off x="4870173" y="9953343"/>
+            <a:ext cx="1272301" cy="393700"/>
+          </a:xfrm>
+          <a:prstGeom prst="rect">
+            <a:avLst/>
+          </a:prstGeom>
+          <a:ln w="19050">
+            <a:solidFill>
+              <a:schemeClr val="tx1"/>
+            </a:solidFill>
+          </a:ln>
+        </p:spPr>
+        <p:style>
+          <a:lnRef idx="2">
+            <a:schemeClr val="accent1"/>
+          </a:lnRef>
+          <a:fillRef idx="1">
+            <a:schemeClr val="lt1"/>
+          </a:fillRef>
+          <a:effectRef idx="0">
+            <a:schemeClr val="accent1"/>
+          </a:effectRef>
+          <a:fontRef idx="minor">
+            <a:schemeClr val="dk1"/>
+          </a:fontRef>
+        </p:style>
+        <p:txBody>
+          <a:bodyPr rtlCol="0" anchor="ctr"/>
+          <a:lstStyle/>
+          <a:p>
+            <a:pPr algn="ctr"/>
+            <a:r>
+              <a:rPr lang="en-US" b="1" dirty="0">
+                <a:latin typeface="Raleway" pitchFamily="2" charset="0"/>
+                <a:cs typeface="Posterama" panose="020B0504020200020000" pitchFamily="34" charset="0"/>
+              </a:rPr>
+              <a:t>Result</a:t>
+            </a:r>
+            <a:endParaRPr lang="en-GB" b="1" dirty="0">
+              <a:latin typeface="Raleway" pitchFamily="2" charset="0"/>
+              <a:cs typeface="Posterama" panose="020B0504020200020000" pitchFamily="34" charset="0"/>
+            </a:endParaRPr>
+          </a:p>
+        </p:txBody>
+      </p:sp>
+      <p:cxnSp>
+        <p:nvCxnSpPr>
+          <p:cNvPr id="47" name="Straight Arrow Connector 46">
+            <a:extLst>
+              <a:ext uri="{FF2B5EF4-FFF2-40B4-BE49-F238E27FC236}">
+                <a16:creationId xmlns:a16="http://schemas.microsoft.com/office/drawing/2014/main" id="{9A29C1C3-045C-E477-9C9C-368BABC9DC23}"/>
+              </a:ext>
+            </a:extLst>
+          </p:cNvPr>
+          <p:cNvCxnSpPr>
+            <a:cxnSpLocks/>
+          </p:cNvCxnSpPr>
+          <p:nvPr/>
+        </p:nvCxnSpPr>
+        <p:spPr>
+          <a:xfrm>
+            <a:off x="5483504" y="9507483"/>
+            <a:ext cx="0" cy="445860"/>
+          </a:xfrm>
+          <a:prstGeom prst="straightConnector1">
+            <a:avLst/>
+          </a:prstGeom>
+          <a:ln>
+            <a:tailEnd type="triangle"/>
+          </a:ln>
+        </p:spPr>
+        <p:style>
+          <a:lnRef idx="3">
+            <a:schemeClr val="accent1"/>
+          </a:lnRef>
+          <a:fillRef idx="0">
+            <a:schemeClr val="accent1"/>
+          </a:fillRef>
+          <a:effectRef idx="2">
+            <a:schemeClr val="accent1"/>
+          </a:effectRef>
+          <a:fontRef idx="minor">
+            <a:schemeClr val="tx1"/>
+          </a:fontRef>
+        </p:style>
+      </p:cxnSp>
+      <p:cxnSp>
+        <p:nvCxnSpPr>
+          <p:cNvPr id="48" name="Straight Arrow Connector 47">
+            <a:extLst>
+              <a:ext uri="{FF2B5EF4-FFF2-40B4-BE49-F238E27FC236}">
+                <a16:creationId xmlns:a16="http://schemas.microsoft.com/office/drawing/2014/main" id="{73DE3673-D041-6C3D-F22F-5B45B2F6FF1B}"/>
+              </a:ext>
+            </a:extLst>
+          </p:cNvPr>
+          <p:cNvCxnSpPr>
+            <a:cxnSpLocks/>
+          </p:cNvCxnSpPr>
+          <p:nvPr/>
+        </p:nvCxnSpPr>
+        <p:spPr>
+          <a:xfrm flipV="1">
+            <a:off x="3046115" y="11499144"/>
+            <a:ext cx="1245754" cy="280073"/>
+          </a:xfrm>
+          <a:prstGeom prst="straightConnector1">
+            <a:avLst/>
+          </a:prstGeom>
+          <a:ln>
+            <a:tailEnd type="triangle"/>
+          </a:ln>
+        </p:spPr>
+        <p:style>
+          <a:lnRef idx="3">
+            <a:schemeClr val="accent1"/>
+          </a:lnRef>
+          <a:fillRef idx="0">
+            <a:schemeClr val="accent1"/>
+          </a:fillRef>
+          <a:effectRef idx="2">
+            <a:schemeClr val="accent1"/>
+          </a:effectRef>
+          <a:fontRef idx="minor">
+            <a:schemeClr val="tx1"/>
+          </a:fontRef>
+        </p:style>
+      </p:cxnSp>
+      <p:sp>
+        <p:nvSpPr>
+          <p:cNvPr id="5" name="TextBox 4">
+            <a:extLst>
+              <a:ext uri="{FF2B5EF4-FFF2-40B4-BE49-F238E27FC236}">
+                <a16:creationId xmlns:a16="http://schemas.microsoft.com/office/drawing/2014/main" id="{D467D879-2CAF-EB74-F0CE-F506D82A7E60}"/>
+              </a:ext>
+            </a:extLst>
+          </p:cNvPr>
+          <p:cNvSpPr txBox="1"/>
+          <p:nvPr/>
+        </p:nvSpPr>
+        <p:spPr>
+          <a:xfrm>
+            <a:off x="0" y="0"/>
+            <a:ext cx="2603500" cy="523220"/>
+          </a:xfrm>
+          <a:prstGeom prst="rect">
+            <a:avLst/>
+          </a:prstGeom>
+          <a:noFill/>
+        </p:spPr>
+        <p:txBody>
+          <a:bodyPr wrap="square" rtlCol="0">
+            <a:spAutoFit/>
+          </a:bodyPr>
+          <a:lstStyle/>
+          <a:p>
+            <a:r>
+              <a:rPr lang="en-US" sz="2800" dirty="0"/>
+              <a:t>NEW Proposal</a:t>
+            </a:r>
+            <a:endParaRPr lang="en-GB" sz="2800" dirty="0"/>
+          </a:p>
+        </p:txBody>
+      </p:sp>
+      <p:sp>
+        <p:nvSpPr>
+          <p:cNvPr id="12" name="Star: 5 Points 11">
+            <a:extLst>
+              <a:ext uri="{FF2B5EF4-FFF2-40B4-BE49-F238E27FC236}">
+                <a16:creationId xmlns:a16="http://schemas.microsoft.com/office/drawing/2014/main" id="{02A84F7B-65EF-C365-CE3B-DA1A4F4310DE}"/>
+              </a:ext>
+            </a:extLst>
+          </p:cNvPr>
+          <p:cNvSpPr/>
+          <p:nvPr/>
+        </p:nvSpPr>
+        <p:spPr>
+          <a:xfrm>
+            <a:off x="431756" y="3971925"/>
+            <a:ext cx="525671" cy="470504"/>
+          </a:xfrm>
+          <a:prstGeom prst="star5">
+            <a:avLst/>
+          </a:prstGeom>
+        </p:spPr>
+        <p:style>
+          <a:lnRef idx="2">
+            <a:schemeClr val="accent1">
+              <a:shade val="15000"/>
+            </a:schemeClr>
+          </a:lnRef>
+          <a:fillRef idx="1">
+            <a:schemeClr val="accent1"/>
+          </a:fillRef>
+          <a:effectRef idx="0">
+            <a:schemeClr val="accent1"/>
+          </a:effectRef>
+          <a:fontRef idx="minor">
+            <a:schemeClr val="lt1"/>
+          </a:fontRef>
+        </p:style>
+        <p:txBody>
+          <a:bodyPr rtlCol="0" anchor="ctr"/>
+          <a:lstStyle/>
+          <a:p>
+            <a:pPr algn="ctr"/>
+            <a:endParaRPr lang="en-GB"/>
+          </a:p>
+        </p:txBody>
+      </p:sp>
+      <p:cxnSp>
+        <p:nvCxnSpPr>
+          <p:cNvPr id="13" name="Straight Arrow Connector 12">
+            <a:extLst>
+              <a:ext uri="{FF2B5EF4-FFF2-40B4-BE49-F238E27FC236}">
+                <a16:creationId xmlns:a16="http://schemas.microsoft.com/office/drawing/2014/main" id="{5F794447-796E-91E8-B98B-2DC0DF124375}"/>
+              </a:ext>
+            </a:extLst>
+          </p:cNvPr>
+          <p:cNvCxnSpPr>
+            <a:cxnSpLocks/>
+          </p:cNvCxnSpPr>
+          <p:nvPr/>
+        </p:nvCxnSpPr>
+        <p:spPr>
+          <a:xfrm>
+            <a:off x="168920" y="497244"/>
+            <a:ext cx="405690" cy="3398924"/>
+          </a:xfrm>
+          <a:prstGeom prst="straightConnector1">
+            <a:avLst/>
+          </a:prstGeom>
+          <a:ln>
+            <a:tailEnd type="triangle"/>
+          </a:ln>
+        </p:spPr>
+        <p:style>
+          <a:lnRef idx="3">
+            <a:schemeClr val="accent1"/>
+          </a:lnRef>
+          <a:fillRef idx="0">
+            <a:schemeClr val="accent1"/>
+          </a:fillRef>
+          <a:effectRef idx="2">
+            <a:schemeClr val="accent1"/>
+          </a:effectRef>
+          <a:fontRef idx="minor">
+            <a:schemeClr val="tx1"/>
+          </a:fontRef>
+        </p:style>
+      </p:cxnSp>
+    </p:spTree>
+    <p:extLst>
+      <p:ext uri="{BB962C8B-B14F-4D97-AF65-F5344CB8AC3E}">
+        <p14:creationId xmlns:p14="http://schemas.microsoft.com/office/powerpoint/2010/main" val="2048028097"/>
+      </p:ext>
+    </p:extLst>
+  </p:cSld>
+  <p:clrMapOvr>
+    <a:masterClrMapping/>
+  </p:clrMapOvr>
+</p:sld>
+</file>
+
+<file path=ppt/slides/slide3.xml><?xml version="1.0" encoding="utf-8"?>
+<p:sld xmlns:a="http://schemas.openxmlformats.org/drawingml/2006/main" xmlns:r="http://schemas.openxmlformats.org/officeDocument/2006/relationships" xmlns:p="http://schemas.openxmlformats.org/presentationml/2006/main">
+  <p:cSld>
+    <p:spTree>
+      <p:nvGrpSpPr>
+        <p:cNvPr id="1" name="">
+          <a:extLst>
+            <a:ext uri="{FF2B5EF4-FFF2-40B4-BE49-F238E27FC236}">
+              <a16:creationId xmlns:a16="http://schemas.microsoft.com/office/drawing/2014/main" id="{5439C57A-A402-852A-5A46-980E0F9068A7}"/>
+            </a:ext>
+          </a:extLst>
+        </p:cNvPr>
+        <p:cNvGrpSpPr/>
+        <p:nvPr/>
+      </p:nvGrpSpPr>
+      <p:grpSpPr>
+        <a:xfrm>
+          <a:off x="0" y="0"/>
+          <a:ext cx="0" cy="0"/>
+          <a:chOff x="0" y="0"/>
+          <a:chExt cx="0" cy="0"/>
+        </a:xfrm>
+      </p:grpSpPr>
+      <p:sp>
+        <p:nvSpPr>
+          <p:cNvPr id="4" name="Rectangle 3">
+            <a:extLst>
+              <a:ext uri="{FF2B5EF4-FFF2-40B4-BE49-F238E27FC236}">
+                <a16:creationId xmlns:a16="http://schemas.microsoft.com/office/drawing/2014/main" id="{A67E4938-9453-0E5B-76BE-C5754079A5B6}"/>
+              </a:ext>
+            </a:extLst>
+          </p:cNvPr>
+          <p:cNvSpPr/>
+          <p:nvPr/>
+        </p:nvSpPr>
+        <p:spPr>
+          <a:xfrm>
+            <a:off x="694592" y="618391"/>
+            <a:ext cx="5468816" cy="1014525"/>
+          </a:xfrm>
+          <a:prstGeom prst="rect">
+            <a:avLst/>
+          </a:prstGeom>
+          <a:solidFill>
+            <a:schemeClr val="accent1">
+              <a:lumMod val="40000"/>
+              <a:lumOff val="60000"/>
+            </a:schemeClr>
+          </a:solidFill>
+        </p:spPr>
+        <p:style>
+          <a:lnRef idx="2">
+            <a:schemeClr val="accent1">
+              <a:shade val="15000"/>
+            </a:schemeClr>
+          </a:lnRef>
+          <a:fillRef idx="1">
+            <a:schemeClr val="accent1"/>
+          </a:fillRef>
+          <a:effectRef idx="0">
+            <a:schemeClr val="accent1"/>
+          </a:effectRef>
+          <a:fontRef idx="minor">
+            <a:schemeClr val="lt1"/>
+          </a:fontRef>
+        </p:style>
+        <p:txBody>
+          <a:bodyPr rtlCol="0" anchor="ctr"/>
+          <a:lstStyle/>
+          <a:p>
+            <a:pPr algn="ctr"/>
+            <a:r>
+              <a:rPr lang="en-US" sz="1400" dirty="0" err="1">
+                <a:solidFill>
+                  <a:sysClr val="windowText" lastClr="000000"/>
+                </a:solidFill>
+                <a:latin typeface="Abadi" panose="020B0604020104020204" pitchFamily="34" charset="0"/>
+              </a:rPr>
+              <a:t>SpliceAI</a:t>
+            </a:r>
+            <a:r>
+              <a:rPr lang="en-US" sz="1400" dirty="0">
+                <a:solidFill>
+                  <a:sysClr val="windowText" lastClr="000000"/>
+                </a:solidFill>
+                <a:latin typeface="Abadi" panose="020B0604020104020204" pitchFamily="34" charset="0"/>
+              </a:rPr>
+              <a:t> inferences generated across whole introns and filtered to remove signal below 0.05</a:t>
+            </a:r>
+          </a:p>
+          <a:p>
+            <a:pPr algn="ctr"/>
+            <a:r>
+              <a:rPr lang="en-US" sz="1400" dirty="0">
+                <a:solidFill>
+                  <a:sysClr val="windowText" lastClr="000000"/>
+                </a:solidFill>
+                <a:latin typeface="Abadi" panose="020B0604020104020204" pitchFamily="34" charset="0"/>
+              </a:rPr>
+              <a:t>794,192 splice site inferences</a:t>
+            </a:r>
+            <a:endParaRPr lang="en-GB" sz="1400" dirty="0">
+              <a:solidFill>
+                <a:sysClr val="windowText" lastClr="000000"/>
+              </a:solidFill>
+              <a:latin typeface="Abadi" panose="020B0604020104020204" pitchFamily="34" charset="0"/>
+            </a:endParaRPr>
+          </a:p>
+        </p:txBody>
+      </p:sp>
+      <p:sp>
+        <p:nvSpPr>
+          <p:cNvPr id="7" name="Rectangle 6">
+            <a:extLst>
+              <a:ext uri="{FF2B5EF4-FFF2-40B4-BE49-F238E27FC236}">
+                <a16:creationId xmlns:a16="http://schemas.microsoft.com/office/drawing/2014/main" id="{7D876C3A-D43F-1F89-E3EE-3F2017980370}"/>
+              </a:ext>
+            </a:extLst>
+          </p:cNvPr>
+          <p:cNvSpPr/>
+          <p:nvPr/>
+        </p:nvSpPr>
+        <p:spPr>
+          <a:xfrm>
+            <a:off x="694592" y="3756322"/>
+            <a:ext cx="5468816" cy="1015181"/>
+          </a:xfrm>
+          <a:prstGeom prst="rect">
+            <a:avLst/>
+          </a:prstGeom>
+          <a:solidFill>
+            <a:schemeClr val="accent1">
+              <a:lumMod val="40000"/>
+              <a:lumOff val="60000"/>
+            </a:schemeClr>
+          </a:solidFill>
+        </p:spPr>
+        <p:style>
+          <a:lnRef idx="2">
+            <a:schemeClr val="accent1">
+              <a:shade val="15000"/>
+            </a:schemeClr>
+          </a:lnRef>
+          <a:fillRef idx="1">
+            <a:schemeClr val="accent1"/>
+          </a:fillRef>
+          <a:effectRef idx="0">
+            <a:schemeClr val="accent1"/>
+          </a:effectRef>
+          <a:fontRef idx="minor">
+            <a:schemeClr val="lt1"/>
+          </a:fontRef>
+        </p:style>
+        <p:txBody>
+          <a:bodyPr rtlCol="0" anchor="ctr"/>
+          <a:lstStyle/>
+          <a:p>
+            <a:pPr algn="ctr"/>
+            <a:r>
+              <a:rPr lang="en-US" sz="1400" dirty="0">
+                <a:solidFill>
+                  <a:sysClr val="windowText" lastClr="000000"/>
+                </a:solidFill>
+                <a:latin typeface="Abadi" panose="020B0604020104020204" pitchFamily="34" charset="0"/>
+              </a:rPr>
+              <a:t>Extract 5’ splice sites from PSI-TABLE to filter loci within +-50 bp of 5’ canonical splice site</a:t>
+            </a:r>
+          </a:p>
+          <a:p>
+            <a:pPr algn="ctr"/>
+            <a:r>
+              <a:rPr lang="en-US" sz="1400" dirty="0" err="1">
+                <a:solidFill>
+                  <a:schemeClr val="accent1"/>
+                </a:solidFill>
+                <a:latin typeface="Abadi" panose="020B0604020104020204" pitchFamily="34" charset="0"/>
+              </a:rPr>
+              <a:t>Canonical_splice_sites.bed</a:t>
+            </a:r>
+            <a:endParaRPr lang="en-US" sz="1400" dirty="0">
+              <a:solidFill>
+                <a:schemeClr val="accent1"/>
+              </a:solidFill>
+              <a:latin typeface="Abadi" panose="020B0604020104020204" pitchFamily="34" charset="0"/>
+            </a:endParaRPr>
+          </a:p>
+          <a:p>
+            <a:pPr algn="ctr"/>
+            <a:r>
+              <a:rPr lang="en-US" sz="1400" dirty="0" err="1">
+                <a:solidFill>
+                  <a:schemeClr val="accent1"/>
+                </a:solidFill>
+                <a:latin typeface="Abadi" panose="020B0604020104020204" pitchFamily="34" charset="0"/>
+              </a:rPr>
+              <a:t>Wide_canonical_splice_sites.bed</a:t>
+            </a:r>
+            <a:endParaRPr lang="en-US" sz="1400" dirty="0">
+              <a:solidFill>
+                <a:schemeClr val="accent1"/>
+              </a:solidFill>
+              <a:latin typeface="Abadi" panose="020B0604020104020204" pitchFamily="34" charset="0"/>
+            </a:endParaRPr>
+          </a:p>
+        </p:txBody>
+      </p:sp>
+      <p:sp>
+        <p:nvSpPr>
+          <p:cNvPr id="8" name="Rectangle 7">
+            <a:extLst>
+              <a:ext uri="{FF2B5EF4-FFF2-40B4-BE49-F238E27FC236}">
+                <a16:creationId xmlns:a16="http://schemas.microsoft.com/office/drawing/2014/main" id="{4A9376B9-F34D-029B-5D6C-958D73FB227D}"/>
+              </a:ext>
+            </a:extLst>
+          </p:cNvPr>
+          <p:cNvSpPr/>
+          <p:nvPr/>
+        </p:nvSpPr>
+        <p:spPr>
+          <a:xfrm>
+            <a:off x="2127250" y="421541"/>
+            <a:ext cx="2603500" cy="393700"/>
+          </a:xfrm>
+          <a:prstGeom prst="rect">
+            <a:avLst/>
+          </a:prstGeom>
+          <a:ln w="19050">
+            <a:solidFill>
+              <a:schemeClr val="tx1"/>
+            </a:solidFill>
+          </a:ln>
+        </p:spPr>
+        <p:style>
+          <a:lnRef idx="2">
+            <a:schemeClr val="accent1"/>
+          </a:lnRef>
+          <a:fillRef idx="1">
+            <a:schemeClr val="lt1"/>
+          </a:fillRef>
+          <a:effectRef idx="0">
+            <a:schemeClr val="accent1"/>
+          </a:effectRef>
+          <a:fontRef idx="minor">
+            <a:schemeClr val="dk1"/>
+          </a:fontRef>
+        </p:style>
+        <p:txBody>
+          <a:bodyPr rtlCol="0" anchor="ctr"/>
+          <a:lstStyle/>
+          <a:p>
+            <a:pPr algn="ctr"/>
+            <a:r>
+              <a:rPr lang="en-US" b="1" dirty="0" err="1">
+                <a:latin typeface="Raleway" pitchFamily="2" charset="0"/>
+                <a:cs typeface="Posterama" panose="020B0504020200020000" pitchFamily="34" charset="0"/>
+              </a:rPr>
+              <a:t>SpliceAI</a:t>
+            </a:r>
+            <a:endParaRPr lang="en-GB" b="1" dirty="0">
+              <a:latin typeface="Raleway" pitchFamily="2" charset="0"/>
+              <a:cs typeface="Posterama" panose="020B0504020200020000" pitchFamily="34" charset="0"/>
+            </a:endParaRPr>
+          </a:p>
+        </p:txBody>
+      </p:sp>
+      <p:sp>
+        <p:nvSpPr>
+          <p:cNvPr id="20" name="Rectangle 19">
+            <a:extLst>
+              <a:ext uri="{FF2B5EF4-FFF2-40B4-BE49-F238E27FC236}">
+                <a16:creationId xmlns:a16="http://schemas.microsoft.com/office/drawing/2014/main" id="{EAF81091-4972-AE75-04E4-AB75D899982E}"/>
+              </a:ext>
+            </a:extLst>
+          </p:cNvPr>
+          <p:cNvSpPr/>
+          <p:nvPr/>
+        </p:nvSpPr>
+        <p:spPr>
+          <a:xfrm>
+            <a:off x="694592" y="2040306"/>
+            <a:ext cx="5468816" cy="1130298"/>
+          </a:xfrm>
+          <a:prstGeom prst="rect">
+            <a:avLst/>
+          </a:prstGeom>
+          <a:solidFill>
+            <a:schemeClr val="accent1">
+              <a:lumMod val="40000"/>
+              <a:lumOff val="60000"/>
+            </a:schemeClr>
+          </a:solidFill>
+        </p:spPr>
+        <p:style>
+          <a:lnRef idx="2">
+            <a:schemeClr val="accent1">
+              <a:shade val="15000"/>
+            </a:schemeClr>
+          </a:lnRef>
+          <a:fillRef idx="1">
+            <a:schemeClr val="accent1"/>
+          </a:fillRef>
+          <a:effectRef idx="0">
+            <a:schemeClr val="accent1"/>
+          </a:effectRef>
+          <a:fontRef idx="minor">
+            <a:schemeClr val="lt1"/>
+          </a:fontRef>
+        </p:style>
+        <p:txBody>
+          <a:bodyPr rtlCol="0" anchor="ctr"/>
+          <a:lstStyle/>
+          <a:p>
+            <a:pPr algn="ctr"/>
+            <a:r>
+              <a:rPr lang="en-US" sz="1400" dirty="0">
+                <a:solidFill>
+                  <a:sysClr val="windowText" lastClr="000000"/>
+                </a:solidFill>
+                <a:latin typeface="Abadi" panose="020B0604020104020204" pitchFamily="34" charset="0"/>
+              </a:rPr>
+              <a:t>Using </a:t>
+            </a:r>
+            <a:r>
+              <a:rPr lang="en-US" sz="1400" dirty="0" err="1">
+                <a:solidFill>
+                  <a:sysClr val="windowText" lastClr="000000"/>
+                </a:solidFill>
+                <a:latin typeface="Abadi" panose="020B0604020104020204" pitchFamily="34" charset="0"/>
+              </a:rPr>
+              <a:t>GRanges</a:t>
+            </a:r>
+            <a:r>
+              <a:rPr lang="en-US" sz="1400" dirty="0">
+                <a:solidFill>
+                  <a:sysClr val="windowText" lastClr="000000"/>
+                </a:solidFill>
+                <a:latin typeface="Abadi" panose="020B0604020104020204" pitchFamily="34" charset="0"/>
+              </a:rPr>
+              <a:t>, keep only “</a:t>
+            </a:r>
+            <a:r>
+              <a:rPr lang="en-US" sz="1400" dirty="0" err="1">
+                <a:solidFill>
+                  <a:sysClr val="windowText" lastClr="000000"/>
+                </a:solidFill>
+                <a:latin typeface="Abadi" panose="020B0604020104020204" pitchFamily="34" charset="0"/>
+              </a:rPr>
+              <a:t>protein_coding</a:t>
+            </a:r>
+            <a:r>
+              <a:rPr lang="en-US" sz="1400" dirty="0">
+                <a:solidFill>
+                  <a:sysClr val="windowText" lastClr="000000"/>
+                </a:solidFill>
+                <a:latin typeface="Abadi" panose="020B0604020104020204" pitchFamily="34" charset="0"/>
+              </a:rPr>
+              <a:t>” regions in Gencode.v49.annotation.gtf</a:t>
+            </a:r>
+          </a:p>
+          <a:p>
+            <a:pPr algn="ctr"/>
+            <a:r>
+              <a:rPr lang="en-US" sz="1400" dirty="0" err="1">
+                <a:solidFill>
+                  <a:schemeClr val="accent1"/>
+                </a:solidFill>
+                <a:latin typeface="Abadi" panose="020B0604020104020204" pitchFamily="34" charset="0"/>
+              </a:rPr>
+              <a:t>Protein_coding_sites.bed</a:t>
+            </a:r>
+            <a:endParaRPr lang="en-US" sz="1400" dirty="0">
+              <a:solidFill>
+                <a:schemeClr val="accent1"/>
+              </a:solidFill>
+              <a:latin typeface="Abadi" panose="020B0604020104020204" pitchFamily="34" charset="0"/>
+            </a:endParaRPr>
+          </a:p>
+        </p:txBody>
+      </p:sp>
+      <p:sp>
+        <p:nvSpPr>
+          <p:cNvPr id="24" name="Rectangle 23">
+            <a:extLst>
+              <a:ext uri="{FF2B5EF4-FFF2-40B4-BE49-F238E27FC236}">
+                <a16:creationId xmlns:a16="http://schemas.microsoft.com/office/drawing/2014/main" id="{5F02F80F-8628-CCAE-9433-804866667A25}"/>
+              </a:ext>
+            </a:extLst>
+          </p:cNvPr>
+          <p:cNvSpPr/>
+          <p:nvPr/>
+        </p:nvSpPr>
+        <p:spPr>
+          <a:xfrm>
+            <a:off x="2127250" y="1843456"/>
+            <a:ext cx="2603500" cy="393700"/>
+          </a:xfrm>
+          <a:prstGeom prst="rect">
+            <a:avLst/>
+          </a:prstGeom>
+          <a:ln w="19050">
+            <a:solidFill>
+              <a:schemeClr val="tx1"/>
+            </a:solidFill>
+          </a:ln>
+        </p:spPr>
+        <p:style>
+          <a:lnRef idx="2">
+            <a:schemeClr val="accent1"/>
+          </a:lnRef>
+          <a:fillRef idx="1">
+            <a:schemeClr val="lt1"/>
+          </a:fillRef>
+          <a:effectRef idx="0">
+            <a:schemeClr val="accent1"/>
+          </a:effectRef>
+          <a:fontRef idx="minor">
+            <a:schemeClr val="dk1"/>
+          </a:fontRef>
+        </p:style>
+        <p:txBody>
+          <a:bodyPr rtlCol="0" anchor="ctr"/>
+          <a:lstStyle/>
+          <a:p>
+            <a:pPr algn="ctr"/>
+            <a:r>
+              <a:rPr lang="en-US" b="1" dirty="0">
+                <a:latin typeface="Raleway" pitchFamily="2" charset="0"/>
+                <a:cs typeface="Posterama" panose="020B0504020200020000" pitchFamily="34" charset="0"/>
+              </a:rPr>
+              <a:t>Genomic Ranges</a:t>
+            </a:r>
+            <a:endParaRPr lang="en-GB" b="1" dirty="0">
+              <a:latin typeface="Raleway" pitchFamily="2" charset="0"/>
+              <a:cs typeface="Posterama" panose="020B0504020200020000" pitchFamily="34" charset="0"/>
+            </a:endParaRPr>
+          </a:p>
+        </p:txBody>
+      </p:sp>
+      <p:sp>
+        <p:nvSpPr>
+          <p:cNvPr id="16" name="Rectangle 15">
+            <a:extLst>
+              <a:ext uri="{FF2B5EF4-FFF2-40B4-BE49-F238E27FC236}">
+                <a16:creationId xmlns:a16="http://schemas.microsoft.com/office/drawing/2014/main" id="{B237634D-E3A9-674A-3683-3BFD7D33FE0B}"/>
+              </a:ext>
+            </a:extLst>
+          </p:cNvPr>
+          <p:cNvSpPr/>
+          <p:nvPr/>
+        </p:nvSpPr>
+        <p:spPr>
+          <a:xfrm>
+            <a:off x="114296" y="5361027"/>
+            <a:ext cx="6619875" cy="909119"/>
+          </a:xfrm>
+          <a:prstGeom prst="rect">
+            <a:avLst/>
+          </a:prstGeom>
+          <a:solidFill>
+            <a:schemeClr val="accent1">
+              <a:lumMod val="40000"/>
+              <a:lumOff val="60000"/>
+            </a:schemeClr>
+          </a:solidFill>
+        </p:spPr>
+        <p:style>
+          <a:lnRef idx="2">
+            <a:schemeClr val="accent1">
+              <a:shade val="15000"/>
+            </a:schemeClr>
+          </a:lnRef>
+          <a:fillRef idx="1">
+            <a:schemeClr val="accent1"/>
+          </a:fillRef>
+          <a:effectRef idx="0">
+            <a:schemeClr val="accent1"/>
+          </a:effectRef>
+          <a:fontRef idx="minor">
+            <a:schemeClr val="lt1"/>
+          </a:fontRef>
+        </p:style>
+        <p:txBody>
+          <a:bodyPr numCol="2" rtlCol="0" anchor="ctr"/>
+          <a:lstStyle/>
+          <a:p>
+            <a:pPr algn="ctr"/>
+            <a:r>
+              <a:rPr lang="en-GB" sz="1400" dirty="0">
+                <a:solidFill>
+                  <a:sysClr val="windowText" lastClr="000000"/>
+                </a:solidFill>
+                <a:latin typeface="SimHei" panose="020B0503020204020204" pitchFamily="49" charset="-122"/>
+                <a:ea typeface="SimHei" panose="020B0503020204020204" pitchFamily="49" charset="-122"/>
+              </a:rPr>
+              <a:t>bedtools intersect -v (no overlap) </a:t>
+            </a:r>
+            <a:r>
+              <a:rPr lang="en-GB" sz="1400" dirty="0" err="1">
+                <a:solidFill>
+                  <a:sysClr val="windowText" lastClr="000000"/>
+                </a:solidFill>
+                <a:latin typeface="SimHei" panose="020B0503020204020204" pitchFamily="49" charset="-122"/>
+                <a:ea typeface="SimHei" panose="020B0503020204020204" pitchFamily="49" charset="-122"/>
+              </a:rPr>
+              <a:t>Wide_canonical_splice_sites.bed</a:t>
+            </a:r>
+            <a:br>
+              <a:rPr lang="en-GB" sz="1400" dirty="0">
+                <a:solidFill>
+                  <a:sysClr val="windowText" lastClr="000000"/>
+                </a:solidFill>
+                <a:latin typeface="SimHei" panose="020B0503020204020204" pitchFamily="49" charset="-122"/>
+                <a:ea typeface="SimHei" panose="020B0503020204020204" pitchFamily="49" charset="-122"/>
+              </a:rPr>
+            </a:br>
+            <a:r>
+              <a:rPr lang="en-GB" sz="1400" dirty="0">
+                <a:solidFill>
+                  <a:sysClr val="windowText" lastClr="000000"/>
+                </a:solidFill>
+                <a:latin typeface="SimHei" panose="020B0503020204020204" pitchFamily="49" charset="-122"/>
+                <a:ea typeface="SimHei" panose="020B0503020204020204" pitchFamily="49" charset="-122"/>
+              </a:rPr>
+              <a:t>== </a:t>
+            </a:r>
+            <a:r>
+              <a:rPr lang="en-GB" sz="1400" dirty="0" err="1">
+                <a:solidFill>
+                  <a:schemeClr val="accent1"/>
+                </a:solidFill>
+                <a:latin typeface="SimHei" panose="020B0503020204020204" pitchFamily="49" charset="-122"/>
+                <a:ea typeface="SimHei" panose="020B0503020204020204" pitchFamily="49" charset="-122"/>
+              </a:rPr>
+              <a:t>deep_intronic_sites.bed</a:t>
+            </a:r>
+            <a:endParaRPr lang="en-GB" sz="1400" dirty="0">
+              <a:solidFill>
+                <a:sysClr val="windowText" lastClr="000000"/>
+              </a:solidFill>
+              <a:latin typeface="SimHei" panose="020B0503020204020204" pitchFamily="49" charset="-122"/>
+              <a:ea typeface="SimHei" panose="020B0503020204020204" pitchFamily="49" charset="-122"/>
+            </a:endParaRPr>
+          </a:p>
+          <a:p>
+            <a:pPr algn="ctr"/>
+            <a:r>
+              <a:rPr lang="en-GB" sz="1400" dirty="0">
+                <a:solidFill>
+                  <a:sysClr val="windowText" lastClr="000000"/>
+                </a:solidFill>
+                <a:latin typeface="SimHei" panose="020B0503020204020204" pitchFamily="49" charset="-122"/>
+                <a:ea typeface="SimHei" panose="020B0503020204020204" pitchFamily="49" charset="-122"/>
+              </a:rPr>
+              <a:t>bedtools intersect -c (does overlap) </a:t>
+            </a:r>
+            <a:r>
+              <a:rPr lang="en-GB" sz="1400" dirty="0" err="1">
+                <a:solidFill>
+                  <a:sysClr val="windowText" lastClr="000000"/>
+                </a:solidFill>
+                <a:latin typeface="SimHei" panose="020B0503020204020204" pitchFamily="49" charset="-122"/>
+                <a:ea typeface="SimHei" panose="020B0503020204020204" pitchFamily="49" charset="-122"/>
+              </a:rPr>
+              <a:t>Wide_canonical_splice_sites.bed</a:t>
+            </a:r>
+            <a:br>
+              <a:rPr lang="en-GB" sz="1400" dirty="0">
+                <a:solidFill>
+                  <a:sysClr val="windowText" lastClr="000000"/>
+                </a:solidFill>
+                <a:latin typeface="SimHei" panose="020B0503020204020204" pitchFamily="49" charset="-122"/>
+                <a:ea typeface="SimHei" panose="020B0503020204020204" pitchFamily="49" charset="-122"/>
+              </a:rPr>
+            </a:br>
+            <a:r>
+              <a:rPr lang="en-GB" sz="1400" dirty="0">
+                <a:solidFill>
+                  <a:sysClr val="windowText" lastClr="000000"/>
+                </a:solidFill>
+                <a:latin typeface="SimHei" panose="020B0503020204020204" pitchFamily="49" charset="-122"/>
+                <a:ea typeface="SimHei" panose="020B0503020204020204" pitchFamily="49" charset="-122"/>
+              </a:rPr>
+              <a:t>== </a:t>
+            </a:r>
+            <a:r>
+              <a:rPr lang="en-GB" sz="1400" dirty="0" err="1">
+                <a:solidFill>
+                  <a:schemeClr val="accent1"/>
+                </a:solidFill>
+                <a:latin typeface="SimHei" panose="020B0503020204020204" pitchFamily="49" charset="-122"/>
+                <a:ea typeface="SimHei" panose="020B0503020204020204" pitchFamily="49" charset="-122"/>
+              </a:rPr>
+              <a:t>exonic.bed</a:t>
+            </a:r>
+            <a:endParaRPr lang="en-US" sz="1400" dirty="0">
+              <a:solidFill>
+                <a:schemeClr val="accent1"/>
+              </a:solidFill>
+              <a:latin typeface="Abadi" panose="020B0604020104020204" pitchFamily="34" charset="0"/>
+            </a:endParaRPr>
+          </a:p>
+        </p:txBody>
+      </p:sp>
+      <p:sp>
+        <p:nvSpPr>
+          <p:cNvPr id="10" name="Rectangle 9">
+            <a:extLst>
+              <a:ext uri="{FF2B5EF4-FFF2-40B4-BE49-F238E27FC236}">
+                <a16:creationId xmlns:a16="http://schemas.microsoft.com/office/drawing/2014/main" id="{2E967661-85DE-107A-4B1B-CFB488F451C2}"/>
+              </a:ext>
+            </a:extLst>
+          </p:cNvPr>
+          <p:cNvSpPr/>
+          <p:nvPr/>
+        </p:nvSpPr>
+        <p:spPr>
+          <a:xfrm>
+            <a:off x="2127250" y="5045458"/>
+            <a:ext cx="2603500" cy="393700"/>
+          </a:xfrm>
+          <a:prstGeom prst="rect">
+            <a:avLst/>
+          </a:prstGeom>
+          <a:ln w="19050">
+            <a:solidFill>
+              <a:schemeClr val="tx1"/>
+            </a:solidFill>
+          </a:ln>
+        </p:spPr>
+        <p:style>
+          <a:lnRef idx="2">
+            <a:schemeClr val="accent1"/>
+          </a:lnRef>
+          <a:fillRef idx="1">
+            <a:schemeClr val="lt1"/>
+          </a:fillRef>
+          <a:effectRef idx="0">
+            <a:schemeClr val="accent1"/>
+          </a:effectRef>
+          <a:fontRef idx="minor">
+            <a:schemeClr val="dk1"/>
+          </a:fontRef>
+        </p:style>
+        <p:txBody>
+          <a:bodyPr rtlCol="0" anchor="ctr"/>
+          <a:lstStyle/>
+          <a:p>
+            <a:pPr algn="ctr"/>
+            <a:r>
+              <a:rPr lang="en-US" b="1" dirty="0">
+                <a:latin typeface="Raleway" pitchFamily="2" charset="0"/>
+                <a:cs typeface="Posterama" panose="020B0504020200020000" pitchFamily="34" charset="0"/>
+              </a:rPr>
+              <a:t>Bedtools intersect</a:t>
+            </a:r>
+            <a:endParaRPr lang="en-GB" b="1" dirty="0">
+              <a:latin typeface="Raleway" pitchFamily="2" charset="0"/>
+              <a:cs typeface="Posterama" panose="020B0504020200020000" pitchFamily="34" charset="0"/>
+            </a:endParaRPr>
+          </a:p>
+        </p:txBody>
+      </p:sp>
+      <p:sp>
+        <p:nvSpPr>
+          <p:cNvPr id="21" name="Rectangle 20">
+            <a:extLst>
+              <a:ext uri="{FF2B5EF4-FFF2-40B4-BE49-F238E27FC236}">
+                <a16:creationId xmlns:a16="http://schemas.microsoft.com/office/drawing/2014/main" id="{7851F035-A026-80BA-A628-1C81C6EB44B3}"/>
+              </a:ext>
+            </a:extLst>
+          </p:cNvPr>
+          <p:cNvSpPr/>
+          <p:nvPr/>
+        </p:nvSpPr>
+        <p:spPr>
+          <a:xfrm>
+            <a:off x="1847053" y="3419614"/>
+            <a:ext cx="3154360" cy="393700"/>
+          </a:xfrm>
+          <a:prstGeom prst="rect">
+            <a:avLst/>
+          </a:prstGeom>
+          <a:ln w="19050">
+            <a:solidFill>
+              <a:schemeClr val="tx1"/>
+            </a:solidFill>
+          </a:ln>
+        </p:spPr>
+        <p:style>
+          <a:lnRef idx="2">
+            <a:schemeClr val="accent1"/>
+          </a:lnRef>
+          <a:fillRef idx="1">
+            <a:schemeClr val="lt1"/>
+          </a:fillRef>
+          <a:effectRef idx="0">
+            <a:schemeClr val="accent1"/>
+          </a:effectRef>
+          <a:fontRef idx="minor">
+            <a:schemeClr val="dk1"/>
+          </a:fontRef>
+        </p:style>
+        <p:txBody>
+          <a:bodyPr rtlCol="0" anchor="ctr"/>
+          <a:lstStyle/>
+          <a:p>
+            <a:pPr algn="ctr"/>
+            <a:r>
+              <a:rPr lang="en-US" b="1" dirty="0">
+                <a:latin typeface="Raleway" pitchFamily="2" charset="0"/>
+                <a:cs typeface="Posterama" panose="020B0504020200020000" pitchFamily="34" charset="0"/>
+              </a:rPr>
+              <a:t>VAST-DB MAIN-PSI-TABLE</a:t>
+            </a:r>
+            <a:endParaRPr lang="en-GB" b="1" dirty="0">
+              <a:latin typeface="Raleway" pitchFamily="2" charset="0"/>
+              <a:cs typeface="Posterama" panose="020B0504020200020000" pitchFamily="34" charset="0"/>
+            </a:endParaRPr>
+          </a:p>
+        </p:txBody>
+      </p:sp>
+      <p:sp>
+        <p:nvSpPr>
+          <p:cNvPr id="25" name="Rectangle 24">
+            <a:extLst>
+              <a:ext uri="{FF2B5EF4-FFF2-40B4-BE49-F238E27FC236}">
+                <a16:creationId xmlns:a16="http://schemas.microsoft.com/office/drawing/2014/main" id="{6530B05C-C3AA-27AC-7761-A14BF84794E5}"/>
+              </a:ext>
+            </a:extLst>
+          </p:cNvPr>
+          <p:cNvSpPr/>
+          <p:nvPr/>
+        </p:nvSpPr>
+        <p:spPr>
+          <a:xfrm>
+            <a:off x="192410" y="6734386"/>
+            <a:ext cx="6473179" cy="1132482"/>
+          </a:xfrm>
+          <a:prstGeom prst="rect">
+            <a:avLst/>
+          </a:prstGeom>
+          <a:solidFill>
+            <a:schemeClr val="accent1">
+              <a:lumMod val="40000"/>
+              <a:lumOff val="60000"/>
+            </a:schemeClr>
+          </a:solidFill>
+        </p:spPr>
+        <p:style>
+          <a:lnRef idx="2">
+            <a:schemeClr val="accent1">
+              <a:shade val="15000"/>
+            </a:schemeClr>
+          </a:lnRef>
+          <a:fillRef idx="1">
+            <a:schemeClr val="accent1"/>
+          </a:fillRef>
+          <a:effectRef idx="0">
+            <a:schemeClr val="accent1"/>
+          </a:effectRef>
+          <a:fontRef idx="minor">
+            <a:schemeClr val="lt1"/>
+          </a:fontRef>
+        </p:style>
+        <p:txBody>
+          <a:bodyPr numCol="2" rtlCol="0" anchor="ctr"/>
+          <a:lstStyle/>
+          <a:p>
+            <a:pPr algn="ctr"/>
+            <a:r>
+              <a:rPr lang="en-US" sz="1200" dirty="0">
+                <a:solidFill>
+                  <a:schemeClr val="tx1"/>
+                </a:solidFill>
+                <a:latin typeface="Abadi" panose="020B0604020104020204" pitchFamily="34" charset="0"/>
+              </a:rPr>
+              <a:t>Intersect </a:t>
+            </a:r>
+            <a:r>
+              <a:rPr lang="en-US" sz="1200" dirty="0" err="1">
+                <a:solidFill>
+                  <a:schemeClr val="tx1"/>
+                </a:solidFill>
+                <a:latin typeface="Abadi" panose="020B0604020104020204" pitchFamily="34" charset="0"/>
+              </a:rPr>
+              <a:t>deep_intronic_sites.bed</a:t>
+            </a:r>
+            <a:r>
+              <a:rPr lang="en-US" sz="1200" dirty="0">
+                <a:solidFill>
+                  <a:schemeClr val="tx1"/>
+                </a:solidFill>
+                <a:latin typeface="Abadi" panose="020B0604020104020204" pitchFamily="34" charset="0"/>
+              </a:rPr>
+              <a:t> </a:t>
+            </a:r>
+            <a:br>
+              <a:rPr lang="en-US" sz="1200" dirty="0">
+                <a:solidFill>
+                  <a:schemeClr val="accent1"/>
+                </a:solidFill>
+                <a:latin typeface="Abadi" panose="020B0604020104020204" pitchFamily="34" charset="0"/>
+              </a:rPr>
+            </a:br>
+            <a:r>
+              <a:rPr lang="en-US" sz="1200" dirty="0" err="1">
+                <a:solidFill>
+                  <a:schemeClr val="accent1"/>
+                </a:solidFill>
+                <a:latin typeface="Abadi" panose="020B0604020104020204" pitchFamily="34" charset="0"/>
+              </a:rPr>
+              <a:t>RBPnet</a:t>
+            </a:r>
+            <a:r>
+              <a:rPr lang="en-US" sz="1200" dirty="0">
+                <a:solidFill>
+                  <a:schemeClr val="accent1"/>
+                </a:solidFill>
+                <a:latin typeface="Abadi" panose="020B0604020104020204" pitchFamily="34" charset="0"/>
+              </a:rPr>
+              <a:t> PRPF8 predictions </a:t>
+            </a:r>
+          </a:p>
+          <a:p>
+            <a:pPr algn="ctr"/>
+            <a:r>
+              <a:rPr lang="en-US" sz="1200" dirty="0">
+                <a:solidFill>
+                  <a:schemeClr val="tx1"/>
+                </a:solidFill>
+                <a:latin typeface="Abadi" panose="020B0604020104020204" pitchFamily="34" charset="0"/>
+              </a:rPr>
+              <a:t>and/or </a:t>
+            </a:r>
+            <a:r>
+              <a:rPr lang="en-US" sz="1200" dirty="0">
+                <a:solidFill>
+                  <a:schemeClr val="accent1"/>
+                </a:solidFill>
+                <a:latin typeface="Abadi" panose="020B0604020104020204" pitchFamily="34" charset="0"/>
+              </a:rPr>
+              <a:t>PRPF8 Peaks </a:t>
+            </a:r>
+          </a:p>
+          <a:p>
+            <a:pPr algn="ctr"/>
+            <a:r>
+              <a:rPr lang="en-US" sz="1200" dirty="0">
+                <a:solidFill>
+                  <a:schemeClr val="tx1"/>
+                </a:solidFill>
+                <a:latin typeface="Abadi" panose="020B0604020104020204" pitchFamily="34" charset="0"/>
+              </a:rPr>
+              <a:t>and/or </a:t>
+            </a:r>
+            <a:r>
+              <a:rPr lang="en-US" sz="1200" dirty="0" err="1">
+                <a:solidFill>
+                  <a:schemeClr val="accent1"/>
+                </a:solidFill>
+                <a:latin typeface="Abadi" panose="020B0604020104020204" pitchFamily="34" charset="0"/>
+              </a:rPr>
+              <a:t>SmB</a:t>
+            </a:r>
+            <a:r>
+              <a:rPr lang="en-US" sz="1200" dirty="0">
+                <a:solidFill>
+                  <a:schemeClr val="accent1"/>
+                </a:solidFill>
+                <a:latin typeface="Abadi" panose="020B0604020104020204" pitchFamily="34" charset="0"/>
+              </a:rPr>
+              <a:t> Peaks</a:t>
+            </a:r>
+          </a:p>
+          <a:p>
+            <a:pPr algn="ctr"/>
+            <a:r>
+              <a:rPr lang="en-US" sz="1200" dirty="0">
+                <a:solidFill>
+                  <a:schemeClr val="tx1"/>
+                </a:solidFill>
+                <a:latin typeface="Abadi" panose="020B0604020104020204" pitchFamily="34" charset="0"/>
+              </a:rPr>
+              <a:t>== </a:t>
+            </a:r>
+            <a:r>
+              <a:rPr lang="en-US" sz="1200" dirty="0" err="1">
+                <a:solidFill>
+                  <a:schemeClr val="tx1"/>
+                </a:solidFill>
+                <a:latin typeface="Abadi" panose="020B0604020104020204" pitchFamily="34" charset="0"/>
+              </a:rPr>
+              <a:t>decoys.bed</a:t>
+            </a:r>
+            <a:endParaRPr lang="en-US" sz="1200" dirty="0">
+              <a:solidFill>
+                <a:schemeClr val="tx1"/>
+              </a:solidFill>
+              <a:latin typeface="Abadi" panose="020B0604020104020204" pitchFamily="34" charset="0"/>
+            </a:endParaRPr>
+          </a:p>
+          <a:p>
+            <a:pPr algn="ctr"/>
+            <a:r>
+              <a:rPr lang="en-US" sz="1200" dirty="0">
+                <a:solidFill>
+                  <a:schemeClr val="tx1"/>
+                </a:solidFill>
+                <a:latin typeface="Abadi" panose="020B0604020104020204" pitchFamily="34" charset="0"/>
+              </a:rPr>
+              <a:t>Intersect </a:t>
+            </a:r>
+            <a:r>
+              <a:rPr lang="en-US" sz="1200" dirty="0" err="1">
+                <a:solidFill>
+                  <a:schemeClr val="tx1"/>
+                </a:solidFill>
+                <a:latin typeface="Abadi" panose="020B0604020104020204" pitchFamily="34" charset="0"/>
+              </a:rPr>
+              <a:t>deep_intronic_sites.bed</a:t>
+            </a:r>
+            <a:br>
+              <a:rPr lang="en-US" sz="1200" dirty="0">
+                <a:solidFill>
+                  <a:schemeClr val="tx1"/>
+                </a:solidFill>
+                <a:latin typeface="Abadi" panose="020B0604020104020204" pitchFamily="34" charset="0"/>
+              </a:rPr>
+            </a:br>
+            <a:r>
+              <a:rPr lang="en-US" sz="1200" dirty="0">
+                <a:solidFill>
+                  <a:schemeClr val="tx1"/>
+                </a:solidFill>
+                <a:latin typeface="Abadi" panose="020B0604020104020204" pitchFamily="34" charset="0"/>
+              </a:rPr>
+              <a:t>None of </a:t>
+            </a:r>
+            <a:r>
+              <a:rPr lang="en-US" sz="1200" dirty="0" err="1">
+                <a:solidFill>
+                  <a:schemeClr val="accent1"/>
+                </a:solidFill>
+                <a:latin typeface="Abadi" panose="020B0604020104020204" pitchFamily="34" charset="0"/>
+              </a:rPr>
+              <a:t>RBPnet</a:t>
+            </a:r>
+            <a:r>
+              <a:rPr lang="en-US" sz="1200" dirty="0">
+                <a:solidFill>
+                  <a:schemeClr val="accent1"/>
+                </a:solidFill>
+                <a:latin typeface="Abadi" panose="020B0604020104020204" pitchFamily="34" charset="0"/>
+              </a:rPr>
+              <a:t> PRPF8 predictions </a:t>
+            </a:r>
+          </a:p>
+          <a:p>
+            <a:pPr algn="ctr"/>
+            <a:r>
+              <a:rPr lang="en-US" sz="1200" dirty="0">
+                <a:solidFill>
+                  <a:schemeClr val="tx1"/>
+                </a:solidFill>
+                <a:latin typeface="Abadi" panose="020B0604020104020204" pitchFamily="34" charset="0"/>
+              </a:rPr>
+              <a:t>or </a:t>
+            </a:r>
+            <a:r>
+              <a:rPr lang="en-US" sz="1200" dirty="0">
+                <a:solidFill>
+                  <a:schemeClr val="accent1"/>
+                </a:solidFill>
+                <a:latin typeface="Abadi" panose="020B0604020104020204" pitchFamily="34" charset="0"/>
+              </a:rPr>
+              <a:t>PRPF8 Peaks </a:t>
+            </a:r>
+          </a:p>
+          <a:p>
+            <a:pPr algn="ctr"/>
+            <a:r>
+              <a:rPr lang="en-US" sz="1200" dirty="0">
+                <a:solidFill>
+                  <a:schemeClr val="tx1"/>
+                </a:solidFill>
+                <a:latin typeface="Abadi" panose="020B0604020104020204" pitchFamily="34" charset="0"/>
+              </a:rPr>
+              <a:t>or </a:t>
+            </a:r>
+            <a:r>
+              <a:rPr lang="en-US" sz="1200" dirty="0" err="1">
+                <a:solidFill>
+                  <a:schemeClr val="accent1"/>
+                </a:solidFill>
+                <a:latin typeface="Abadi" panose="020B0604020104020204" pitchFamily="34" charset="0"/>
+              </a:rPr>
+              <a:t>SmB</a:t>
+            </a:r>
+            <a:r>
+              <a:rPr lang="en-US" sz="1200" dirty="0">
+                <a:solidFill>
+                  <a:schemeClr val="accent1"/>
+                </a:solidFill>
+                <a:latin typeface="Abadi" panose="020B0604020104020204" pitchFamily="34" charset="0"/>
+              </a:rPr>
+              <a:t> Peaks</a:t>
+            </a:r>
+          </a:p>
+          <a:p>
+            <a:pPr algn="ctr"/>
+            <a:r>
+              <a:rPr lang="en-US" sz="1200" dirty="0">
+                <a:solidFill>
+                  <a:schemeClr val="tx1"/>
+                </a:solidFill>
+                <a:latin typeface="Abadi" panose="020B0604020104020204" pitchFamily="34" charset="0"/>
+              </a:rPr>
+              <a:t>== </a:t>
+            </a:r>
+            <a:r>
+              <a:rPr lang="en-US" sz="1200" dirty="0" err="1">
+                <a:solidFill>
+                  <a:schemeClr val="tx1"/>
+                </a:solidFill>
+                <a:latin typeface="Abadi" panose="020B0604020104020204" pitchFamily="34" charset="0"/>
+              </a:rPr>
+              <a:t>cryptic_sites.bed</a:t>
+            </a:r>
+            <a:endParaRPr lang="en-US" sz="1200" dirty="0">
+              <a:solidFill>
+                <a:schemeClr val="tx1"/>
+              </a:solidFill>
+              <a:latin typeface="Abadi" panose="020B0604020104020204" pitchFamily="34" charset="0"/>
+            </a:endParaRPr>
+          </a:p>
+        </p:txBody>
+      </p:sp>
+      <p:sp>
+        <p:nvSpPr>
+          <p:cNvPr id="30" name="Rectangle 29">
+            <a:extLst>
+              <a:ext uri="{FF2B5EF4-FFF2-40B4-BE49-F238E27FC236}">
+                <a16:creationId xmlns:a16="http://schemas.microsoft.com/office/drawing/2014/main" id="{A0F3A86D-8144-E379-7458-D6A9C0EC011D}"/>
+              </a:ext>
+            </a:extLst>
+          </p:cNvPr>
+          <p:cNvSpPr/>
+          <p:nvPr/>
+        </p:nvSpPr>
+        <p:spPr>
+          <a:xfrm>
+            <a:off x="1388756" y="8188935"/>
+            <a:ext cx="4391691" cy="1876706"/>
+          </a:xfrm>
+          <a:prstGeom prst="rect">
+            <a:avLst/>
+          </a:prstGeom>
+          <a:solidFill>
+            <a:schemeClr val="accent1">
+              <a:lumMod val="40000"/>
+              <a:lumOff val="60000"/>
+            </a:schemeClr>
+          </a:solidFill>
+        </p:spPr>
+        <p:style>
+          <a:lnRef idx="2">
+            <a:schemeClr val="accent1">
+              <a:shade val="15000"/>
+            </a:schemeClr>
+          </a:lnRef>
+          <a:fillRef idx="1">
+            <a:schemeClr val="accent1"/>
+          </a:fillRef>
+          <a:effectRef idx="0">
+            <a:schemeClr val="accent1"/>
+          </a:effectRef>
+          <a:fontRef idx="minor">
+            <a:schemeClr val="lt1"/>
+          </a:fontRef>
+        </p:style>
+        <p:txBody>
+          <a:bodyPr numCol="1" rtlCol="0" anchor="ctr"/>
+          <a:lstStyle/>
+          <a:p>
+            <a:pPr algn="ctr"/>
+            <a:r>
+              <a:rPr lang="en-US" sz="1200" dirty="0">
+                <a:solidFill>
+                  <a:schemeClr val="tx1"/>
+                </a:solidFill>
+                <a:latin typeface="Abadi" panose="020B0604020104020204" pitchFamily="34" charset="0"/>
+              </a:rPr>
+              <a:t>Intersect </a:t>
+            </a:r>
+            <a:r>
+              <a:rPr lang="en-US" sz="1200" dirty="0" err="1">
+                <a:solidFill>
+                  <a:schemeClr val="tx1"/>
+                </a:solidFill>
+                <a:latin typeface="Abadi" panose="020B0604020104020204" pitchFamily="34" charset="0"/>
+              </a:rPr>
+              <a:t>Canonical_splice_sites.bed</a:t>
+            </a:r>
+            <a:endParaRPr lang="en-US" sz="1200" dirty="0">
+              <a:solidFill>
+                <a:schemeClr val="tx1"/>
+              </a:solidFill>
+              <a:latin typeface="Abadi" panose="020B0604020104020204" pitchFamily="34" charset="0"/>
+            </a:endParaRPr>
+          </a:p>
+          <a:p>
+            <a:pPr algn="ctr"/>
+            <a:r>
+              <a:rPr lang="en-US" sz="1200" dirty="0" err="1">
+                <a:solidFill>
+                  <a:schemeClr val="accent1"/>
+                </a:solidFill>
+                <a:latin typeface="Abadi" panose="020B0604020104020204" pitchFamily="34" charset="0"/>
+              </a:rPr>
+              <a:t>RBPnet</a:t>
+            </a:r>
+            <a:r>
+              <a:rPr lang="en-US" sz="1200" dirty="0">
+                <a:solidFill>
+                  <a:schemeClr val="accent1"/>
+                </a:solidFill>
+                <a:latin typeface="Abadi" panose="020B0604020104020204" pitchFamily="34" charset="0"/>
+              </a:rPr>
+              <a:t> PRPF8 predictions </a:t>
+            </a:r>
+          </a:p>
+          <a:p>
+            <a:pPr algn="ctr"/>
+            <a:r>
+              <a:rPr lang="en-US" sz="1200" dirty="0">
+                <a:solidFill>
+                  <a:schemeClr val="tx1"/>
+                </a:solidFill>
+                <a:latin typeface="Abadi" panose="020B0604020104020204" pitchFamily="34" charset="0"/>
+              </a:rPr>
+              <a:t>and/or </a:t>
+            </a:r>
+            <a:r>
+              <a:rPr lang="en-US" sz="1200" dirty="0">
+                <a:solidFill>
+                  <a:schemeClr val="accent1"/>
+                </a:solidFill>
+                <a:latin typeface="Abadi" panose="020B0604020104020204" pitchFamily="34" charset="0"/>
+              </a:rPr>
+              <a:t>PRPF8 Peaks </a:t>
+            </a:r>
+          </a:p>
+          <a:p>
+            <a:pPr algn="ctr"/>
+            <a:r>
+              <a:rPr lang="en-US" sz="1200" dirty="0">
+                <a:solidFill>
+                  <a:schemeClr val="tx1"/>
+                </a:solidFill>
+                <a:latin typeface="Abadi" panose="020B0604020104020204" pitchFamily="34" charset="0"/>
+              </a:rPr>
+              <a:t>and/or </a:t>
+            </a:r>
+            <a:r>
+              <a:rPr lang="en-US" sz="1200" dirty="0" err="1">
+                <a:solidFill>
+                  <a:schemeClr val="accent1"/>
+                </a:solidFill>
+                <a:latin typeface="Abadi" panose="020B0604020104020204" pitchFamily="34" charset="0"/>
+              </a:rPr>
+              <a:t>SmB</a:t>
+            </a:r>
+            <a:r>
+              <a:rPr lang="en-US" sz="1200" dirty="0">
+                <a:solidFill>
+                  <a:schemeClr val="accent1"/>
+                </a:solidFill>
+                <a:latin typeface="Abadi" panose="020B0604020104020204" pitchFamily="34" charset="0"/>
+              </a:rPr>
+              <a:t> Peaks</a:t>
+            </a:r>
+          </a:p>
+          <a:p>
+            <a:pPr algn="ctr"/>
+            <a:r>
+              <a:rPr lang="en-US" sz="1200" dirty="0">
+                <a:solidFill>
+                  <a:schemeClr val="tx1"/>
+                </a:solidFill>
+                <a:latin typeface="Abadi" panose="020B0604020104020204" pitchFamily="34" charset="0"/>
+              </a:rPr>
+              <a:t>==</a:t>
+            </a:r>
+            <a:r>
+              <a:rPr lang="en-US" sz="1200" dirty="0">
+                <a:solidFill>
+                  <a:schemeClr val="accent1"/>
+                </a:solidFill>
+                <a:latin typeface="Abadi" panose="020B0604020104020204" pitchFamily="34" charset="0"/>
+              </a:rPr>
+              <a:t> </a:t>
+            </a:r>
+            <a:r>
+              <a:rPr lang="en-US" sz="1200" dirty="0" err="1">
+                <a:solidFill>
+                  <a:schemeClr val="accent1"/>
+                </a:solidFill>
+                <a:latin typeface="Abadi" panose="020B0604020104020204" pitchFamily="34" charset="0"/>
+              </a:rPr>
+              <a:t>canonical_supported_sites.bed</a:t>
+            </a:r>
+            <a:endParaRPr lang="en-US" sz="1200" dirty="0">
+              <a:solidFill>
+                <a:schemeClr val="accent1"/>
+              </a:solidFill>
+              <a:latin typeface="Abadi" panose="020B0604020104020204" pitchFamily="34" charset="0"/>
+            </a:endParaRPr>
+          </a:p>
+          <a:p>
+            <a:pPr algn="ctr"/>
+            <a:br>
+              <a:rPr lang="en-US" sz="1200" dirty="0">
+                <a:solidFill>
+                  <a:schemeClr val="tx1"/>
+                </a:solidFill>
+                <a:latin typeface="Abadi" panose="020B0604020104020204" pitchFamily="34" charset="0"/>
+              </a:rPr>
+            </a:br>
+            <a:r>
+              <a:rPr lang="en-US" sz="1200" dirty="0">
+                <a:solidFill>
+                  <a:schemeClr val="tx1"/>
+                </a:solidFill>
+                <a:latin typeface="Abadi" panose="020B0604020104020204" pitchFamily="34" charset="0"/>
+              </a:rPr>
+              <a:t>Build overlap with introns and </a:t>
+            </a:r>
+            <a:r>
+              <a:rPr lang="en-US" sz="1200" dirty="0" err="1">
+                <a:solidFill>
+                  <a:schemeClr val="tx1"/>
+                </a:solidFill>
+                <a:latin typeface="Abadi" panose="020B0604020104020204" pitchFamily="34" charset="0"/>
+              </a:rPr>
+              <a:t>GRanges</a:t>
+            </a:r>
+            <a:r>
+              <a:rPr lang="en-US" sz="1200" dirty="0">
+                <a:solidFill>
+                  <a:schemeClr val="tx1"/>
+                </a:solidFill>
+                <a:latin typeface="Abadi" panose="020B0604020104020204" pitchFamily="34" charset="0"/>
+              </a:rPr>
+              <a:t> for </a:t>
+            </a:r>
+            <a:r>
+              <a:rPr lang="en-US" sz="1200" dirty="0" err="1">
+                <a:solidFill>
+                  <a:schemeClr val="tx1"/>
+                </a:solidFill>
+                <a:latin typeface="Abadi" panose="020B0604020104020204" pitchFamily="34" charset="0"/>
+              </a:rPr>
+              <a:t>cryptic_sites.bed</a:t>
+            </a:r>
+            <a:r>
+              <a:rPr lang="en-US" sz="1200" dirty="0">
+                <a:solidFill>
+                  <a:schemeClr val="tx1"/>
+                </a:solidFill>
+                <a:latin typeface="Abadi" panose="020B0604020104020204" pitchFamily="34" charset="0"/>
+              </a:rPr>
+              <a:t> </a:t>
+            </a:r>
+            <a:br>
+              <a:rPr lang="en-US" sz="1200" dirty="0">
+                <a:solidFill>
+                  <a:schemeClr val="accent1"/>
+                </a:solidFill>
+                <a:latin typeface="Abadi" panose="020B0604020104020204" pitchFamily="34" charset="0"/>
+              </a:rPr>
+            </a:br>
+            <a:r>
+              <a:rPr lang="en-US" sz="1200" dirty="0">
+                <a:solidFill>
+                  <a:schemeClr val="tx1">
+                    <a:lumMod val="95000"/>
+                    <a:lumOff val="5000"/>
+                  </a:schemeClr>
+                </a:solidFill>
+                <a:latin typeface="Abadi" panose="020B0604020104020204" pitchFamily="34" charset="0"/>
+              </a:rPr>
+              <a:t>with</a:t>
+            </a:r>
+            <a:r>
+              <a:rPr lang="en-US" sz="1200" dirty="0">
+                <a:solidFill>
+                  <a:schemeClr val="accent1"/>
+                </a:solidFill>
+                <a:latin typeface="Abadi" panose="020B0604020104020204" pitchFamily="34" charset="0"/>
+              </a:rPr>
+              <a:t> </a:t>
+            </a:r>
+            <a:r>
+              <a:rPr lang="en-US" sz="1200" dirty="0" err="1">
+                <a:solidFill>
+                  <a:schemeClr val="accent1"/>
+                </a:solidFill>
+                <a:latin typeface="Abadi" panose="020B0604020104020204" pitchFamily="34" charset="0"/>
+              </a:rPr>
+              <a:t>canonical_supported_sites.bed</a:t>
+            </a:r>
+            <a:endParaRPr lang="en-US" sz="1200" dirty="0">
+              <a:solidFill>
+                <a:schemeClr val="accent1"/>
+              </a:solidFill>
+              <a:latin typeface="Abadi" panose="020B0604020104020204" pitchFamily="34" charset="0"/>
+            </a:endParaRPr>
+          </a:p>
+          <a:p>
+            <a:pPr algn="ctr"/>
+            <a:r>
+              <a:rPr lang="en-US" sz="1200" dirty="0">
+                <a:solidFill>
+                  <a:schemeClr val="accent1"/>
+                </a:solidFill>
+                <a:latin typeface="Abadi" panose="020B0604020104020204" pitchFamily="34" charset="0"/>
+              </a:rPr>
+              <a:t>== </a:t>
+            </a:r>
+            <a:r>
+              <a:rPr lang="en-US" sz="1200" dirty="0" err="1">
+                <a:solidFill>
+                  <a:schemeClr val="accent1"/>
+                </a:solidFill>
+                <a:latin typeface="Abadi" panose="020B0604020104020204" pitchFamily="34" charset="0"/>
+              </a:rPr>
+              <a:t>cryptics_supported.bed</a:t>
+            </a:r>
+            <a:endParaRPr lang="en-US" sz="1200" dirty="0">
+              <a:solidFill>
+                <a:schemeClr val="accent1"/>
+              </a:solidFill>
+              <a:latin typeface="Abadi" panose="020B0604020104020204" pitchFamily="34" charset="0"/>
+            </a:endParaRPr>
+          </a:p>
+        </p:txBody>
+      </p:sp>
+      <p:cxnSp>
+        <p:nvCxnSpPr>
+          <p:cNvPr id="40" name="Straight Arrow Connector 39">
+            <a:extLst>
+              <a:ext uri="{FF2B5EF4-FFF2-40B4-BE49-F238E27FC236}">
+                <a16:creationId xmlns:a16="http://schemas.microsoft.com/office/drawing/2014/main" id="{9EAE3BA6-02A6-6E1B-5136-D377E5FEE4E4}"/>
+              </a:ext>
+            </a:extLst>
+          </p:cNvPr>
+          <p:cNvCxnSpPr>
+            <a:cxnSpLocks/>
+          </p:cNvCxnSpPr>
+          <p:nvPr/>
+        </p:nvCxnSpPr>
+        <p:spPr>
+          <a:xfrm>
+            <a:off x="2717800" y="6270146"/>
+            <a:ext cx="622300" cy="641477"/>
+          </a:xfrm>
+          <a:prstGeom prst="straightConnector1">
+            <a:avLst/>
+          </a:prstGeom>
+          <a:ln>
+            <a:tailEnd type="triangle"/>
+          </a:ln>
+        </p:spPr>
+        <p:style>
+          <a:lnRef idx="3">
+            <a:schemeClr val="accent1"/>
+          </a:lnRef>
+          <a:fillRef idx="0">
+            <a:schemeClr val="accent1"/>
+          </a:fillRef>
+          <a:effectRef idx="2">
+            <a:schemeClr val="accent1"/>
+          </a:effectRef>
+          <a:fontRef idx="minor">
+            <a:schemeClr val="tx1"/>
+          </a:fontRef>
+        </p:style>
+      </p:cxnSp>
+      <p:sp>
+        <p:nvSpPr>
+          <p:cNvPr id="44" name="Rectangle 43">
+            <a:extLst>
+              <a:ext uri="{FF2B5EF4-FFF2-40B4-BE49-F238E27FC236}">
+                <a16:creationId xmlns:a16="http://schemas.microsoft.com/office/drawing/2014/main" id="{24971D70-9CC5-6605-0360-4DB1C48DE14B}"/>
+              </a:ext>
+            </a:extLst>
+          </p:cNvPr>
+          <p:cNvSpPr/>
+          <p:nvPr/>
+        </p:nvSpPr>
+        <p:spPr>
+          <a:xfrm>
+            <a:off x="2438455" y="10896599"/>
+            <a:ext cx="2292295" cy="993725"/>
+          </a:xfrm>
+          <a:prstGeom prst="rect">
+            <a:avLst/>
+          </a:prstGeom>
+          <a:solidFill>
+            <a:schemeClr val="accent1">
+              <a:lumMod val="40000"/>
+              <a:lumOff val="60000"/>
+            </a:schemeClr>
+          </a:solidFill>
+        </p:spPr>
+        <p:style>
+          <a:lnRef idx="2">
+            <a:schemeClr val="accent1">
+              <a:shade val="15000"/>
+            </a:schemeClr>
+          </a:lnRef>
+          <a:fillRef idx="1">
+            <a:schemeClr val="accent1"/>
+          </a:fillRef>
+          <a:effectRef idx="0">
+            <a:schemeClr val="accent1"/>
+          </a:effectRef>
+          <a:fontRef idx="minor">
+            <a:schemeClr val="lt1"/>
+          </a:fontRef>
+        </p:style>
+        <p:txBody>
+          <a:bodyPr numCol="1" rtlCol="0" anchor="ctr"/>
+          <a:lstStyle/>
+          <a:p>
+            <a:pPr algn="ctr"/>
+            <a:r>
+              <a:rPr lang="en-US" sz="1200" dirty="0">
+                <a:solidFill>
+                  <a:schemeClr val="tx1"/>
+                </a:solidFill>
+                <a:latin typeface="Abadi" panose="020B0604020104020204" pitchFamily="34" charset="0"/>
+              </a:rPr>
+              <a:t>TWO FINAL DATASETS</a:t>
+            </a:r>
+          </a:p>
+          <a:p>
+            <a:pPr algn="ctr"/>
+            <a:endParaRPr lang="en-US" sz="1200" dirty="0">
+              <a:solidFill>
+                <a:schemeClr val="tx1"/>
+              </a:solidFill>
+              <a:latin typeface="Abadi" panose="020B0604020104020204" pitchFamily="34" charset="0"/>
+            </a:endParaRPr>
+          </a:p>
+          <a:p>
+            <a:pPr marL="228600" indent="-228600">
+              <a:buFont typeface="+mj-lt"/>
+              <a:buAutoNum type="arabicPeriod"/>
+            </a:pPr>
+            <a:r>
+              <a:rPr lang="en-US" sz="1200" dirty="0" err="1">
+                <a:solidFill>
+                  <a:schemeClr val="tx1"/>
+                </a:solidFill>
+                <a:latin typeface="Abadi" panose="020B0604020104020204" pitchFamily="34" charset="0"/>
+              </a:rPr>
+              <a:t>Decoys.bed</a:t>
+            </a:r>
+            <a:endParaRPr lang="en-US" sz="1200" dirty="0">
+              <a:solidFill>
+                <a:schemeClr val="tx1"/>
+              </a:solidFill>
+              <a:latin typeface="Abadi" panose="020B0604020104020204" pitchFamily="34" charset="0"/>
+            </a:endParaRPr>
+          </a:p>
+          <a:p>
+            <a:pPr marL="228600" indent="-228600">
+              <a:buFont typeface="+mj-lt"/>
+              <a:buAutoNum type="arabicPeriod"/>
+            </a:pPr>
+            <a:r>
+              <a:rPr lang="en-US" sz="1200" dirty="0" err="1">
+                <a:solidFill>
+                  <a:schemeClr val="tx1"/>
+                </a:solidFill>
+                <a:latin typeface="Abadi" panose="020B0604020104020204" pitchFamily="34" charset="0"/>
+              </a:rPr>
+              <a:t>Cryptics_supported.bed</a:t>
+            </a:r>
+            <a:endParaRPr lang="en-US" sz="1200" dirty="0">
+              <a:solidFill>
+                <a:schemeClr val="tx1"/>
+              </a:solidFill>
+              <a:latin typeface="Abadi" panose="020B0604020104020204" pitchFamily="34" charset="0"/>
+            </a:endParaRPr>
+          </a:p>
+        </p:txBody>
+      </p:sp>
+      <p:sp>
+        <p:nvSpPr>
+          <p:cNvPr id="46" name="Rectangle 45">
+            <a:extLst>
+              <a:ext uri="{FF2B5EF4-FFF2-40B4-BE49-F238E27FC236}">
+                <a16:creationId xmlns:a16="http://schemas.microsoft.com/office/drawing/2014/main" id="{0F7206D1-0EC6-54BF-D154-927586F64BFB}"/>
+              </a:ext>
+            </a:extLst>
+          </p:cNvPr>
+          <p:cNvSpPr/>
+          <p:nvPr/>
+        </p:nvSpPr>
+        <p:spPr>
+          <a:xfrm>
+            <a:off x="2952943" y="10574533"/>
+            <a:ext cx="1272301" cy="393700"/>
+          </a:xfrm>
+          <a:prstGeom prst="rect">
+            <a:avLst/>
+          </a:prstGeom>
+          <a:ln w="19050">
+            <a:solidFill>
+              <a:schemeClr val="tx1"/>
+            </a:solidFill>
+          </a:ln>
+        </p:spPr>
+        <p:style>
+          <a:lnRef idx="2">
+            <a:schemeClr val="accent1"/>
+          </a:lnRef>
+          <a:fillRef idx="1">
+            <a:schemeClr val="lt1"/>
+          </a:fillRef>
+          <a:effectRef idx="0">
+            <a:schemeClr val="accent1"/>
+          </a:effectRef>
+          <a:fontRef idx="minor">
+            <a:schemeClr val="dk1"/>
+          </a:fontRef>
+        </p:style>
+        <p:txBody>
+          <a:bodyPr rtlCol="0" anchor="ctr"/>
+          <a:lstStyle/>
+          <a:p>
+            <a:pPr algn="ctr"/>
+            <a:r>
+              <a:rPr lang="en-US" b="1" dirty="0">
+                <a:latin typeface="Raleway" pitchFamily="2" charset="0"/>
+                <a:cs typeface="Posterama" panose="020B0504020200020000" pitchFamily="34" charset="0"/>
+              </a:rPr>
+              <a:t>Result</a:t>
+            </a:r>
+            <a:endParaRPr lang="en-GB" b="1" dirty="0">
+              <a:latin typeface="Raleway" pitchFamily="2" charset="0"/>
+              <a:cs typeface="Posterama" panose="020B0504020200020000" pitchFamily="34" charset="0"/>
+            </a:endParaRPr>
+          </a:p>
+        </p:txBody>
+      </p:sp>
+      <p:cxnSp>
+        <p:nvCxnSpPr>
+          <p:cNvPr id="47" name="Straight Arrow Connector 46">
+            <a:extLst>
+              <a:ext uri="{FF2B5EF4-FFF2-40B4-BE49-F238E27FC236}">
+                <a16:creationId xmlns:a16="http://schemas.microsoft.com/office/drawing/2014/main" id="{0C68BD2A-0DF7-1037-C351-2694BC72F616}"/>
+              </a:ext>
+            </a:extLst>
+          </p:cNvPr>
+          <p:cNvCxnSpPr>
+            <a:cxnSpLocks/>
+          </p:cNvCxnSpPr>
+          <p:nvPr/>
+        </p:nvCxnSpPr>
+        <p:spPr>
+          <a:xfrm>
+            <a:off x="3587804" y="10128673"/>
+            <a:ext cx="0" cy="445860"/>
+          </a:xfrm>
+          <a:prstGeom prst="straightConnector1">
+            <a:avLst/>
+          </a:prstGeom>
+          <a:ln>
+            <a:tailEnd type="triangle"/>
+          </a:ln>
+        </p:spPr>
+        <p:style>
+          <a:lnRef idx="3">
+            <a:schemeClr val="accent1"/>
+          </a:lnRef>
+          <a:fillRef idx="0">
+            <a:schemeClr val="accent1"/>
+          </a:fillRef>
+          <a:effectRef idx="2">
+            <a:schemeClr val="accent1"/>
+          </a:effectRef>
+          <a:fontRef idx="minor">
+            <a:schemeClr val="tx1"/>
+          </a:fontRef>
+        </p:style>
+      </p:cxnSp>
+      <p:cxnSp>
+        <p:nvCxnSpPr>
+          <p:cNvPr id="22" name="Straight Arrow Connector 21">
+            <a:extLst>
+              <a:ext uri="{FF2B5EF4-FFF2-40B4-BE49-F238E27FC236}">
+                <a16:creationId xmlns:a16="http://schemas.microsoft.com/office/drawing/2014/main" id="{03F19691-C573-725D-5058-D25769502FB7}"/>
+              </a:ext>
+            </a:extLst>
+          </p:cNvPr>
+          <p:cNvCxnSpPr>
+            <a:cxnSpLocks/>
+          </p:cNvCxnSpPr>
+          <p:nvPr/>
+        </p:nvCxnSpPr>
+        <p:spPr>
+          <a:xfrm flipH="1">
+            <a:off x="5001413" y="7813171"/>
+            <a:ext cx="154787" cy="1624796"/>
+          </a:xfrm>
+          <a:prstGeom prst="straightConnector1">
+            <a:avLst/>
+          </a:prstGeom>
+          <a:ln>
+            <a:tailEnd type="triangle"/>
+          </a:ln>
+        </p:spPr>
+        <p:style>
+          <a:lnRef idx="3">
+            <a:schemeClr val="accent1"/>
+          </a:lnRef>
+          <a:fillRef idx="0">
+            <a:schemeClr val="accent1"/>
+          </a:fillRef>
+          <a:effectRef idx="2">
+            <a:schemeClr val="accent1"/>
+          </a:effectRef>
+          <a:fontRef idx="minor">
+            <a:schemeClr val="tx1"/>
+          </a:fontRef>
+        </p:style>
+      </p:cxnSp>
+    </p:spTree>
+    <p:extLst>
+      <p:ext uri="{BB962C8B-B14F-4D97-AF65-F5344CB8AC3E}">
+        <p14:creationId xmlns:p14="http://schemas.microsoft.com/office/powerpoint/2010/main" val="1390564789"/>
       </p:ext>
     </p:extLst>
   </p:cSld>

--- a/figures/datasetgenerationflowchart.pptx
+++ b/figures/datasetgenerationflowchart.pptx
@@ -5,9 +5,7 @@
     <p:sldMasterId id="2147483684" r:id="rId1"/>
   </p:sldMasterIdLst>
   <p:sldIdLst>
-    <p:sldId id="256" r:id="rId2"/>
-    <p:sldId id="257" r:id="rId3"/>
-    <p:sldId id="258" r:id="rId4"/>
+    <p:sldId id="258" r:id="rId2"/>
   </p:sldIdLst>
   <p:sldSz cx="6858000" cy="12192000"/>
   <p:notesSz cx="6858000" cy="9144000"/>
@@ -263,7 +261,7 @@
           <a:p>
             <a:fld id="{0DAF61AA-5A98-4049-A93E-477E5505141A}" type="datetimeFigureOut">
               <a:rPr lang="en-US" smtClean="0"/>
-              <a:t>9/11/2026</a:t>
+              <a:t>9/22/2026</a:t>
             </a:fld>
             <a:endParaRPr lang="en-US" dirty="0"/>
           </a:p>
@@ -463,7 +461,7 @@
           <a:p>
             <a:fld id="{0DAF61AA-5A98-4049-A93E-477E5505141A}" type="datetimeFigureOut">
               <a:rPr lang="en-US" smtClean="0"/>
-              <a:t>9/11/2026</a:t>
+              <a:t>9/22/2026</a:t>
             </a:fld>
             <a:endParaRPr lang="en-US"/>
           </a:p>
@@ -673,7 +671,7 @@
           <a:p>
             <a:fld id="{0DAF61AA-5A98-4049-A93E-477E5505141A}" type="datetimeFigureOut">
               <a:rPr lang="en-US" smtClean="0"/>
-              <a:t>9/11/2026</a:t>
+              <a:t>9/22/2026</a:t>
             </a:fld>
             <a:endParaRPr lang="en-US"/>
           </a:p>
@@ -873,7 +871,7 @@
           <a:p>
             <a:fld id="{0DAF61AA-5A98-4049-A93E-477E5505141A}" type="datetimeFigureOut">
               <a:rPr lang="en-US" smtClean="0"/>
-              <a:t>9/11/2026</a:t>
+              <a:t>9/22/2026</a:t>
             </a:fld>
             <a:endParaRPr lang="en-US"/>
           </a:p>
@@ -1149,7 +1147,7 @@
           <a:p>
             <a:fld id="{0DAF61AA-5A98-4049-A93E-477E5505141A}" type="datetimeFigureOut">
               <a:rPr lang="en-US" smtClean="0"/>
-              <a:t>9/11/2026</a:t>
+              <a:t>9/22/2026</a:t>
             </a:fld>
             <a:endParaRPr lang="en-US"/>
           </a:p>
@@ -1417,7 +1415,7 @@
           <a:p>
             <a:fld id="{0DAF61AA-5A98-4049-A93E-477E5505141A}" type="datetimeFigureOut">
               <a:rPr lang="en-US" smtClean="0"/>
-              <a:t>9/11/2026</a:t>
+              <a:t>9/22/2026</a:t>
             </a:fld>
             <a:endParaRPr lang="en-US"/>
           </a:p>
@@ -1832,7 +1830,7 @@
           <a:p>
             <a:fld id="{0DAF61AA-5A98-4049-A93E-477E5505141A}" type="datetimeFigureOut">
               <a:rPr lang="en-US" smtClean="0"/>
-              <a:t>9/11/2026</a:t>
+              <a:t>9/22/2026</a:t>
             </a:fld>
             <a:endParaRPr lang="en-US"/>
           </a:p>
@@ -1974,7 +1972,7 @@
           <a:p>
             <a:fld id="{0DAF61AA-5A98-4049-A93E-477E5505141A}" type="datetimeFigureOut">
               <a:rPr lang="en-US" smtClean="0"/>
-              <a:t>9/11/2026</a:t>
+              <a:t>9/22/2026</a:t>
             </a:fld>
             <a:endParaRPr lang="en-US"/>
           </a:p>
@@ -2087,7 +2085,7 @@
           <a:p>
             <a:fld id="{0DAF61AA-5A98-4049-A93E-477E5505141A}" type="datetimeFigureOut">
               <a:rPr lang="en-US" smtClean="0"/>
-              <a:t>9/11/2026</a:t>
+              <a:t>9/22/2026</a:t>
             </a:fld>
             <a:endParaRPr lang="en-US"/>
           </a:p>
@@ -2400,7 +2398,7 @@
           <a:p>
             <a:fld id="{0DAF61AA-5A98-4049-A93E-477E5505141A}" type="datetimeFigureOut">
               <a:rPr lang="en-US" smtClean="0"/>
-              <a:t>9/11/2026</a:t>
+              <a:t>9/22/2026</a:t>
             </a:fld>
             <a:endParaRPr lang="en-US"/>
           </a:p>
@@ -2693,7 +2691,7 @@
           <a:p>
             <a:fld id="{0DAF61AA-5A98-4049-A93E-477E5505141A}" type="datetimeFigureOut">
               <a:rPr lang="en-US" smtClean="0"/>
-              <a:t>9/11/2026</a:t>
+              <a:t>9/22/2026</a:t>
             </a:fld>
             <a:endParaRPr lang="en-US"/>
           </a:p>
@@ -6406,7 +6404,7 @@
             <a:fld id="{0DAF61AA-5A98-4049-A93E-477E5505141A}" type="datetimeFigureOut">
               <a:rPr lang="en-US" smtClean="0"/>
               <a:pPr/>
-              <a:t>9/11/2026</a:t>
+              <a:t>9/22/2026</a:t>
             </a:fld>
             <a:endParaRPr lang="en-US" dirty="0"/>
           </a:p>
@@ -6825,11 +6823,17 @@
 </file>
 
 <file path=ppt/slides/slide1.xml><?xml version="1.0" encoding="utf-8"?>
-<p:sld xmlns:a="http://schemas.openxmlformats.org/drawingml/2006/main" xmlns:r="http://schemas.openxmlformats.org/officeDocument/2006/relationships" xmlns:p="http://schemas.openxmlformats.org/presentationml/2006/main" showMasterSp="0">
+<p:sld xmlns:a="http://schemas.openxmlformats.org/drawingml/2006/main" xmlns:r="http://schemas.openxmlformats.org/officeDocument/2006/relationships" xmlns:p="http://schemas.openxmlformats.org/presentationml/2006/main">
   <p:cSld>
     <p:spTree>
       <p:nvGrpSpPr>
-        <p:cNvPr id="1" name=""/>
+        <p:cNvPr id="1" name="">
+          <a:extLst>
+            <a:ext uri="{FF2B5EF4-FFF2-40B4-BE49-F238E27FC236}">
+              <a16:creationId xmlns:a16="http://schemas.microsoft.com/office/drawing/2014/main" id="{5439C57A-A402-852A-5A46-980E0F9068A7}"/>
+            </a:ext>
+          </a:extLst>
+        </p:cNvPr>
         <p:cNvGrpSpPr/>
         <p:nvPr/>
       </p:nvGrpSpPr>
@@ -6841,1084 +6845,12 @@
           <a:chExt cx="0" cy="0"/>
         </a:xfrm>
       </p:grpSpPr>
-      <p:sp>
-        <p:nvSpPr>
-          <p:cNvPr id="4" name="Rectangle 3">
+      <p:cxnSp>
+        <p:nvCxnSpPr>
+          <p:cNvPr id="2" name="Straight Arrow Connector 1">
             <a:extLst>
               <a:ext uri="{FF2B5EF4-FFF2-40B4-BE49-F238E27FC236}">
-                <a16:creationId xmlns:a16="http://schemas.microsoft.com/office/drawing/2014/main" id="{9E16FFA0-65E8-131F-6366-6E60FA7DA310}"/>
-              </a:ext>
-            </a:extLst>
-          </p:cNvPr>
-          <p:cNvSpPr/>
-          <p:nvPr/>
-        </p:nvSpPr>
-        <p:spPr>
-          <a:xfrm>
-            <a:off x="694592" y="618391"/>
-            <a:ext cx="5468816" cy="1400909"/>
-          </a:xfrm>
-          <a:prstGeom prst="rect">
-            <a:avLst/>
-          </a:prstGeom>
-          <a:solidFill>
-            <a:schemeClr val="accent1">
-              <a:lumMod val="40000"/>
-              <a:lumOff val="60000"/>
-            </a:schemeClr>
-          </a:solidFill>
-        </p:spPr>
-        <p:style>
-          <a:lnRef idx="2">
-            <a:schemeClr val="accent1">
-              <a:shade val="15000"/>
-            </a:schemeClr>
-          </a:lnRef>
-          <a:fillRef idx="1">
-            <a:schemeClr val="accent1"/>
-          </a:fillRef>
-          <a:effectRef idx="0">
-            <a:schemeClr val="accent1"/>
-          </a:effectRef>
-          <a:fontRef idx="minor">
-            <a:schemeClr val="lt1"/>
-          </a:fontRef>
-        </p:style>
-        <p:txBody>
-          <a:bodyPr rtlCol="0" anchor="ctr"/>
-          <a:lstStyle/>
-          <a:p>
-            <a:pPr algn="ctr"/>
-            <a:r>
-              <a:rPr lang="en-US" sz="1600" dirty="0" err="1">
-                <a:solidFill>
-                  <a:sysClr val="windowText" lastClr="000000"/>
-                </a:solidFill>
-                <a:latin typeface="Abadi" panose="020B0604020104020204" pitchFamily="34" charset="0"/>
-              </a:rPr>
-              <a:t>SpliceAI</a:t>
-            </a:r>
-            <a:r>
-              <a:rPr lang="en-US" sz="1600" dirty="0">
-                <a:solidFill>
-                  <a:sysClr val="windowText" lastClr="000000"/>
-                </a:solidFill>
-                <a:latin typeface="Abadi" panose="020B0604020104020204" pitchFamily="34" charset="0"/>
-              </a:rPr>
-              <a:t> inferences generated across whole introns and filtered to remove signal below 0.05</a:t>
-            </a:r>
-          </a:p>
-          <a:p>
-            <a:pPr algn="ctr"/>
-            <a:r>
-              <a:rPr lang="en-US" sz="1600" dirty="0">
-                <a:solidFill>
-                  <a:sysClr val="windowText" lastClr="000000"/>
-                </a:solidFill>
-                <a:latin typeface="Abadi" panose="020B0604020104020204" pitchFamily="34" charset="0"/>
-              </a:rPr>
-              <a:t>794,192 splice site inferences</a:t>
-            </a:r>
-            <a:endParaRPr lang="en-GB" sz="1600" dirty="0">
-              <a:solidFill>
-                <a:sysClr val="windowText" lastClr="000000"/>
-              </a:solidFill>
-              <a:latin typeface="Abadi" panose="020B0604020104020204" pitchFamily="34" charset="0"/>
-            </a:endParaRPr>
-          </a:p>
-        </p:txBody>
-      </p:sp>
-      <p:sp>
-        <p:nvSpPr>
-          <p:cNvPr id="5" name="Oval 4">
-            <a:extLst>
-              <a:ext uri="{FF2B5EF4-FFF2-40B4-BE49-F238E27FC236}">
-                <a16:creationId xmlns:a16="http://schemas.microsoft.com/office/drawing/2014/main" id="{3B70EEDD-A0AD-0DB4-9816-F3F88A2A2029}"/>
-              </a:ext>
-            </a:extLst>
-          </p:cNvPr>
-          <p:cNvSpPr/>
-          <p:nvPr/>
-        </p:nvSpPr>
-        <p:spPr>
-          <a:xfrm>
-            <a:off x="6001130" y="1318845"/>
-            <a:ext cx="508000" cy="495300"/>
-          </a:xfrm>
-          <a:prstGeom prst="ellipse">
-            <a:avLst/>
-          </a:prstGeom>
-        </p:spPr>
-        <p:style>
-          <a:lnRef idx="2">
-            <a:schemeClr val="accent1"/>
-          </a:lnRef>
-          <a:fillRef idx="1">
-            <a:schemeClr val="lt1"/>
-          </a:fillRef>
-          <a:effectRef idx="0">
-            <a:schemeClr val="accent1"/>
-          </a:effectRef>
-          <a:fontRef idx="minor">
-            <a:schemeClr val="dk1"/>
-          </a:fontRef>
-        </p:style>
-        <p:txBody>
-          <a:bodyPr rtlCol="0" anchor="ctr"/>
-          <a:lstStyle/>
-          <a:p>
-            <a:pPr algn="ctr"/>
-            <a:r>
-              <a:rPr lang="en-US" sz="1600" dirty="0"/>
-              <a:t>-a</a:t>
-            </a:r>
-            <a:endParaRPr lang="en-GB" sz="1600" dirty="0"/>
-          </a:p>
-        </p:txBody>
-      </p:sp>
-      <p:sp>
-        <p:nvSpPr>
-          <p:cNvPr id="7" name="Rectangle 6">
-            <a:extLst>
-              <a:ext uri="{FF2B5EF4-FFF2-40B4-BE49-F238E27FC236}">
-                <a16:creationId xmlns:a16="http://schemas.microsoft.com/office/drawing/2014/main" id="{85C0822E-1796-6E3C-602C-7D9DC80893DD}"/>
-              </a:ext>
-            </a:extLst>
-          </p:cNvPr>
-          <p:cNvSpPr/>
-          <p:nvPr/>
-        </p:nvSpPr>
-        <p:spPr>
-          <a:xfrm>
-            <a:off x="694592" y="4143828"/>
-            <a:ext cx="5468816" cy="5762873"/>
-          </a:xfrm>
-          <a:prstGeom prst="rect">
-            <a:avLst/>
-          </a:prstGeom>
-          <a:solidFill>
-            <a:schemeClr val="accent1">
-              <a:lumMod val="40000"/>
-              <a:lumOff val="60000"/>
-            </a:schemeClr>
-          </a:solidFill>
-        </p:spPr>
-        <p:style>
-          <a:lnRef idx="2">
-            <a:schemeClr val="accent1">
-              <a:shade val="15000"/>
-            </a:schemeClr>
-          </a:lnRef>
-          <a:fillRef idx="1">
-            <a:schemeClr val="accent1"/>
-          </a:fillRef>
-          <a:effectRef idx="0">
-            <a:schemeClr val="accent1"/>
-          </a:effectRef>
-          <a:fontRef idx="minor">
-            <a:schemeClr val="lt1"/>
-          </a:fontRef>
-        </p:style>
-        <p:txBody>
-          <a:bodyPr rtlCol="0" anchor="ctr"/>
-          <a:lstStyle/>
-          <a:p>
-            <a:pPr algn="ctr"/>
-            <a:r>
-              <a:rPr lang="en-US" sz="1600" dirty="0">
-                <a:solidFill>
-                  <a:sysClr val="windowText" lastClr="000000"/>
-                </a:solidFill>
-                <a:latin typeface="Abadi" panose="020B0604020104020204" pitchFamily="34" charset="0"/>
-              </a:rPr>
-              <a:t>Intersect –v to remove splice sites within 100 bp of canonical splice sites</a:t>
-            </a:r>
-          </a:p>
-          <a:p>
-            <a:pPr algn="ctr"/>
-            <a:endParaRPr lang="en-US" sz="1600" dirty="0">
-              <a:solidFill>
-                <a:sysClr val="windowText" lastClr="000000"/>
-              </a:solidFill>
-              <a:latin typeface="Abadi" panose="020B0604020104020204" pitchFamily="34" charset="0"/>
-            </a:endParaRPr>
-          </a:p>
-          <a:p>
-            <a:pPr algn="ctr"/>
-            <a:r>
-              <a:rPr lang="en-US" sz="1600" dirty="0" err="1">
-                <a:solidFill>
-                  <a:schemeClr val="accent1"/>
-                </a:solidFill>
-                <a:latin typeface="Abadi" panose="020B0604020104020204" pitchFamily="34" charset="0"/>
-              </a:rPr>
-              <a:t>Wide_canonical_splice_sites.bed</a:t>
-            </a:r>
-            <a:endParaRPr lang="en-US" sz="1600" dirty="0">
-              <a:solidFill>
-                <a:schemeClr val="accent1"/>
-              </a:solidFill>
-              <a:latin typeface="Abadi" panose="020B0604020104020204" pitchFamily="34" charset="0"/>
-            </a:endParaRPr>
-          </a:p>
-          <a:p>
-            <a:pPr algn="ctr"/>
-            <a:endParaRPr lang="en-US" sz="1600" dirty="0">
-              <a:solidFill>
-                <a:schemeClr val="accent1"/>
-              </a:solidFill>
-              <a:latin typeface="Abadi" panose="020B0604020104020204" pitchFamily="34" charset="0"/>
-            </a:endParaRPr>
-          </a:p>
-          <a:p>
-            <a:pPr algn="ctr"/>
-            <a:endParaRPr lang="en-US" sz="1600" dirty="0">
-              <a:solidFill>
-                <a:schemeClr val="accent1"/>
-              </a:solidFill>
-              <a:latin typeface="Abadi" panose="020B0604020104020204" pitchFamily="34" charset="0"/>
-            </a:endParaRPr>
-          </a:p>
-          <a:p>
-            <a:pPr algn="ctr"/>
-            <a:endParaRPr lang="en-US" sz="1600" dirty="0">
-              <a:solidFill>
-                <a:schemeClr val="accent1"/>
-              </a:solidFill>
-              <a:latin typeface="Abadi" panose="020B0604020104020204" pitchFamily="34" charset="0"/>
-            </a:endParaRPr>
-          </a:p>
-          <a:p>
-            <a:pPr algn="ctr"/>
-            <a:endParaRPr lang="en-US" sz="1600" dirty="0">
-              <a:solidFill>
-                <a:schemeClr val="accent1"/>
-              </a:solidFill>
-              <a:latin typeface="Abadi" panose="020B0604020104020204" pitchFamily="34" charset="0"/>
-            </a:endParaRPr>
-          </a:p>
-          <a:p>
-            <a:pPr algn="ctr"/>
-            <a:endParaRPr lang="en-US" sz="1600" dirty="0">
-              <a:solidFill>
-                <a:schemeClr val="accent1"/>
-              </a:solidFill>
-              <a:latin typeface="Abadi" panose="020B0604020104020204" pitchFamily="34" charset="0"/>
-            </a:endParaRPr>
-          </a:p>
-          <a:p>
-            <a:pPr algn="ctr"/>
-            <a:endParaRPr lang="en-US" sz="1600" dirty="0">
-              <a:solidFill>
-                <a:schemeClr val="accent1"/>
-              </a:solidFill>
-              <a:latin typeface="Abadi" panose="020B0604020104020204" pitchFamily="34" charset="0"/>
-            </a:endParaRPr>
-          </a:p>
-          <a:p>
-            <a:pPr algn="ctr"/>
-            <a:endParaRPr lang="en-US" sz="1600" dirty="0">
-              <a:solidFill>
-                <a:schemeClr val="accent1"/>
-              </a:solidFill>
-              <a:latin typeface="Abadi" panose="020B0604020104020204" pitchFamily="34" charset="0"/>
-            </a:endParaRPr>
-          </a:p>
-          <a:p>
-            <a:pPr algn="ctr"/>
-            <a:endParaRPr lang="en-US" sz="1600" dirty="0">
-              <a:solidFill>
-                <a:schemeClr val="accent1"/>
-              </a:solidFill>
-              <a:latin typeface="Abadi" panose="020B0604020104020204" pitchFamily="34" charset="0"/>
-            </a:endParaRPr>
-          </a:p>
-          <a:p>
-            <a:pPr algn="ctr"/>
-            <a:endParaRPr lang="en-US" sz="1600" dirty="0">
-              <a:solidFill>
-                <a:schemeClr val="accent1"/>
-              </a:solidFill>
-              <a:latin typeface="Abadi" panose="020B0604020104020204" pitchFamily="34" charset="0"/>
-            </a:endParaRPr>
-          </a:p>
-          <a:p>
-            <a:pPr algn="ctr"/>
-            <a:endParaRPr lang="en-US" sz="1600" dirty="0">
-              <a:solidFill>
-                <a:schemeClr val="accent1"/>
-              </a:solidFill>
-              <a:latin typeface="Abadi" panose="020B0604020104020204" pitchFamily="34" charset="0"/>
-            </a:endParaRPr>
-          </a:p>
-          <a:p>
-            <a:pPr algn="ctr"/>
-            <a:endParaRPr lang="en-US" sz="1600" dirty="0">
-              <a:solidFill>
-                <a:schemeClr val="accent1"/>
-              </a:solidFill>
-              <a:latin typeface="Abadi" panose="020B0604020104020204" pitchFamily="34" charset="0"/>
-            </a:endParaRPr>
-          </a:p>
-          <a:p>
-            <a:pPr algn="ctr"/>
-            <a:endParaRPr lang="en-US" sz="1600" dirty="0">
-              <a:solidFill>
-                <a:sysClr val="windowText" lastClr="000000"/>
-              </a:solidFill>
-              <a:latin typeface="Abadi" panose="020B0604020104020204" pitchFamily="34" charset="0"/>
-            </a:endParaRPr>
-          </a:p>
-          <a:p>
-            <a:pPr algn="ctr"/>
-            <a:r>
-              <a:rPr lang="en-US" sz="1600" dirty="0" err="1">
-                <a:solidFill>
-                  <a:sysClr val="windowText" lastClr="000000"/>
-                </a:solidFill>
-                <a:latin typeface="Abadi" panose="020B0604020104020204" pitchFamily="34" charset="0"/>
-              </a:rPr>
-              <a:t>RBPnet</a:t>
-            </a:r>
-            <a:r>
-              <a:rPr lang="en-US" sz="1600" dirty="0">
-                <a:solidFill>
-                  <a:sysClr val="windowText" lastClr="000000"/>
-                </a:solidFill>
-                <a:latin typeface="Abadi" panose="020B0604020104020204" pitchFamily="34" charset="0"/>
-              </a:rPr>
-              <a:t> </a:t>
-            </a:r>
-            <a:r>
-              <a:rPr lang="en-US" sz="1600" dirty="0">
-                <a:solidFill>
-                  <a:schemeClr val="accent1"/>
-                </a:solidFill>
-                <a:latin typeface="Abadi" panose="020B0604020104020204" pitchFamily="34" charset="0"/>
-              </a:rPr>
-              <a:t>PRPF8</a:t>
-            </a:r>
-            <a:r>
-              <a:rPr lang="en-US" sz="1600" dirty="0">
-                <a:solidFill>
-                  <a:sysClr val="windowText" lastClr="000000"/>
-                </a:solidFill>
-                <a:latin typeface="Abadi" panose="020B0604020104020204" pitchFamily="34" charset="0"/>
-              </a:rPr>
-              <a:t> predictions across introns 242,946 Peaks</a:t>
-            </a:r>
-          </a:p>
-          <a:p>
-            <a:pPr algn="ctr"/>
-            <a:r>
-              <a:rPr lang="en-US" sz="1600" dirty="0">
-                <a:solidFill>
-                  <a:sysClr val="windowText" lastClr="000000"/>
-                </a:solidFill>
-                <a:latin typeface="Abadi" panose="020B0604020104020204" pitchFamily="34" charset="0"/>
-              </a:rPr>
-              <a:t>Merged </a:t>
-            </a:r>
-            <a:r>
-              <a:rPr lang="en-US" sz="1600" dirty="0">
-                <a:solidFill>
-                  <a:schemeClr val="accent1"/>
-                </a:solidFill>
-                <a:latin typeface="Abadi" panose="020B0604020104020204" pitchFamily="34" charset="0"/>
-              </a:rPr>
-              <a:t>PRPF8 </a:t>
-            </a:r>
-            <a:r>
-              <a:rPr lang="en-US" sz="1600" dirty="0" err="1">
-                <a:solidFill>
-                  <a:schemeClr val="accent1"/>
-                </a:solidFill>
-                <a:latin typeface="Abadi" panose="020B0604020104020204" pitchFamily="34" charset="0"/>
-              </a:rPr>
-              <a:t>eCLIP</a:t>
-            </a:r>
-            <a:r>
-              <a:rPr lang="en-US" sz="1600" dirty="0">
-                <a:solidFill>
-                  <a:schemeClr val="accent1"/>
-                </a:solidFill>
-                <a:latin typeface="Abadi" panose="020B0604020104020204" pitchFamily="34" charset="0"/>
-              </a:rPr>
-              <a:t> and </a:t>
-            </a:r>
-            <a:r>
-              <a:rPr lang="en-US" sz="1600" dirty="0" err="1">
-                <a:solidFill>
-                  <a:schemeClr val="accent1"/>
-                </a:solidFill>
-                <a:latin typeface="Abadi" panose="020B0604020104020204" pitchFamily="34" charset="0"/>
-              </a:rPr>
-              <a:t>iCLIP</a:t>
-            </a:r>
-            <a:r>
-              <a:rPr lang="en-US" sz="1600" dirty="0">
-                <a:solidFill>
-                  <a:schemeClr val="accent1"/>
-                </a:solidFill>
-                <a:latin typeface="Abadi" panose="020B0604020104020204" pitchFamily="34" charset="0"/>
-              </a:rPr>
-              <a:t> </a:t>
-            </a:r>
-            <a:r>
-              <a:rPr lang="en-US" sz="1600" dirty="0">
-                <a:solidFill>
-                  <a:sysClr val="windowText" lastClr="000000"/>
-                </a:solidFill>
-                <a:latin typeface="Abadi" panose="020B0604020104020204" pitchFamily="34" charset="0"/>
-              </a:rPr>
-              <a:t>227,651 Peaks</a:t>
-            </a:r>
-          </a:p>
-          <a:p>
-            <a:pPr algn="ctr"/>
-            <a:r>
-              <a:rPr lang="en-GB" sz="1600" dirty="0">
-                <a:solidFill>
-                  <a:sysClr val="windowText" lastClr="000000"/>
-                </a:solidFill>
-                <a:latin typeface="Abadi" panose="020B0604020104020204" pitchFamily="34" charset="0"/>
-              </a:rPr>
-              <a:t>Merged </a:t>
-            </a:r>
-            <a:r>
-              <a:rPr lang="en-GB" sz="1600" dirty="0" err="1">
-                <a:solidFill>
-                  <a:schemeClr val="accent1"/>
-                </a:solidFill>
-                <a:latin typeface="Abadi" panose="020B0604020104020204" pitchFamily="34" charset="0"/>
-              </a:rPr>
-              <a:t>SmB</a:t>
-            </a:r>
-            <a:r>
-              <a:rPr lang="en-GB" sz="1600" dirty="0">
-                <a:solidFill>
-                  <a:schemeClr val="accent1"/>
-                </a:solidFill>
-                <a:latin typeface="Abadi" panose="020B0604020104020204" pitchFamily="34" charset="0"/>
-              </a:rPr>
-              <a:t> </a:t>
-            </a:r>
-            <a:r>
-              <a:rPr lang="en-GB" sz="1600" dirty="0" err="1">
-                <a:solidFill>
-                  <a:schemeClr val="accent1"/>
-                </a:solidFill>
-                <a:latin typeface="Abadi" panose="020B0604020104020204" pitchFamily="34" charset="0"/>
-              </a:rPr>
-              <a:t>iCLIP</a:t>
-            </a:r>
-            <a:r>
-              <a:rPr lang="en-GB" sz="1600" dirty="0">
-                <a:solidFill>
-                  <a:schemeClr val="accent1"/>
-                </a:solidFill>
-                <a:latin typeface="Abadi" panose="020B0604020104020204" pitchFamily="34" charset="0"/>
-              </a:rPr>
-              <a:t> </a:t>
-            </a:r>
-            <a:r>
-              <a:rPr lang="en-GB" sz="1600" dirty="0">
-                <a:solidFill>
-                  <a:sysClr val="windowText" lastClr="000000"/>
-                </a:solidFill>
-                <a:latin typeface="Abadi" panose="020B0604020104020204" pitchFamily="34" charset="0"/>
-              </a:rPr>
-              <a:t>152,983 Peaks </a:t>
-            </a:r>
-          </a:p>
-          <a:p>
-            <a:pPr algn="ctr"/>
-            <a:endParaRPr lang="en-GB" sz="1600" dirty="0">
-              <a:solidFill>
-                <a:sysClr val="windowText" lastClr="000000"/>
-              </a:solidFill>
-              <a:latin typeface="Abadi" panose="020B0604020104020204" pitchFamily="34" charset="0"/>
-            </a:endParaRPr>
-          </a:p>
-          <a:p>
-            <a:pPr algn="ctr"/>
-            <a:r>
-              <a:rPr lang="en-US" sz="1400" dirty="0">
-                <a:solidFill>
-                  <a:sysClr val="windowText" lastClr="000000"/>
-                </a:solidFill>
-                <a:latin typeface="Abadi" panose="020B0604020104020204" pitchFamily="34" charset="0"/>
-              </a:rPr>
-              <a:t>Need to use Granges AGAIN, to remove exons from intronic regions in decoys/</a:t>
-            </a:r>
-            <a:r>
-              <a:rPr lang="en-US" sz="1400" dirty="0" err="1">
-                <a:solidFill>
-                  <a:sysClr val="windowText" lastClr="000000"/>
-                </a:solidFill>
-                <a:latin typeface="Abadi" panose="020B0604020104020204" pitchFamily="34" charset="0"/>
-              </a:rPr>
-              <a:t>cryptics</a:t>
-            </a:r>
-            <a:endParaRPr lang="en-US" sz="1400" dirty="0">
-              <a:solidFill>
-                <a:sysClr val="windowText" lastClr="000000"/>
-              </a:solidFill>
-              <a:latin typeface="Abadi" panose="020B0604020104020204" pitchFamily="34" charset="0"/>
-            </a:endParaRPr>
-          </a:p>
-        </p:txBody>
-      </p:sp>
-      <p:sp>
-        <p:nvSpPr>
-          <p:cNvPr id="8" name="Rectangle 7">
-            <a:extLst>
-              <a:ext uri="{FF2B5EF4-FFF2-40B4-BE49-F238E27FC236}">
-                <a16:creationId xmlns:a16="http://schemas.microsoft.com/office/drawing/2014/main" id="{A32F0223-9EAB-1B55-C4B8-90BD5A9F1ABD}"/>
-              </a:ext>
-            </a:extLst>
-          </p:cNvPr>
-          <p:cNvSpPr/>
-          <p:nvPr/>
-        </p:nvSpPr>
-        <p:spPr>
-          <a:xfrm>
-            <a:off x="2127250" y="421541"/>
-            <a:ext cx="2603500" cy="393700"/>
-          </a:xfrm>
-          <a:prstGeom prst="rect">
-            <a:avLst/>
-          </a:prstGeom>
-          <a:ln w="19050">
-            <a:solidFill>
-              <a:schemeClr val="tx1"/>
-            </a:solidFill>
-          </a:ln>
-        </p:spPr>
-        <p:style>
-          <a:lnRef idx="2">
-            <a:schemeClr val="accent1"/>
-          </a:lnRef>
-          <a:fillRef idx="1">
-            <a:schemeClr val="lt1"/>
-          </a:fillRef>
-          <a:effectRef idx="0">
-            <a:schemeClr val="accent1"/>
-          </a:effectRef>
-          <a:fontRef idx="minor">
-            <a:schemeClr val="dk1"/>
-          </a:fontRef>
-        </p:style>
-        <p:txBody>
-          <a:bodyPr rtlCol="0" anchor="ctr"/>
-          <a:lstStyle/>
-          <a:p>
-            <a:pPr algn="ctr"/>
-            <a:r>
-              <a:rPr lang="en-US" b="1" dirty="0" err="1">
-                <a:latin typeface="Raleway" pitchFamily="2" charset="0"/>
-                <a:cs typeface="Posterama" panose="020B0504020200020000" pitchFamily="34" charset="0"/>
-              </a:rPr>
-              <a:t>SpliceAI</a:t>
-            </a:r>
-            <a:endParaRPr lang="en-GB" b="1" dirty="0">
-              <a:latin typeface="Raleway" pitchFamily="2" charset="0"/>
-              <a:cs typeface="Posterama" panose="020B0504020200020000" pitchFamily="34" charset="0"/>
-            </a:endParaRPr>
-          </a:p>
-        </p:txBody>
-      </p:sp>
-      <p:sp>
-        <p:nvSpPr>
-          <p:cNvPr id="10" name="Rectangle 9">
-            <a:extLst>
-              <a:ext uri="{FF2B5EF4-FFF2-40B4-BE49-F238E27FC236}">
-                <a16:creationId xmlns:a16="http://schemas.microsoft.com/office/drawing/2014/main" id="{3258C80A-D7BA-B1DC-3A6A-28477E98B595}"/>
-              </a:ext>
-            </a:extLst>
-          </p:cNvPr>
-          <p:cNvSpPr/>
-          <p:nvPr/>
-        </p:nvSpPr>
-        <p:spPr>
-          <a:xfrm>
-            <a:off x="2127250" y="3946979"/>
-            <a:ext cx="2603500" cy="393700"/>
-          </a:xfrm>
-          <a:prstGeom prst="rect">
-            <a:avLst/>
-          </a:prstGeom>
-          <a:ln w="19050">
-            <a:solidFill>
-              <a:schemeClr val="tx1"/>
-            </a:solidFill>
-          </a:ln>
-        </p:spPr>
-        <p:style>
-          <a:lnRef idx="2">
-            <a:schemeClr val="accent1"/>
-          </a:lnRef>
-          <a:fillRef idx="1">
-            <a:schemeClr val="lt1"/>
-          </a:fillRef>
-          <a:effectRef idx="0">
-            <a:schemeClr val="accent1"/>
-          </a:effectRef>
-          <a:fontRef idx="minor">
-            <a:schemeClr val="dk1"/>
-          </a:fontRef>
-        </p:style>
-        <p:txBody>
-          <a:bodyPr rtlCol="0" anchor="ctr"/>
-          <a:lstStyle/>
-          <a:p>
-            <a:pPr algn="ctr"/>
-            <a:r>
-              <a:rPr lang="en-US" b="1" dirty="0">
-                <a:latin typeface="Raleway" pitchFamily="2" charset="0"/>
-                <a:cs typeface="Posterama" panose="020B0504020200020000" pitchFamily="34" charset="0"/>
-              </a:rPr>
-              <a:t>Bedtools intersect</a:t>
-            </a:r>
-            <a:endParaRPr lang="en-GB" b="1" dirty="0">
-              <a:latin typeface="Raleway" pitchFamily="2" charset="0"/>
-              <a:cs typeface="Posterama" panose="020B0504020200020000" pitchFamily="34" charset="0"/>
-            </a:endParaRPr>
-          </a:p>
-        </p:txBody>
-      </p:sp>
-      <p:sp>
-        <p:nvSpPr>
-          <p:cNvPr id="20" name="Rectangle 19">
-            <a:extLst>
-              <a:ext uri="{FF2B5EF4-FFF2-40B4-BE49-F238E27FC236}">
-                <a16:creationId xmlns:a16="http://schemas.microsoft.com/office/drawing/2014/main" id="{A62C851E-9F51-FD47-A220-F6AF5F60A9C4}"/>
-              </a:ext>
-            </a:extLst>
-          </p:cNvPr>
-          <p:cNvSpPr/>
-          <p:nvPr/>
-        </p:nvSpPr>
-        <p:spPr>
-          <a:xfrm>
-            <a:off x="694592" y="2369514"/>
-            <a:ext cx="5468816" cy="1280258"/>
-          </a:xfrm>
-          <a:prstGeom prst="rect">
-            <a:avLst/>
-          </a:prstGeom>
-          <a:solidFill>
-            <a:schemeClr val="accent1">
-              <a:lumMod val="40000"/>
-              <a:lumOff val="60000"/>
-            </a:schemeClr>
-          </a:solidFill>
-        </p:spPr>
-        <p:style>
-          <a:lnRef idx="2">
-            <a:schemeClr val="accent1">
-              <a:shade val="15000"/>
-            </a:schemeClr>
-          </a:lnRef>
-          <a:fillRef idx="1">
-            <a:schemeClr val="accent1"/>
-          </a:fillRef>
-          <a:effectRef idx="0">
-            <a:schemeClr val="accent1"/>
-          </a:effectRef>
-          <a:fontRef idx="minor">
-            <a:schemeClr val="lt1"/>
-          </a:fontRef>
-        </p:style>
-        <p:txBody>
-          <a:bodyPr rtlCol="0" anchor="ctr"/>
-          <a:lstStyle/>
-          <a:p>
-            <a:pPr algn="ctr"/>
-            <a:r>
-              <a:rPr lang="en-US" sz="1600" dirty="0">
-                <a:solidFill>
-                  <a:sysClr val="windowText" lastClr="000000"/>
-                </a:solidFill>
-                <a:latin typeface="Abadi" panose="020B0604020104020204" pitchFamily="34" charset="0"/>
-              </a:rPr>
-              <a:t>Using </a:t>
-            </a:r>
-            <a:r>
-              <a:rPr lang="en-US" sz="1600" dirty="0" err="1">
-                <a:solidFill>
-                  <a:sysClr val="windowText" lastClr="000000"/>
-                </a:solidFill>
-                <a:latin typeface="Abadi" panose="020B0604020104020204" pitchFamily="34" charset="0"/>
-              </a:rPr>
-              <a:t>GRanges</a:t>
-            </a:r>
-            <a:r>
-              <a:rPr lang="en-US" sz="1600" dirty="0">
-                <a:solidFill>
-                  <a:sysClr val="windowText" lastClr="000000"/>
-                </a:solidFill>
-                <a:latin typeface="Abadi" panose="020B0604020104020204" pitchFamily="34" charset="0"/>
-              </a:rPr>
-              <a:t>, keep only “</a:t>
-            </a:r>
-            <a:r>
-              <a:rPr lang="en-US" sz="1600" dirty="0" err="1">
-                <a:solidFill>
-                  <a:sysClr val="windowText" lastClr="000000"/>
-                </a:solidFill>
-                <a:latin typeface="Abadi" panose="020B0604020104020204" pitchFamily="34" charset="0"/>
-              </a:rPr>
-              <a:t>protein_coding</a:t>
-            </a:r>
-            <a:r>
-              <a:rPr lang="en-US" sz="1600" dirty="0">
-                <a:solidFill>
-                  <a:sysClr val="windowText" lastClr="000000"/>
-                </a:solidFill>
-                <a:latin typeface="Abadi" panose="020B0604020104020204" pitchFamily="34" charset="0"/>
-              </a:rPr>
-              <a:t>” regions in Gencode.v49.annotation.gtf</a:t>
-            </a:r>
-          </a:p>
-          <a:p>
-            <a:pPr algn="ctr"/>
-            <a:r>
-              <a:rPr lang="en-US" sz="1600" dirty="0">
-                <a:solidFill>
-                  <a:sysClr val="windowText" lastClr="000000"/>
-                </a:solidFill>
-                <a:latin typeface="Abadi" panose="020B0604020104020204" pitchFamily="34" charset="0"/>
-              </a:rPr>
-              <a:t>* Predicted splice sites</a:t>
-            </a:r>
-          </a:p>
-        </p:txBody>
-      </p:sp>
-      <p:sp>
-        <p:nvSpPr>
-          <p:cNvPr id="22" name="Rectangle 21">
-            <a:extLst>
-              <a:ext uri="{FF2B5EF4-FFF2-40B4-BE49-F238E27FC236}">
-                <a16:creationId xmlns:a16="http://schemas.microsoft.com/office/drawing/2014/main" id="{9EF06EE5-AF03-3D0F-E200-390864EB9EBA}"/>
-              </a:ext>
-            </a:extLst>
-          </p:cNvPr>
-          <p:cNvSpPr/>
-          <p:nvPr/>
-        </p:nvSpPr>
-        <p:spPr>
-          <a:xfrm>
-            <a:off x="694592" y="10440381"/>
-            <a:ext cx="5468816" cy="1519390"/>
-          </a:xfrm>
-          <a:prstGeom prst="rect">
-            <a:avLst/>
-          </a:prstGeom>
-          <a:solidFill>
-            <a:schemeClr val="accent1">
-              <a:lumMod val="40000"/>
-              <a:lumOff val="60000"/>
-            </a:schemeClr>
-          </a:solidFill>
-        </p:spPr>
-        <p:style>
-          <a:lnRef idx="2">
-            <a:schemeClr val="accent1">
-              <a:shade val="15000"/>
-            </a:schemeClr>
-          </a:lnRef>
-          <a:fillRef idx="1">
-            <a:schemeClr val="accent1"/>
-          </a:fillRef>
-          <a:effectRef idx="0">
-            <a:schemeClr val="accent1"/>
-          </a:effectRef>
-          <a:fontRef idx="minor">
-            <a:schemeClr val="lt1"/>
-          </a:fontRef>
-        </p:style>
-        <p:txBody>
-          <a:bodyPr rtlCol="0" anchor="ctr"/>
-          <a:lstStyle/>
-          <a:p>
-            <a:pPr algn="ctr"/>
-            <a:r>
-              <a:rPr lang="en-US" sz="1600" dirty="0">
-                <a:solidFill>
-                  <a:sysClr val="windowText" lastClr="000000"/>
-                </a:solidFill>
-                <a:latin typeface="Abadi" panose="020B0604020104020204" pitchFamily="34" charset="0"/>
-              </a:rPr>
-              <a:t>Pull FASTA using BED coordinates with SpliceAI_Inference.py to re-score inferences over a ±24nt window surrounding the loci, filter to &gt; 0.1 Donor Score</a:t>
-            </a:r>
-          </a:p>
-          <a:p>
-            <a:pPr algn="ctr"/>
-            <a:r>
-              <a:rPr lang="en-US" sz="1600" dirty="0">
-                <a:solidFill>
-                  <a:sysClr val="windowText" lastClr="000000"/>
-                </a:solidFill>
-                <a:latin typeface="Abadi" panose="020B0604020104020204" pitchFamily="34" charset="0"/>
-              </a:rPr>
-              <a:t>7022 Predicted Splice Sites</a:t>
-            </a:r>
-          </a:p>
-        </p:txBody>
-      </p:sp>
-      <p:sp>
-        <p:nvSpPr>
-          <p:cNvPr id="24" name="Rectangle 23">
-            <a:extLst>
-              <a:ext uri="{FF2B5EF4-FFF2-40B4-BE49-F238E27FC236}">
-                <a16:creationId xmlns:a16="http://schemas.microsoft.com/office/drawing/2014/main" id="{4D31029C-2849-065F-6921-B5EDD11CF6C5}"/>
-              </a:ext>
-            </a:extLst>
-          </p:cNvPr>
-          <p:cNvSpPr/>
-          <p:nvPr/>
-        </p:nvSpPr>
-        <p:spPr>
-          <a:xfrm>
-            <a:off x="2127250" y="2172664"/>
-            <a:ext cx="2603500" cy="393700"/>
-          </a:xfrm>
-          <a:prstGeom prst="rect">
-            <a:avLst/>
-          </a:prstGeom>
-          <a:ln w="19050">
-            <a:solidFill>
-              <a:schemeClr val="tx1"/>
-            </a:solidFill>
-          </a:ln>
-        </p:spPr>
-        <p:style>
-          <a:lnRef idx="2">
-            <a:schemeClr val="accent1"/>
-          </a:lnRef>
-          <a:fillRef idx="1">
-            <a:schemeClr val="lt1"/>
-          </a:fillRef>
-          <a:effectRef idx="0">
-            <a:schemeClr val="accent1"/>
-          </a:effectRef>
-          <a:fontRef idx="minor">
-            <a:schemeClr val="dk1"/>
-          </a:fontRef>
-        </p:style>
-        <p:txBody>
-          <a:bodyPr rtlCol="0" anchor="ctr"/>
-          <a:lstStyle/>
-          <a:p>
-            <a:pPr algn="ctr"/>
-            <a:r>
-              <a:rPr lang="en-US" b="1" dirty="0">
-                <a:latin typeface="Raleway" pitchFamily="2" charset="0"/>
-                <a:cs typeface="Posterama" panose="020B0504020200020000" pitchFamily="34" charset="0"/>
-              </a:rPr>
-              <a:t>Genomic Ranges</a:t>
-            </a:r>
-            <a:endParaRPr lang="en-GB" b="1" dirty="0">
-              <a:latin typeface="Raleway" pitchFamily="2" charset="0"/>
-              <a:cs typeface="Posterama" panose="020B0504020200020000" pitchFamily="34" charset="0"/>
-            </a:endParaRPr>
-          </a:p>
-        </p:txBody>
-      </p:sp>
-      <p:sp>
-        <p:nvSpPr>
-          <p:cNvPr id="2" name="Right Brace 1">
-            <a:extLst>
-              <a:ext uri="{FF2B5EF4-FFF2-40B4-BE49-F238E27FC236}">
-                <a16:creationId xmlns:a16="http://schemas.microsoft.com/office/drawing/2014/main" id="{F18A3004-090F-26E2-3A54-3E8AB0186268}"/>
-              </a:ext>
-            </a:extLst>
-          </p:cNvPr>
-          <p:cNvSpPr/>
-          <p:nvPr/>
-        </p:nvSpPr>
-        <p:spPr>
-          <a:xfrm>
-            <a:off x="5945663" y="4304668"/>
-            <a:ext cx="300349" cy="3014187"/>
-          </a:xfrm>
-          <a:prstGeom prst="rightBrace">
-            <a:avLst/>
-          </a:prstGeom>
-        </p:spPr>
-        <p:style>
-          <a:lnRef idx="3">
-            <a:schemeClr val="accent1"/>
-          </a:lnRef>
-          <a:fillRef idx="0">
-            <a:schemeClr val="accent1"/>
-          </a:fillRef>
-          <a:effectRef idx="2">
-            <a:schemeClr val="accent1"/>
-          </a:effectRef>
-          <a:fontRef idx="minor">
-            <a:schemeClr val="tx1"/>
-          </a:fontRef>
-        </p:style>
-        <p:txBody>
-          <a:bodyPr rtlCol="0" anchor="ctr"/>
-          <a:lstStyle/>
-          <a:p>
-            <a:pPr algn="ctr"/>
-            <a:endParaRPr lang="en-GB"/>
-          </a:p>
-        </p:txBody>
-      </p:sp>
-      <p:sp>
-        <p:nvSpPr>
-          <p:cNvPr id="26" name="Rectangle 25">
-            <a:extLst>
-              <a:ext uri="{FF2B5EF4-FFF2-40B4-BE49-F238E27FC236}">
-                <a16:creationId xmlns:a16="http://schemas.microsoft.com/office/drawing/2014/main" id="{82A8B043-284B-871C-0F20-AB9A4DE82FA3}"/>
-              </a:ext>
-            </a:extLst>
-          </p:cNvPr>
-          <p:cNvSpPr/>
-          <p:nvPr/>
-        </p:nvSpPr>
-        <p:spPr>
-          <a:xfrm>
-            <a:off x="2127250" y="10243531"/>
-            <a:ext cx="2603500" cy="393700"/>
-          </a:xfrm>
-          <a:prstGeom prst="rect">
-            <a:avLst/>
-          </a:prstGeom>
-          <a:ln w="19050">
-            <a:solidFill>
-              <a:schemeClr val="tx1"/>
-            </a:solidFill>
-          </a:ln>
-        </p:spPr>
-        <p:style>
-          <a:lnRef idx="2">
-            <a:schemeClr val="accent1"/>
-          </a:lnRef>
-          <a:fillRef idx="1">
-            <a:schemeClr val="lt1"/>
-          </a:fillRef>
-          <a:effectRef idx="0">
-            <a:schemeClr val="accent1"/>
-          </a:effectRef>
-          <a:fontRef idx="minor">
-            <a:schemeClr val="dk1"/>
-          </a:fontRef>
-        </p:style>
-        <p:txBody>
-          <a:bodyPr rtlCol="0" anchor="ctr"/>
-          <a:lstStyle/>
-          <a:p>
-            <a:pPr algn="ctr"/>
-            <a:r>
-              <a:rPr lang="en-US" b="1" dirty="0">
-                <a:latin typeface="Raleway" pitchFamily="2" charset="0"/>
-                <a:cs typeface="Posterama" panose="020B0504020200020000" pitchFamily="34" charset="0"/>
-              </a:rPr>
-              <a:t>Rescore locus</a:t>
-            </a:r>
-            <a:endParaRPr lang="en-GB" b="1" dirty="0">
-              <a:latin typeface="Raleway" pitchFamily="2" charset="0"/>
-              <a:cs typeface="Posterama" panose="020B0504020200020000" pitchFamily="34" charset="0"/>
-            </a:endParaRPr>
-          </a:p>
-        </p:txBody>
-      </p:sp>
-      <p:sp>
-        <p:nvSpPr>
-          <p:cNvPr id="12" name="Oval 11">
-            <a:extLst>
-              <a:ext uri="{FF2B5EF4-FFF2-40B4-BE49-F238E27FC236}">
-                <a16:creationId xmlns:a16="http://schemas.microsoft.com/office/drawing/2014/main" id="{84A3C5B3-0E4E-58AA-3355-3552F2F1365C}"/>
-              </a:ext>
-            </a:extLst>
-          </p:cNvPr>
-          <p:cNvSpPr/>
-          <p:nvPr/>
-        </p:nvSpPr>
-        <p:spPr>
-          <a:xfrm>
-            <a:off x="6030438" y="5564112"/>
-            <a:ext cx="508000" cy="495300"/>
-          </a:xfrm>
-          <a:prstGeom prst="ellipse">
-            <a:avLst/>
-          </a:prstGeom>
-        </p:spPr>
-        <p:style>
-          <a:lnRef idx="2">
-            <a:schemeClr val="accent1"/>
-          </a:lnRef>
-          <a:fillRef idx="1">
-            <a:schemeClr val="lt1"/>
-          </a:fillRef>
-          <a:effectRef idx="0">
-            <a:schemeClr val="accent1"/>
-          </a:effectRef>
-          <a:fontRef idx="minor">
-            <a:schemeClr val="dk1"/>
-          </a:fontRef>
-        </p:style>
-        <p:txBody>
-          <a:bodyPr rtlCol="0" anchor="ctr"/>
-          <a:lstStyle/>
-          <a:p>
-            <a:pPr algn="ctr"/>
-            <a:r>
-              <a:rPr lang="en-US" sz="1400" dirty="0"/>
-              <a:t>-b</a:t>
-            </a:r>
-            <a:endParaRPr lang="en-GB" sz="1400" dirty="0"/>
-          </a:p>
-        </p:txBody>
-      </p:sp>
-      <p:pic>
-        <p:nvPicPr>
-          <p:cNvPr id="6" name="Picture 5">
-            <a:extLst>
-              <a:ext uri="{FF2B5EF4-FFF2-40B4-BE49-F238E27FC236}">
-                <a16:creationId xmlns:a16="http://schemas.microsoft.com/office/drawing/2014/main" id="{9FB30D7F-2777-4174-C8AB-D0DE9459BC7E}"/>
-              </a:ext>
-            </a:extLst>
-          </p:cNvPr>
-          <p:cNvPicPr>
-            <a:picLocks noChangeAspect="1"/>
-          </p:cNvPicPr>
-          <p:nvPr/>
-        </p:nvPicPr>
-        <p:blipFill>
-          <a:blip r:embed="rId2"/>
-          <a:srcRect t="24837" r="20597"/>
-          <a:stretch>
-            <a:fillRect/>
-          </a:stretch>
-        </p:blipFill>
-        <p:spPr>
-          <a:xfrm>
-            <a:off x="402166" y="5403328"/>
-            <a:ext cx="5708780" cy="2855747"/>
-          </a:xfrm>
-          <a:prstGeom prst="rect">
-            <a:avLst/>
-          </a:prstGeom>
-          <a:ln w="19050">
-            <a:solidFill>
-              <a:schemeClr val="tx1"/>
-            </a:solidFill>
-          </a:ln>
-        </p:spPr>
-      </p:pic>
-      <p:cxnSp>
-        <p:nvCxnSpPr>
-          <p:cNvPr id="11" name="Straight Arrow Connector 10">
-            <a:extLst>
-              <a:ext uri="{FF2B5EF4-FFF2-40B4-BE49-F238E27FC236}">
-                <a16:creationId xmlns:a16="http://schemas.microsoft.com/office/drawing/2014/main" id="{5E99D58F-D8A1-36D1-08B2-D4B2D1CF4EA6}"/>
+                <a16:creationId xmlns:a16="http://schemas.microsoft.com/office/drawing/2014/main" id="{DF910A35-7BFA-EFD1-C33D-01B9AE8E57B2}"/>
               </a:ext>
             </a:extLst>
           </p:cNvPr>
@@ -7929,8 +6861,8 @@
         </p:nvCxnSpPr>
         <p:spPr>
           <a:xfrm>
-            <a:off x="3971925" y="5403328"/>
-            <a:ext cx="457200" cy="892697"/>
+            <a:off x="2328474" y="7866868"/>
+            <a:ext cx="829611" cy="2211765"/>
           </a:xfrm>
           <a:prstGeom prst="straightConnector1">
             <a:avLst/>
@@ -7954,2342 +6886,6 @@
           </a:fontRef>
         </p:style>
       </p:cxnSp>
-      <p:cxnSp>
-        <p:nvCxnSpPr>
-          <p:cNvPr id="14" name="Straight Arrow Connector 13">
-            <a:extLst>
-              <a:ext uri="{FF2B5EF4-FFF2-40B4-BE49-F238E27FC236}">
-                <a16:creationId xmlns:a16="http://schemas.microsoft.com/office/drawing/2014/main" id="{9159153F-C10D-2CF6-4421-32D3C2D17193}"/>
-              </a:ext>
-            </a:extLst>
-          </p:cNvPr>
-          <p:cNvCxnSpPr>
-            <a:cxnSpLocks/>
-          </p:cNvCxnSpPr>
-          <p:nvPr/>
-        </p:nvCxnSpPr>
-        <p:spPr>
-          <a:xfrm>
-            <a:off x="4452938" y="6767513"/>
-            <a:ext cx="0" cy="1382185"/>
-          </a:xfrm>
-          <a:prstGeom prst="straightConnector1">
-            <a:avLst/>
-          </a:prstGeom>
-          <a:ln>
-            <a:tailEnd type="triangle"/>
-          </a:ln>
-        </p:spPr>
-        <p:style>
-          <a:lnRef idx="3">
-            <a:schemeClr val="accent1"/>
-          </a:lnRef>
-          <a:fillRef idx="0">
-            <a:schemeClr val="accent1"/>
-          </a:fillRef>
-          <a:effectRef idx="2">
-            <a:schemeClr val="accent1"/>
-          </a:effectRef>
-          <a:fontRef idx="minor">
-            <a:schemeClr val="tx1"/>
-          </a:fontRef>
-        </p:style>
-      </p:cxnSp>
-      <p:sp>
-        <p:nvSpPr>
-          <p:cNvPr id="3" name="TextBox 2">
-            <a:extLst>
-              <a:ext uri="{FF2B5EF4-FFF2-40B4-BE49-F238E27FC236}">
-                <a16:creationId xmlns:a16="http://schemas.microsoft.com/office/drawing/2014/main" id="{23254414-C9FD-7817-C8C3-17BE8AC59B65}"/>
-              </a:ext>
-            </a:extLst>
-          </p:cNvPr>
-          <p:cNvSpPr txBox="1"/>
-          <p:nvPr/>
-        </p:nvSpPr>
-        <p:spPr>
-          <a:xfrm>
-            <a:off x="0" y="0"/>
-            <a:ext cx="2127250" cy="523220"/>
-          </a:xfrm>
-          <a:prstGeom prst="rect">
-            <a:avLst/>
-          </a:prstGeom>
-          <a:noFill/>
-        </p:spPr>
-        <p:txBody>
-          <a:bodyPr wrap="square" rtlCol="0">
-            <a:spAutoFit/>
-          </a:bodyPr>
-          <a:lstStyle/>
-          <a:p>
-            <a:r>
-              <a:rPr lang="en-US" sz="2800" dirty="0"/>
-              <a:t>CURRENT</a:t>
-            </a:r>
-            <a:endParaRPr lang="en-GB" sz="2800" dirty="0"/>
-          </a:p>
-        </p:txBody>
-      </p:sp>
-    </p:spTree>
-    <p:extLst>
-      <p:ext uri="{BB962C8B-B14F-4D97-AF65-F5344CB8AC3E}">
-        <p14:creationId xmlns:p14="http://schemas.microsoft.com/office/powerpoint/2010/main" val="72113033"/>
-      </p:ext>
-    </p:extLst>
-  </p:cSld>
-  <p:clrMapOvr>
-    <a:masterClrMapping/>
-  </p:clrMapOvr>
-</p:sld>
-</file>
-
-<file path=ppt/slides/slide2.xml><?xml version="1.0" encoding="utf-8"?>
-<p:sld xmlns:a="http://schemas.openxmlformats.org/drawingml/2006/main" xmlns:r="http://schemas.openxmlformats.org/officeDocument/2006/relationships" xmlns:p="http://schemas.openxmlformats.org/presentationml/2006/main">
-  <p:cSld>
-    <p:spTree>
-      <p:nvGrpSpPr>
-        <p:cNvPr id="1" name="">
-          <a:extLst>
-            <a:ext uri="{FF2B5EF4-FFF2-40B4-BE49-F238E27FC236}">
-              <a16:creationId xmlns:a16="http://schemas.microsoft.com/office/drawing/2014/main" id="{7E346146-B82F-C9BA-9347-5B1D9E5F6438}"/>
-            </a:ext>
-          </a:extLst>
-        </p:cNvPr>
-        <p:cNvGrpSpPr/>
-        <p:nvPr/>
-      </p:nvGrpSpPr>
-      <p:grpSpPr>
-        <a:xfrm>
-          <a:off x="0" y="0"/>
-          <a:ext cx="0" cy="0"/>
-          <a:chOff x="0" y="0"/>
-          <a:chExt cx="0" cy="0"/>
-        </a:xfrm>
-      </p:grpSpPr>
-      <p:cxnSp>
-        <p:nvCxnSpPr>
-          <p:cNvPr id="50" name="Straight Arrow Connector 49">
-            <a:extLst>
-              <a:ext uri="{FF2B5EF4-FFF2-40B4-BE49-F238E27FC236}">
-                <a16:creationId xmlns:a16="http://schemas.microsoft.com/office/drawing/2014/main" id="{81F23D2E-2079-4704-8564-AA968031C0D2}"/>
-              </a:ext>
-            </a:extLst>
-          </p:cNvPr>
-          <p:cNvCxnSpPr>
-            <a:cxnSpLocks/>
-          </p:cNvCxnSpPr>
-          <p:nvPr/>
-        </p:nvCxnSpPr>
-        <p:spPr>
-          <a:xfrm>
-            <a:off x="1133475" y="9953343"/>
-            <a:ext cx="3193248" cy="1351291"/>
-          </a:xfrm>
-          <a:prstGeom prst="straightConnector1">
-            <a:avLst/>
-          </a:prstGeom>
-          <a:ln>
-            <a:tailEnd type="triangle"/>
-          </a:ln>
-        </p:spPr>
-        <p:style>
-          <a:lnRef idx="3">
-            <a:schemeClr val="accent1"/>
-          </a:lnRef>
-          <a:fillRef idx="0">
-            <a:schemeClr val="accent1"/>
-          </a:fillRef>
-          <a:effectRef idx="2">
-            <a:schemeClr val="accent1"/>
-          </a:effectRef>
-          <a:fontRef idx="minor">
-            <a:schemeClr val="tx1"/>
-          </a:fontRef>
-        </p:style>
-      </p:cxnSp>
-      <p:sp>
-        <p:nvSpPr>
-          <p:cNvPr id="4" name="Rectangle 3">
-            <a:extLst>
-              <a:ext uri="{FF2B5EF4-FFF2-40B4-BE49-F238E27FC236}">
-                <a16:creationId xmlns:a16="http://schemas.microsoft.com/office/drawing/2014/main" id="{F36FDDD2-8D43-A135-5329-ED20464B5E0F}"/>
-              </a:ext>
-            </a:extLst>
-          </p:cNvPr>
-          <p:cNvSpPr/>
-          <p:nvPr/>
-        </p:nvSpPr>
-        <p:spPr>
-          <a:xfrm>
-            <a:off x="694592" y="618391"/>
-            <a:ext cx="5468816" cy="1014525"/>
-          </a:xfrm>
-          <a:prstGeom prst="rect">
-            <a:avLst/>
-          </a:prstGeom>
-          <a:solidFill>
-            <a:schemeClr val="accent1">
-              <a:lumMod val="40000"/>
-              <a:lumOff val="60000"/>
-            </a:schemeClr>
-          </a:solidFill>
-        </p:spPr>
-        <p:style>
-          <a:lnRef idx="2">
-            <a:schemeClr val="accent1">
-              <a:shade val="15000"/>
-            </a:schemeClr>
-          </a:lnRef>
-          <a:fillRef idx="1">
-            <a:schemeClr val="accent1"/>
-          </a:fillRef>
-          <a:effectRef idx="0">
-            <a:schemeClr val="accent1"/>
-          </a:effectRef>
-          <a:fontRef idx="minor">
-            <a:schemeClr val="lt1"/>
-          </a:fontRef>
-        </p:style>
-        <p:txBody>
-          <a:bodyPr rtlCol="0" anchor="ctr"/>
-          <a:lstStyle/>
-          <a:p>
-            <a:pPr algn="ctr"/>
-            <a:r>
-              <a:rPr lang="en-US" sz="1400" dirty="0" err="1">
-                <a:solidFill>
-                  <a:sysClr val="windowText" lastClr="000000"/>
-                </a:solidFill>
-                <a:latin typeface="Abadi" panose="020B0604020104020204" pitchFamily="34" charset="0"/>
-              </a:rPr>
-              <a:t>SpliceAI</a:t>
-            </a:r>
-            <a:r>
-              <a:rPr lang="en-US" sz="1400" dirty="0">
-                <a:solidFill>
-                  <a:sysClr val="windowText" lastClr="000000"/>
-                </a:solidFill>
-                <a:latin typeface="Abadi" panose="020B0604020104020204" pitchFamily="34" charset="0"/>
-              </a:rPr>
-              <a:t> inferences generated across whole introns and filtered to remove signal below 0.05</a:t>
-            </a:r>
-          </a:p>
-          <a:p>
-            <a:pPr algn="ctr"/>
-            <a:r>
-              <a:rPr lang="en-US" sz="1400" dirty="0">
-                <a:solidFill>
-                  <a:sysClr val="windowText" lastClr="000000"/>
-                </a:solidFill>
-                <a:latin typeface="Abadi" panose="020B0604020104020204" pitchFamily="34" charset="0"/>
-              </a:rPr>
-              <a:t>794,192 splice site inferences</a:t>
-            </a:r>
-            <a:endParaRPr lang="en-GB" sz="1400" dirty="0">
-              <a:solidFill>
-                <a:sysClr val="windowText" lastClr="000000"/>
-              </a:solidFill>
-              <a:latin typeface="Abadi" panose="020B0604020104020204" pitchFamily="34" charset="0"/>
-            </a:endParaRPr>
-          </a:p>
-        </p:txBody>
-      </p:sp>
-      <p:sp>
-        <p:nvSpPr>
-          <p:cNvPr id="7" name="Rectangle 6">
-            <a:extLst>
-              <a:ext uri="{FF2B5EF4-FFF2-40B4-BE49-F238E27FC236}">
-                <a16:creationId xmlns:a16="http://schemas.microsoft.com/office/drawing/2014/main" id="{01EF1563-0C33-BE4B-F0E6-CE5448F4BE4F}"/>
-              </a:ext>
-            </a:extLst>
-          </p:cNvPr>
-          <p:cNvSpPr/>
-          <p:nvPr/>
-        </p:nvSpPr>
-        <p:spPr>
-          <a:xfrm>
-            <a:off x="694592" y="3464631"/>
-            <a:ext cx="5468816" cy="1015181"/>
-          </a:xfrm>
-          <a:prstGeom prst="rect">
-            <a:avLst/>
-          </a:prstGeom>
-          <a:solidFill>
-            <a:schemeClr val="accent1">
-              <a:lumMod val="40000"/>
-              <a:lumOff val="60000"/>
-            </a:schemeClr>
-          </a:solidFill>
-        </p:spPr>
-        <p:style>
-          <a:lnRef idx="2">
-            <a:schemeClr val="accent1">
-              <a:shade val="15000"/>
-            </a:schemeClr>
-          </a:lnRef>
-          <a:fillRef idx="1">
-            <a:schemeClr val="accent1"/>
-          </a:fillRef>
-          <a:effectRef idx="0">
-            <a:schemeClr val="accent1"/>
-          </a:effectRef>
-          <a:fontRef idx="minor">
-            <a:schemeClr val="lt1"/>
-          </a:fontRef>
-        </p:style>
-        <p:txBody>
-          <a:bodyPr rtlCol="0" anchor="ctr"/>
-          <a:lstStyle/>
-          <a:p>
-            <a:pPr algn="ctr"/>
-            <a:r>
-              <a:rPr lang="en-US" sz="1400" dirty="0">
-                <a:solidFill>
-                  <a:sysClr val="windowText" lastClr="000000"/>
-                </a:solidFill>
-                <a:latin typeface="Abadi" panose="020B0604020104020204" pitchFamily="34" charset="0"/>
-              </a:rPr>
-              <a:t>Create a new exonic bed to filter splice sites within 100 bp of exon boundaries</a:t>
-            </a:r>
-          </a:p>
-          <a:p>
-            <a:pPr algn="ctr"/>
-            <a:r>
-              <a:rPr lang="en-US" sz="1400" dirty="0">
-                <a:solidFill>
-                  <a:schemeClr val="accent1"/>
-                </a:solidFill>
-                <a:latin typeface="Abadi" panose="020B0604020104020204" pitchFamily="34" charset="0"/>
-              </a:rPr>
-              <a:t>50nt_exonic_loci.bed</a:t>
-            </a:r>
-          </a:p>
-        </p:txBody>
-      </p:sp>
-      <p:sp>
-        <p:nvSpPr>
-          <p:cNvPr id="8" name="Rectangle 7">
-            <a:extLst>
-              <a:ext uri="{FF2B5EF4-FFF2-40B4-BE49-F238E27FC236}">
-                <a16:creationId xmlns:a16="http://schemas.microsoft.com/office/drawing/2014/main" id="{855B8832-A681-E024-AF34-09BED346DF87}"/>
-              </a:ext>
-            </a:extLst>
-          </p:cNvPr>
-          <p:cNvSpPr/>
-          <p:nvPr/>
-        </p:nvSpPr>
-        <p:spPr>
-          <a:xfrm>
-            <a:off x="2127250" y="421541"/>
-            <a:ext cx="2603500" cy="393700"/>
-          </a:xfrm>
-          <a:prstGeom prst="rect">
-            <a:avLst/>
-          </a:prstGeom>
-          <a:ln w="19050">
-            <a:solidFill>
-              <a:schemeClr val="tx1"/>
-            </a:solidFill>
-          </a:ln>
-        </p:spPr>
-        <p:style>
-          <a:lnRef idx="2">
-            <a:schemeClr val="accent1"/>
-          </a:lnRef>
-          <a:fillRef idx="1">
-            <a:schemeClr val="lt1"/>
-          </a:fillRef>
-          <a:effectRef idx="0">
-            <a:schemeClr val="accent1"/>
-          </a:effectRef>
-          <a:fontRef idx="minor">
-            <a:schemeClr val="dk1"/>
-          </a:fontRef>
-        </p:style>
-        <p:txBody>
-          <a:bodyPr rtlCol="0" anchor="ctr"/>
-          <a:lstStyle/>
-          <a:p>
-            <a:pPr algn="ctr"/>
-            <a:r>
-              <a:rPr lang="en-US" b="1" dirty="0" err="1">
-                <a:latin typeface="Raleway" pitchFamily="2" charset="0"/>
-                <a:cs typeface="Posterama" panose="020B0504020200020000" pitchFamily="34" charset="0"/>
-              </a:rPr>
-              <a:t>SpliceAI</a:t>
-            </a:r>
-            <a:endParaRPr lang="en-GB" b="1" dirty="0">
-              <a:latin typeface="Raleway" pitchFamily="2" charset="0"/>
-              <a:cs typeface="Posterama" panose="020B0504020200020000" pitchFamily="34" charset="0"/>
-            </a:endParaRPr>
-          </a:p>
-        </p:txBody>
-      </p:sp>
-      <p:sp>
-        <p:nvSpPr>
-          <p:cNvPr id="20" name="Rectangle 19">
-            <a:extLst>
-              <a:ext uri="{FF2B5EF4-FFF2-40B4-BE49-F238E27FC236}">
-                <a16:creationId xmlns:a16="http://schemas.microsoft.com/office/drawing/2014/main" id="{827BB162-2D86-44A6-4FAC-AF1178C52E17}"/>
-              </a:ext>
-            </a:extLst>
-          </p:cNvPr>
-          <p:cNvSpPr/>
-          <p:nvPr/>
-        </p:nvSpPr>
-        <p:spPr>
-          <a:xfrm>
-            <a:off x="694592" y="1975814"/>
-            <a:ext cx="5468816" cy="1130298"/>
-          </a:xfrm>
-          <a:prstGeom prst="rect">
-            <a:avLst/>
-          </a:prstGeom>
-          <a:solidFill>
-            <a:schemeClr val="accent1">
-              <a:lumMod val="40000"/>
-              <a:lumOff val="60000"/>
-            </a:schemeClr>
-          </a:solidFill>
-        </p:spPr>
-        <p:style>
-          <a:lnRef idx="2">
-            <a:schemeClr val="accent1">
-              <a:shade val="15000"/>
-            </a:schemeClr>
-          </a:lnRef>
-          <a:fillRef idx="1">
-            <a:schemeClr val="accent1"/>
-          </a:fillRef>
-          <a:effectRef idx="0">
-            <a:schemeClr val="accent1"/>
-          </a:effectRef>
-          <a:fontRef idx="minor">
-            <a:schemeClr val="lt1"/>
-          </a:fontRef>
-        </p:style>
-        <p:txBody>
-          <a:bodyPr rtlCol="0" anchor="ctr"/>
-          <a:lstStyle/>
-          <a:p>
-            <a:pPr algn="ctr"/>
-            <a:r>
-              <a:rPr lang="en-US" sz="1400" dirty="0">
-                <a:solidFill>
-                  <a:sysClr val="windowText" lastClr="000000"/>
-                </a:solidFill>
-                <a:latin typeface="Abadi" panose="020B0604020104020204" pitchFamily="34" charset="0"/>
-              </a:rPr>
-              <a:t>Using </a:t>
-            </a:r>
-            <a:r>
-              <a:rPr lang="en-US" sz="1400" dirty="0" err="1">
-                <a:solidFill>
-                  <a:sysClr val="windowText" lastClr="000000"/>
-                </a:solidFill>
-                <a:latin typeface="Abadi" panose="020B0604020104020204" pitchFamily="34" charset="0"/>
-              </a:rPr>
-              <a:t>GRanges</a:t>
-            </a:r>
-            <a:r>
-              <a:rPr lang="en-US" sz="1400" dirty="0">
-                <a:solidFill>
-                  <a:sysClr val="windowText" lastClr="000000"/>
-                </a:solidFill>
-                <a:latin typeface="Abadi" panose="020B0604020104020204" pitchFamily="34" charset="0"/>
-              </a:rPr>
-              <a:t>, keep only “</a:t>
-            </a:r>
-            <a:r>
-              <a:rPr lang="en-US" sz="1400" dirty="0" err="1">
-                <a:solidFill>
-                  <a:sysClr val="windowText" lastClr="000000"/>
-                </a:solidFill>
-                <a:latin typeface="Abadi" panose="020B0604020104020204" pitchFamily="34" charset="0"/>
-              </a:rPr>
-              <a:t>protein_coding</a:t>
-            </a:r>
-            <a:r>
-              <a:rPr lang="en-US" sz="1400" dirty="0">
-                <a:solidFill>
-                  <a:sysClr val="windowText" lastClr="000000"/>
-                </a:solidFill>
-                <a:latin typeface="Abadi" panose="020B0604020104020204" pitchFamily="34" charset="0"/>
-              </a:rPr>
-              <a:t>” regions in Gencode.v49.annotation.gtf</a:t>
-            </a:r>
-          </a:p>
-          <a:p>
-            <a:pPr algn="ctr"/>
-            <a:r>
-              <a:rPr lang="en-US" sz="1400" dirty="0" err="1">
-                <a:solidFill>
-                  <a:schemeClr val="accent1"/>
-                </a:solidFill>
-                <a:latin typeface="Abadi" panose="020B0604020104020204" pitchFamily="34" charset="0"/>
-              </a:rPr>
-              <a:t>Protein_coding_sites.bed</a:t>
-            </a:r>
-            <a:endParaRPr lang="en-US" sz="1400" dirty="0">
-              <a:solidFill>
-                <a:schemeClr val="accent1"/>
-              </a:solidFill>
-              <a:latin typeface="Abadi" panose="020B0604020104020204" pitchFamily="34" charset="0"/>
-            </a:endParaRPr>
-          </a:p>
-        </p:txBody>
-      </p:sp>
-      <p:sp>
-        <p:nvSpPr>
-          <p:cNvPr id="24" name="Rectangle 23">
-            <a:extLst>
-              <a:ext uri="{FF2B5EF4-FFF2-40B4-BE49-F238E27FC236}">
-                <a16:creationId xmlns:a16="http://schemas.microsoft.com/office/drawing/2014/main" id="{B4CD350F-DE7C-600B-2C59-379360BFA161}"/>
-              </a:ext>
-            </a:extLst>
-          </p:cNvPr>
-          <p:cNvSpPr/>
-          <p:nvPr/>
-        </p:nvSpPr>
-        <p:spPr>
-          <a:xfrm>
-            <a:off x="2127250" y="1778964"/>
-            <a:ext cx="2603500" cy="393700"/>
-          </a:xfrm>
-          <a:prstGeom prst="rect">
-            <a:avLst/>
-          </a:prstGeom>
-          <a:ln w="19050">
-            <a:solidFill>
-              <a:schemeClr val="tx1"/>
-            </a:solidFill>
-          </a:ln>
-        </p:spPr>
-        <p:style>
-          <a:lnRef idx="2">
-            <a:schemeClr val="accent1"/>
-          </a:lnRef>
-          <a:fillRef idx="1">
-            <a:schemeClr val="lt1"/>
-          </a:fillRef>
-          <a:effectRef idx="0">
-            <a:schemeClr val="accent1"/>
-          </a:effectRef>
-          <a:fontRef idx="minor">
-            <a:schemeClr val="dk1"/>
-          </a:fontRef>
-        </p:style>
-        <p:txBody>
-          <a:bodyPr rtlCol="0" anchor="ctr"/>
-          <a:lstStyle/>
-          <a:p>
-            <a:pPr algn="ctr"/>
-            <a:r>
-              <a:rPr lang="en-US" b="1" dirty="0">
-                <a:latin typeface="Raleway" pitchFamily="2" charset="0"/>
-                <a:cs typeface="Posterama" panose="020B0504020200020000" pitchFamily="34" charset="0"/>
-              </a:rPr>
-              <a:t>Genomic Ranges</a:t>
-            </a:r>
-            <a:endParaRPr lang="en-GB" b="1" dirty="0">
-              <a:latin typeface="Raleway" pitchFamily="2" charset="0"/>
-              <a:cs typeface="Posterama" panose="020B0504020200020000" pitchFamily="34" charset="0"/>
-            </a:endParaRPr>
-          </a:p>
-        </p:txBody>
-      </p:sp>
-      <p:pic>
-        <p:nvPicPr>
-          <p:cNvPr id="6" name="Picture 5">
-            <a:extLst>
-              <a:ext uri="{FF2B5EF4-FFF2-40B4-BE49-F238E27FC236}">
-                <a16:creationId xmlns:a16="http://schemas.microsoft.com/office/drawing/2014/main" id="{3F9560D4-C02F-4894-8EAD-C2116003F603}"/>
-              </a:ext>
-            </a:extLst>
-          </p:cNvPr>
-          <p:cNvPicPr>
-            <a:picLocks noChangeAspect="1"/>
-          </p:cNvPicPr>
-          <p:nvPr/>
-        </p:nvPicPr>
-        <p:blipFill>
-          <a:blip r:embed="rId2"/>
-          <a:srcRect t="39377" r="20597"/>
-          <a:stretch>
-            <a:fillRect/>
-          </a:stretch>
-        </p:blipFill>
-        <p:spPr>
-          <a:xfrm>
-            <a:off x="574610" y="4838331"/>
-            <a:ext cx="5708780" cy="2303297"/>
-          </a:xfrm>
-          <a:prstGeom prst="rect">
-            <a:avLst/>
-          </a:prstGeom>
-          <a:ln w="19050">
-            <a:solidFill>
-              <a:schemeClr val="tx1"/>
-            </a:solidFill>
-          </a:ln>
-        </p:spPr>
-      </p:pic>
-      <p:cxnSp>
-        <p:nvCxnSpPr>
-          <p:cNvPr id="11" name="Straight Arrow Connector 10">
-            <a:extLst>
-              <a:ext uri="{FF2B5EF4-FFF2-40B4-BE49-F238E27FC236}">
-                <a16:creationId xmlns:a16="http://schemas.microsoft.com/office/drawing/2014/main" id="{88C74F9B-5EE0-B602-61CE-8304D5B4E442}"/>
-              </a:ext>
-            </a:extLst>
-          </p:cNvPr>
-          <p:cNvCxnSpPr>
-            <a:cxnSpLocks/>
-          </p:cNvCxnSpPr>
-          <p:nvPr/>
-        </p:nvCxnSpPr>
-        <p:spPr>
-          <a:xfrm>
-            <a:off x="4326723" y="4301330"/>
-            <a:ext cx="525671" cy="895520"/>
-          </a:xfrm>
-          <a:prstGeom prst="straightConnector1">
-            <a:avLst/>
-          </a:prstGeom>
-          <a:ln>
-            <a:tailEnd type="triangle"/>
-          </a:ln>
-        </p:spPr>
-        <p:style>
-          <a:lnRef idx="3">
-            <a:schemeClr val="accent1"/>
-          </a:lnRef>
-          <a:fillRef idx="0">
-            <a:schemeClr val="accent1"/>
-          </a:fillRef>
-          <a:effectRef idx="2">
-            <a:schemeClr val="accent1"/>
-          </a:effectRef>
-          <a:fontRef idx="minor">
-            <a:schemeClr val="tx1"/>
-          </a:fontRef>
-        </p:style>
-      </p:cxnSp>
-      <p:cxnSp>
-        <p:nvCxnSpPr>
-          <p:cNvPr id="14" name="Straight Arrow Connector 13">
-            <a:extLst>
-              <a:ext uri="{FF2B5EF4-FFF2-40B4-BE49-F238E27FC236}">
-                <a16:creationId xmlns:a16="http://schemas.microsoft.com/office/drawing/2014/main" id="{B939BD0A-E98E-7F5F-546D-DD10B661AE50}"/>
-              </a:ext>
-            </a:extLst>
-          </p:cNvPr>
-          <p:cNvCxnSpPr>
-            <a:cxnSpLocks/>
-          </p:cNvCxnSpPr>
-          <p:nvPr/>
-        </p:nvCxnSpPr>
-        <p:spPr>
-          <a:xfrm>
-            <a:off x="4625382" y="5650066"/>
-            <a:ext cx="0" cy="1382185"/>
-          </a:xfrm>
-          <a:prstGeom prst="straightConnector1">
-            <a:avLst/>
-          </a:prstGeom>
-          <a:ln>
-            <a:tailEnd type="triangle"/>
-          </a:ln>
-        </p:spPr>
-        <p:style>
-          <a:lnRef idx="3">
-            <a:schemeClr val="accent1"/>
-          </a:lnRef>
-          <a:fillRef idx="0">
-            <a:schemeClr val="accent1"/>
-          </a:fillRef>
-          <a:effectRef idx="2">
-            <a:schemeClr val="accent1"/>
-          </a:effectRef>
-          <a:fontRef idx="minor">
-            <a:schemeClr val="tx1"/>
-          </a:fontRef>
-        </p:style>
-      </p:cxnSp>
-      <p:sp>
-        <p:nvSpPr>
-          <p:cNvPr id="3" name="Rectangle 2">
-            <a:extLst>
-              <a:ext uri="{FF2B5EF4-FFF2-40B4-BE49-F238E27FC236}">
-                <a16:creationId xmlns:a16="http://schemas.microsoft.com/office/drawing/2014/main" id="{50C5DF0C-5B73-6093-285E-5B4DE3EA7FBF}"/>
-              </a:ext>
-            </a:extLst>
-          </p:cNvPr>
-          <p:cNvSpPr/>
-          <p:nvPr/>
-        </p:nvSpPr>
-        <p:spPr>
-          <a:xfrm>
-            <a:off x="4852394" y="5296053"/>
-            <a:ext cx="525671" cy="110969"/>
-          </a:xfrm>
-          <a:prstGeom prst="rect">
-            <a:avLst/>
-          </a:prstGeom>
-        </p:spPr>
-        <p:style>
-          <a:lnRef idx="2">
-            <a:schemeClr val="accent1">
-              <a:shade val="15000"/>
-            </a:schemeClr>
-          </a:lnRef>
-          <a:fillRef idx="1">
-            <a:schemeClr val="accent1"/>
-          </a:fillRef>
-          <a:effectRef idx="0">
-            <a:schemeClr val="accent1"/>
-          </a:effectRef>
-          <a:fontRef idx="minor">
-            <a:schemeClr val="lt1"/>
-          </a:fontRef>
-        </p:style>
-        <p:txBody>
-          <a:bodyPr rtlCol="0" anchor="ctr"/>
-          <a:lstStyle/>
-          <a:p>
-            <a:pPr algn="ctr"/>
-            <a:endParaRPr lang="en-GB"/>
-          </a:p>
-        </p:txBody>
-      </p:sp>
-      <p:cxnSp>
-        <p:nvCxnSpPr>
-          <p:cNvPr id="9" name="Straight Arrow Connector 8">
-            <a:extLst>
-              <a:ext uri="{FF2B5EF4-FFF2-40B4-BE49-F238E27FC236}">
-                <a16:creationId xmlns:a16="http://schemas.microsoft.com/office/drawing/2014/main" id="{AD512864-D50D-2AD6-7FBE-43E8FD8FE5D0}"/>
-              </a:ext>
-            </a:extLst>
-          </p:cNvPr>
-          <p:cNvCxnSpPr>
-            <a:cxnSpLocks/>
-          </p:cNvCxnSpPr>
-          <p:nvPr/>
-        </p:nvCxnSpPr>
-        <p:spPr>
-          <a:xfrm>
-            <a:off x="5234982" y="5650066"/>
-            <a:ext cx="0" cy="1382185"/>
-          </a:xfrm>
-          <a:prstGeom prst="straightConnector1">
-            <a:avLst/>
-          </a:prstGeom>
-          <a:ln>
-            <a:tailEnd type="triangle"/>
-          </a:ln>
-        </p:spPr>
-        <p:style>
-          <a:lnRef idx="3">
-            <a:schemeClr val="accent1"/>
-          </a:lnRef>
-          <a:fillRef idx="0">
-            <a:schemeClr val="accent1"/>
-          </a:fillRef>
-          <a:effectRef idx="2">
-            <a:schemeClr val="accent1"/>
-          </a:effectRef>
-          <a:fontRef idx="minor">
-            <a:schemeClr val="tx1"/>
-          </a:fontRef>
-        </p:style>
-      </p:cxnSp>
-      <p:sp>
-        <p:nvSpPr>
-          <p:cNvPr id="16" name="Rectangle 15">
-            <a:extLst>
-              <a:ext uri="{FF2B5EF4-FFF2-40B4-BE49-F238E27FC236}">
-                <a16:creationId xmlns:a16="http://schemas.microsoft.com/office/drawing/2014/main" id="{1A203446-C53A-CA4E-ED61-017C4703609F}"/>
-              </a:ext>
-            </a:extLst>
-          </p:cNvPr>
-          <p:cNvSpPr/>
-          <p:nvPr/>
-        </p:nvSpPr>
-        <p:spPr>
-          <a:xfrm>
-            <a:off x="114297" y="7537530"/>
-            <a:ext cx="6619875" cy="909119"/>
-          </a:xfrm>
-          <a:prstGeom prst="rect">
-            <a:avLst/>
-          </a:prstGeom>
-          <a:solidFill>
-            <a:schemeClr val="accent1">
-              <a:lumMod val="40000"/>
-              <a:lumOff val="60000"/>
-            </a:schemeClr>
-          </a:solidFill>
-        </p:spPr>
-        <p:style>
-          <a:lnRef idx="2">
-            <a:schemeClr val="accent1">
-              <a:shade val="15000"/>
-            </a:schemeClr>
-          </a:lnRef>
-          <a:fillRef idx="1">
-            <a:schemeClr val="accent1"/>
-          </a:fillRef>
-          <a:effectRef idx="0">
-            <a:schemeClr val="accent1"/>
-          </a:effectRef>
-          <a:fontRef idx="minor">
-            <a:schemeClr val="lt1"/>
-          </a:fontRef>
-        </p:style>
-        <p:txBody>
-          <a:bodyPr numCol="2" rtlCol="0" anchor="ctr"/>
-          <a:lstStyle/>
-          <a:p>
-            <a:pPr algn="ctr"/>
-            <a:endParaRPr lang="en-GB" sz="1400" dirty="0">
-              <a:solidFill>
-                <a:sysClr val="windowText" lastClr="000000"/>
-              </a:solidFill>
-              <a:latin typeface="SimHei" panose="020B0503020204020204" pitchFamily="49" charset="-122"/>
-              <a:ea typeface="SimHei" panose="020B0503020204020204" pitchFamily="49" charset="-122"/>
-            </a:endParaRPr>
-          </a:p>
-          <a:p>
-            <a:pPr algn="ctr"/>
-            <a:r>
-              <a:rPr lang="en-GB" sz="1400" dirty="0">
-                <a:solidFill>
-                  <a:sysClr val="windowText" lastClr="000000"/>
-                </a:solidFill>
-                <a:latin typeface="SimHei" panose="020B0503020204020204" pitchFamily="49" charset="-122"/>
-                <a:ea typeface="SimHei" panose="020B0503020204020204" pitchFamily="49" charset="-122"/>
-              </a:rPr>
-              <a:t>bedtools intersect -v (does not overlap) 50nt_exonic_loci.bed</a:t>
-            </a:r>
-            <a:br>
-              <a:rPr lang="en-GB" sz="1400" dirty="0">
-                <a:solidFill>
-                  <a:sysClr val="windowText" lastClr="000000"/>
-                </a:solidFill>
-                <a:latin typeface="SimHei" panose="020B0503020204020204" pitchFamily="49" charset="-122"/>
-                <a:ea typeface="SimHei" panose="020B0503020204020204" pitchFamily="49" charset="-122"/>
-              </a:rPr>
-            </a:br>
-            <a:r>
-              <a:rPr lang="en-GB" sz="1400" dirty="0">
-                <a:solidFill>
-                  <a:sysClr val="windowText" lastClr="000000"/>
-                </a:solidFill>
-                <a:latin typeface="SimHei" panose="020B0503020204020204" pitchFamily="49" charset="-122"/>
-                <a:ea typeface="SimHei" panose="020B0503020204020204" pitchFamily="49" charset="-122"/>
-              </a:rPr>
-              <a:t>== </a:t>
-            </a:r>
-            <a:r>
-              <a:rPr lang="en-GB" sz="1400" dirty="0" err="1">
-                <a:solidFill>
-                  <a:schemeClr val="accent1"/>
-                </a:solidFill>
-                <a:latin typeface="SimHei" panose="020B0503020204020204" pitchFamily="49" charset="-122"/>
-                <a:ea typeface="SimHei" panose="020B0503020204020204" pitchFamily="49" charset="-122"/>
-              </a:rPr>
-              <a:t>deep_intronic_sites.bed</a:t>
-            </a:r>
-            <a:endParaRPr lang="en-GB" sz="1400" dirty="0">
-              <a:solidFill>
-                <a:schemeClr val="accent1"/>
-              </a:solidFill>
-              <a:latin typeface="SimHei" panose="020B0503020204020204" pitchFamily="49" charset="-122"/>
-              <a:ea typeface="SimHei" panose="020B0503020204020204" pitchFamily="49" charset="-122"/>
-            </a:endParaRPr>
-          </a:p>
-          <a:p>
-            <a:pPr algn="ctr"/>
-            <a:endParaRPr lang="en-GB" sz="1400" dirty="0">
-              <a:solidFill>
-                <a:sysClr val="windowText" lastClr="000000"/>
-              </a:solidFill>
-              <a:latin typeface="SimHei" panose="020B0503020204020204" pitchFamily="49" charset="-122"/>
-              <a:ea typeface="SimHei" panose="020B0503020204020204" pitchFamily="49" charset="-122"/>
-            </a:endParaRPr>
-          </a:p>
-          <a:p>
-            <a:pPr algn="ctr"/>
-            <a:endParaRPr lang="en-GB" sz="1400" dirty="0">
-              <a:solidFill>
-                <a:sysClr val="windowText" lastClr="000000"/>
-              </a:solidFill>
-              <a:latin typeface="SimHei" panose="020B0503020204020204" pitchFamily="49" charset="-122"/>
-              <a:ea typeface="SimHei" panose="020B0503020204020204" pitchFamily="49" charset="-122"/>
-            </a:endParaRPr>
-          </a:p>
-          <a:p>
-            <a:pPr algn="ctr"/>
-            <a:endParaRPr lang="en-GB" sz="1400" dirty="0">
-              <a:solidFill>
-                <a:sysClr val="windowText" lastClr="000000"/>
-              </a:solidFill>
-              <a:latin typeface="SimHei" panose="020B0503020204020204" pitchFamily="49" charset="-122"/>
-              <a:ea typeface="SimHei" panose="020B0503020204020204" pitchFamily="49" charset="-122"/>
-            </a:endParaRPr>
-          </a:p>
-          <a:p>
-            <a:pPr algn="ctr"/>
-            <a:r>
-              <a:rPr lang="en-GB" sz="1400" dirty="0">
-                <a:solidFill>
-                  <a:sysClr val="windowText" lastClr="000000"/>
-                </a:solidFill>
-                <a:latin typeface="SimHei" panose="020B0503020204020204" pitchFamily="49" charset="-122"/>
-                <a:ea typeface="SimHei" panose="020B0503020204020204" pitchFamily="49" charset="-122"/>
-              </a:rPr>
-              <a:t>bedtools intersect -c (does overlap) 50nt_exonic_loci.bed</a:t>
-            </a:r>
-            <a:br>
-              <a:rPr lang="en-GB" sz="1400" dirty="0">
-                <a:solidFill>
-                  <a:sysClr val="windowText" lastClr="000000"/>
-                </a:solidFill>
-                <a:latin typeface="SimHei" panose="020B0503020204020204" pitchFamily="49" charset="-122"/>
-                <a:ea typeface="SimHei" panose="020B0503020204020204" pitchFamily="49" charset="-122"/>
-              </a:rPr>
-            </a:br>
-            <a:r>
-              <a:rPr lang="en-GB" sz="1400" dirty="0">
-                <a:solidFill>
-                  <a:sysClr val="windowText" lastClr="000000"/>
-                </a:solidFill>
-                <a:latin typeface="SimHei" panose="020B0503020204020204" pitchFamily="49" charset="-122"/>
-                <a:ea typeface="SimHei" panose="020B0503020204020204" pitchFamily="49" charset="-122"/>
-              </a:rPr>
-              <a:t>== </a:t>
-            </a:r>
-            <a:r>
-              <a:rPr lang="en-GB" sz="1400" dirty="0" err="1">
-                <a:solidFill>
-                  <a:schemeClr val="accent1"/>
-                </a:solidFill>
-                <a:latin typeface="SimHei" panose="020B0503020204020204" pitchFamily="49" charset="-122"/>
-                <a:ea typeface="SimHei" panose="020B0503020204020204" pitchFamily="49" charset="-122"/>
-              </a:rPr>
-              <a:t>exonic.bed</a:t>
-            </a:r>
-            <a:endParaRPr lang="en-US" sz="1400" dirty="0">
-              <a:solidFill>
-                <a:schemeClr val="accent1"/>
-              </a:solidFill>
-              <a:latin typeface="Abadi" panose="020B0604020104020204" pitchFamily="34" charset="0"/>
-            </a:endParaRPr>
-          </a:p>
-          <a:p>
-            <a:pPr algn="ctr"/>
-            <a:endParaRPr lang="en-US" dirty="0">
-              <a:solidFill>
-                <a:sysClr val="windowText" lastClr="000000"/>
-              </a:solidFill>
-              <a:latin typeface="Abadi" panose="020B0604020104020204" pitchFamily="34" charset="0"/>
-            </a:endParaRPr>
-          </a:p>
-        </p:txBody>
-      </p:sp>
-      <p:sp>
-        <p:nvSpPr>
-          <p:cNvPr id="10" name="Rectangle 9">
-            <a:extLst>
-              <a:ext uri="{FF2B5EF4-FFF2-40B4-BE49-F238E27FC236}">
-                <a16:creationId xmlns:a16="http://schemas.microsoft.com/office/drawing/2014/main" id="{7986058C-5F08-E956-A26E-19F8D99BD785}"/>
-              </a:ext>
-            </a:extLst>
-          </p:cNvPr>
-          <p:cNvSpPr/>
-          <p:nvPr/>
-        </p:nvSpPr>
-        <p:spPr>
-          <a:xfrm>
-            <a:off x="2127250" y="7221972"/>
-            <a:ext cx="2603500" cy="393700"/>
-          </a:xfrm>
-          <a:prstGeom prst="rect">
-            <a:avLst/>
-          </a:prstGeom>
-          <a:ln w="19050">
-            <a:solidFill>
-              <a:schemeClr val="tx1"/>
-            </a:solidFill>
-          </a:ln>
-        </p:spPr>
-        <p:style>
-          <a:lnRef idx="2">
-            <a:schemeClr val="accent1"/>
-          </a:lnRef>
-          <a:fillRef idx="1">
-            <a:schemeClr val="lt1"/>
-          </a:fillRef>
-          <a:effectRef idx="0">
-            <a:schemeClr val="accent1"/>
-          </a:effectRef>
-          <a:fontRef idx="minor">
-            <a:schemeClr val="dk1"/>
-          </a:fontRef>
-        </p:style>
-        <p:txBody>
-          <a:bodyPr rtlCol="0" anchor="ctr"/>
-          <a:lstStyle/>
-          <a:p>
-            <a:pPr algn="ctr"/>
-            <a:r>
-              <a:rPr lang="en-US" b="1" dirty="0">
-                <a:latin typeface="Raleway" pitchFamily="2" charset="0"/>
-                <a:cs typeface="Posterama" panose="020B0504020200020000" pitchFamily="34" charset="0"/>
-              </a:rPr>
-              <a:t>Bedtools intersect</a:t>
-            </a:r>
-            <a:endParaRPr lang="en-GB" b="1" dirty="0">
-              <a:latin typeface="Raleway" pitchFamily="2" charset="0"/>
-              <a:cs typeface="Posterama" panose="020B0504020200020000" pitchFamily="34" charset="0"/>
-            </a:endParaRPr>
-          </a:p>
-        </p:txBody>
-      </p:sp>
-      <p:sp>
-        <p:nvSpPr>
-          <p:cNvPr id="21" name="Rectangle 20">
-            <a:extLst>
-              <a:ext uri="{FF2B5EF4-FFF2-40B4-BE49-F238E27FC236}">
-                <a16:creationId xmlns:a16="http://schemas.microsoft.com/office/drawing/2014/main" id="{A78BE0AB-C7A5-4A64-AB8A-3FDFA8307852}"/>
-              </a:ext>
-            </a:extLst>
-          </p:cNvPr>
-          <p:cNvSpPr/>
-          <p:nvPr/>
-        </p:nvSpPr>
-        <p:spPr>
-          <a:xfrm>
-            <a:off x="1847054" y="3227259"/>
-            <a:ext cx="3154360" cy="393700"/>
-          </a:xfrm>
-          <a:prstGeom prst="rect">
-            <a:avLst/>
-          </a:prstGeom>
-          <a:ln w="19050">
-            <a:solidFill>
-              <a:schemeClr val="tx1"/>
-            </a:solidFill>
-          </a:ln>
-        </p:spPr>
-        <p:style>
-          <a:lnRef idx="2">
-            <a:schemeClr val="accent1"/>
-          </a:lnRef>
-          <a:fillRef idx="1">
-            <a:schemeClr val="lt1"/>
-          </a:fillRef>
-          <a:effectRef idx="0">
-            <a:schemeClr val="accent1"/>
-          </a:effectRef>
-          <a:fontRef idx="minor">
-            <a:schemeClr val="dk1"/>
-          </a:fontRef>
-        </p:style>
-        <p:txBody>
-          <a:bodyPr rtlCol="0" anchor="ctr"/>
-          <a:lstStyle/>
-          <a:p>
-            <a:pPr algn="ctr"/>
-            <a:r>
-              <a:rPr lang="en-US" b="1" dirty="0">
-                <a:latin typeface="Raleway" pitchFamily="2" charset="0"/>
-                <a:cs typeface="Posterama" panose="020B0504020200020000" pitchFamily="34" charset="0"/>
-              </a:rPr>
-              <a:t>VAST-DB MAIN-PSI-TABLE</a:t>
-            </a:r>
-            <a:endParaRPr lang="en-GB" b="1" dirty="0">
-              <a:latin typeface="Raleway" pitchFamily="2" charset="0"/>
-              <a:cs typeface="Posterama" panose="020B0504020200020000" pitchFamily="34" charset="0"/>
-            </a:endParaRPr>
-          </a:p>
-        </p:txBody>
-      </p:sp>
-      <p:sp>
-        <p:nvSpPr>
-          <p:cNvPr id="25" name="Rectangle 24">
-            <a:extLst>
-              <a:ext uri="{FF2B5EF4-FFF2-40B4-BE49-F238E27FC236}">
-                <a16:creationId xmlns:a16="http://schemas.microsoft.com/office/drawing/2014/main" id="{0639E164-C200-CA46-95AD-8E6D551016C1}"/>
-              </a:ext>
-            </a:extLst>
-          </p:cNvPr>
-          <p:cNvSpPr/>
-          <p:nvPr/>
-        </p:nvSpPr>
-        <p:spPr>
-          <a:xfrm>
-            <a:off x="114298" y="8522406"/>
-            <a:ext cx="3314702" cy="1488369"/>
-          </a:xfrm>
-          <a:prstGeom prst="rect">
-            <a:avLst/>
-          </a:prstGeom>
-          <a:solidFill>
-            <a:schemeClr val="accent1">
-              <a:lumMod val="40000"/>
-              <a:lumOff val="60000"/>
-            </a:schemeClr>
-          </a:solidFill>
-        </p:spPr>
-        <p:style>
-          <a:lnRef idx="2">
-            <a:schemeClr val="accent1">
-              <a:shade val="15000"/>
-            </a:schemeClr>
-          </a:lnRef>
-          <a:fillRef idx="1">
-            <a:schemeClr val="accent1"/>
-          </a:fillRef>
-          <a:effectRef idx="0">
-            <a:schemeClr val="accent1"/>
-          </a:effectRef>
-          <a:fontRef idx="minor">
-            <a:schemeClr val="lt1"/>
-          </a:fontRef>
-        </p:style>
-        <p:txBody>
-          <a:bodyPr numCol="2" rtlCol="0" anchor="ctr"/>
-          <a:lstStyle/>
-          <a:p>
-            <a:pPr algn="ctr"/>
-            <a:r>
-              <a:rPr lang="en-US" sz="1200" dirty="0">
-                <a:solidFill>
-                  <a:schemeClr val="tx1"/>
-                </a:solidFill>
-                <a:latin typeface="Abadi" panose="020B0604020104020204" pitchFamily="34" charset="0"/>
-              </a:rPr>
-              <a:t>Intersect </a:t>
-            </a:r>
-            <a:r>
-              <a:rPr lang="en-US" sz="1200" dirty="0" err="1">
-                <a:solidFill>
-                  <a:schemeClr val="tx1"/>
-                </a:solidFill>
-                <a:latin typeface="Abadi" panose="020B0604020104020204" pitchFamily="34" charset="0"/>
-              </a:rPr>
-              <a:t>deep_intronic_sites.bed</a:t>
-            </a:r>
-            <a:r>
-              <a:rPr lang="en-US" sz="1200" dirty="0">
-                <a:solidFill>
-                  <a:schemeClr val="tx1"/>
-                </a:solidFill>
-                <a:latin typeface="Abadi" panose="020B0604020104020204" pitchFamily="34" charset="0"/>
-              </a:rPr>
-              <a:t> </a:t>
-            </a:r>
-            <a:br>
-              <a:rPr lang="en-US" sz="1200" dirty="0">
-                <a:solidFill>
-                  <a:schemeClr val="accent1"/>
-                </a:solidFill>
-                <a:latin typeface="Abadi" panose="020B0604020104020204" pitchFamily="34" charset="0"/>
-              </a:rPr>
-            </a:br>
-            <a:r>
-              <a:rPr lang="en-US" sz="1200" dirty="0" err="1">
-                <a:solidFill>
-                  <a:schemeClr val="accent1"/>
-                </a:solidFill>
-                <a:latin typeface="Abadi" panose="020B0604020104020204" pitchFamily="34" charset="0"/>
-              </a:rPr>
-              <a:t>RBPnet</a:t>
-            </a:r>
-            <a:r>
-              <a:rPr lang="en-US" sz="1200" dirty="0">
-                <a:solidFill>
-                  <a:schemeClr val="accent1"/>
-                </a:solidFill>
-                <a:latin typeface="Abadi" panose="020B0604020104020204" pitchFamily="34" charset="0"/>
-              </a:rPr>
-              <a:t> PRPF8 predictions </a:t>
-            </a:r>
-          </a:p>
-          <a:p>
-            <a:pPr algn="ctr"/>
-            <a:r>
-              <a:rPr lang="en-US" sz="1200" dirty="0">
-                <a:solidFill>
-                  <a:schemeClr val="tx1"/>
-                </a:solidFill>
-                <a:latin typeface="Abadi" panose="020B0604020104020204" pitchFamily="34" charset="0"/>
-              </a:rPr>
-              <a:t>and/or </a:t>
-            </a:r>
-            <a:r>
-              <a:rPr lang="en-US" sz="1200" dirty="0">
-                <a:solidFill>
-                  <a:schemeClr val="accent1"/>
-                </a:solidFill>
-                <a:latin typeface="Abadi" panose="020B0604020104020204" pitchFamily="34" charset="0"/>
-              </a:rPr>
-              <a:t>PRPF8 Peaks </a:t>
-            </a:r>
-          </a:p>
-          <a:p>
-            <a:pPr algn="ctr"/>
-            <a:r>
-              <a:rPr lang="en-US" sz="1200" dirty="0">
-                <a:solidFill>
-                  <a:schemeClr val="tx1"/>
-                </a:solidFill>
-                <a:latin typeface="Abadi" panose="020B0604020104020204" pitchFamily="34" charset="0"/>
-              </a:rPr>
-              <a:t>and/or </a:t>
-            </a:r>
-            <a:r>
-              <a:rPr lang="en-US" sz="1200" dirty="0" err="1">
-                <a:solidFill>
-                  <a:schemeClr val="accent1"/>
-                </a:solidFill>
-                <a:latin typeface="Abadi" panose="020B0604020104020204" pitchFamily="34" charset="0"/>
-              </a:rPr>
-              <a:t>SmB</a:t>
-            </a:r>
-            <a:r>
-              <a:rPr lang="en-US" sz="1200" dirty="0">
-                <a:solidFill>
-                  <a:schemeClr val="accent1"/>
-                </a:solidFill>
-                <a:latin typeface="Abadi" panose="020B0604020104020204" pitchFamily="34" charset="0"/>
-              </a:rPr>
-              <a:t> Peaks</a:t>
-            </a:r>
-          </a:p>
-          <a:p>
-            <a:pPr algn="ctr"/>
-            <a:r>
-              <a:rPr lang="en-US" sz="1200" dirty="0">
-                <a:solidFill>
-                  <a:schemeClr val="tx1"/>
-                </a:solidFill>
-                <a:latin typeface="Abadi" panose="020B0604020104020204" pitchFamily="34" charset="0"/>
-              </a:rPr>
-              <a:t>== </a:t>
-            </a:r>
-            <a:r>
-              <a:rPr lang="en-US" sz="1200" dirty="0" err="1">
-                <a:solidFill>
-                  <a:schemeClr val="tx1"/>
-                </a:solidFill>
-                <a:latin typeface="Abadi" panose="020B0604020104020204" pitchFamily="34" charset="0"/>
-              </a:rPr>
-              <a:t>decoys.bed</a:t>
-            </a:r>
-            <a:br>
-              <a:rPr lang="en-US" sz="1200" dirty="0">
-                <a:solidFill>
-                  <a:schemeClr val="tx1"/>
-                </a:solidFill>
-                <a:latin typeface="Abadi" panose="020B0604020104020204" pitchFamily="34" charset="0"/>
-              </a:rPr>
-            </a:br>
-            <a:r>
-              <a:rPr lang="en-US" sz="1200" dirty="0">
-                <a:solidFill>
-                  <a:schemeClr val="tx1"/>
-                </a:solidFill>
-                <a:latin typeface="Abadi" panose="020B0604020104020204" pitchFamily="34" charset="0"/>
-              </a:rPr>
-              <a:t>Intersect </a:t>
-            </a:r>
-            <a:r>
-              <a:rPr lang="en-US" sz="1200" dirty="0" err="1">
-                <a:solidFill>
-                  <a:schemeClr val="tx1"/>
-                </a:solidFill>
-                <a:latin typeface="Abadi" panose="020B0604020104020204" pitchFamily="34" charset="0"/>
-              </a:rPr>
-              <a:t>deep_intronic_sites.bed</a:t>
-            </a:r>
-            <a:br>
-              <a:rPr lang="en-US" sz="1200" dirty="0">
-                <a:solidFill>
-                  <a:schemeClr val="tx1"/>
-                </a:solidFill>
-                <a:latin typeface="Abadi" panose="020B0604020104020204" pitchFamily="34" charset="0"/>
-              </a:rPr>
-            </a:br>
-            <a:r>
-              <a:rPr lang="en-US" sz="1200" dirty="0">
-                <a:solidFill>
-                  <a:schemeClr val="tx1"/>
-                </a:solidFill>
-                <a:latin typeface="Abadi" panose="020B0604020104020204" pitchFamily="34" charset="0"/>
-              </a:rPr>
-              <a:t>None of </a:t>
-            </a:r>
-            <a:r>
-              <a:rPr lang="en-US" sz="1200" dirty="0" err="1">
-                <a:solidFill>
-                  <a:schemeClr val="accent1"/>
-                </a:solidFill>
-                <a:latin typeface="Abadi" panose="020B0604020104020204" pitchFamily="34" charset="0"/>
-              </a:rPr>
-              <a:t>RBPnet</a:t>
-            </a:r>
-            <a:r>
-              <a:rPr lang="en-US" sz="1200" dirty="0">
-                <a:solidFill>
-                  <a:schemeClr val="accent1"/>
-                </a:solidFill>
-                <a:latin typeface="Abadi" panose="020B0604020104020204" pitchFamily="34" charset="0"/>
-              </a:rPr>
-              <a:t> PRPF8 predictions </a:t>
-            </a:r>
-          </a:p>
-          <a:p>
-            <a:pPr algn="ctr"/>
-            <a:r>
-              <a:rPr lang="en-US" sz="1200" dirty="0">
-                <a:solidFill>
-                  <a:schemeClr val="tx1"/>
-                </a:solidFill>
-                <a:latin typeface="Abadi" panose="020B0604020104020204" pitchFamily="34" charset="0"/>
-              </a:rPr>
-              <a:t>or </a:t>
-            </a:r>
-            <a:r>
-              <a:rPr lang="en-US" sz="1200" dirty="0">
-                <a:solidFill>
-                  <a:schemeClr val="accent1"/>
-                </a:solidFill>
-                <a:latin typeface="Abadi" panose="020B0604020104020204" pitchFamily="34" charset="0"/>
-              </a:rPr>
-              <a:t>PRPF8 Peaks </a:t>
-            </a:r>
-          </a:p>
-          <a:p>
-            <a:pPr algn="ctr"/>
-            <a:r>
-              <a:rPr lang="en-US" sz="1200" dirty="0">
-                <a:solidFill>
-                  <a:schemeClr val="tx1"/>
-                </a:solidFill>
-                <a:latin typeface="Abadi" panose="020B0604020104020204" pitchFamily="34" charset="0"/>
-              </a:rPr>
-              <a:t>or </a:t>
-            </a:r>
-            <a:r>
-              <a:rPr lang="en-US" sz="1200" dirty="0" err="1">
-                <a:solidFill>
-                  <a:schemeClr val="accent1"/>
-                </a:solidFill>
-                <a:latin typeface="Abadi" panose="020B0604020104020204" pitchFamily="34" charset="0"/>
-              </a:rPr>
-              <a:t>SmB</a:t>
-            </a:r>
-            <a:r>
-              <a:rPr lang="en-US" sz="1200" dirty="0">
-                <a:solidFill>
-                  <a:schemeClr val="accent1"/>
-                </a:solidFill>
-                <a:latin typeface="Abadi" panose="020B0604020104020204" pitchFamily="34" charset="0"/>
-              </a:rPr>
-              <a:t> Peaks</a:t>
-            </a:r>
-          </a:p>
-          <a:p>
-            <a:pPr algn="ctr"/>
-            <a:r>
-              <a:rPr lang="en-US" sz="1200" dirty="0">
-                <a:solidFill>
-                  <a:schemeClr val="tx1"/>
-                </a:solidFill>
-                <a:latin typeface="Abadi" panose="020B0604020104020204" pitchFamily="34" charset="0"/>
-              </a:rPr>
-              <a:t>== </a:t>
-            </a:r>
-            <a:r>
-              <a:rPr lang="en-US" sz="1200" dirty="0" err="1">
-                <a:solidFill>
-                  <a:schemeClr val="tx1"/>
-                </a:solidFill>
-                <a:latin typeface="Abadi" panose="020B0604020104020204" pitchFamily="34" charset="0"/>
-              </a:rPr>
-              <a:t>cryptic_sites.bed</a:t>
-            </a:r>
-            <a:endParaRPr lang="en-US" sz="1200" dirty="0">
-              <a:solidFill>
-                <a:schemeClr val="tx1"/>
-              </a:solidFill>
-              <a:latin typeface="Abadi" panose="020B0604020104020204" pitchFamily="34" charset="0"/>
-            </a:endParaRPr>
-          </a:p>
-        </p:txBody>
-      </p:sp>
-      <p:sp>
-        <p:nvSpPr>
-          <p:cNvPr id="28" name="Rectangle 27">
-            <a:extLst>
-              <a:ext uri="{FF2B5EF4-FFF2-40B4-BE49-F238E27FC236}">
-                <a16:creationId xmlns:a16="http://schemas.microsoft.com/office/drawing/2014/main" id="{8E9C454C-497A-EEF9-9806-1AD272B5DBF2}"/>
-              </a:ext>
-            </a:extLst>
-          </p:cNvPr>
-          <p:cNvSpPr/>
-          <p:nvPr/>
-        </p:nvSpPr>
-        <p:spPr>
-          <a:xfrm>
-            <a:off x="4051997" y="8656821"/>
-            <a:ext cx="2346918" cy="909119"/>
-          </a:xfrm>
-          <a:prstGeom prst="rect">
-            <a:avLst/>
-          </a:prstGeom>
-          <a:solidFill>
-            <a:schemeClr val="accent1">
-              <a:lumMod val="40000"/>
-              <a:lumOff val="60000"/>
-            </a:schemeClr>
-          </a:solidFill>
-        </p:spPr>
-        <p:style>
-          <a:lnRef idx="2">
-            <a:schemeClr val="accent1">
-              <a:shade val="15000"/>
-            </a:schemeClr>
-          </a:lnRef>
-          <a:fillRef idx="1">
-            <a:schemeClr val="accent1"/>
-          </a:fillRef>
-          <a:effectRef idx="0">
-            <a:schemeClr val="accent1"/>
-          </a:effectRef>
-          <a:fontRef idx="minor">
-            <a:schemeClr val="lt1"/>
-          </a:fontRef>
-        </p:style>
-        <p:txBody>
-          <a:bodyPr numCol="1" rtlCol="0" anchor="ctr"/>
-          <a:lstStyle/>
-          <a:p>
-            <a:pPr algn="ctr"/>
-            <a:r>
-              <a:rPr lang="en-US" sz="1200" dirty="0">
-                <a:solidFill>
-                  <a:schemeClr val="tx1"/>
-                </a:solidFill>
-                <a:latin typeface="Abadi" panose="020B0604020104020204" pitchFamily="34" charset="0"/>
-              </a:rPr>
-              <a:t>Intersect </a:t>
-            </a:r>
-            <a:r>
-              <a:rPr lang="en-US" sz="1200" dirty="0" err="1">
-                <a:solidFill>
-                  <a:schemeClr val="tx1"/>
-                </a:solidFill>
-                <a:latin typeface="Abadi" panose="020B0604020104020204" pitchFamily="34" charset="0"/>
-              </a:rPr>
-              <a:t>exonic.bed</a:t>
-            </a:r>
-            <a:r>
-              <a:rPr lang="en-US" sz="1200" dirty="0">
-                <a:solidFill>
-                  <a:schemeClr val="tx1"/>
-                </a:solidFill>
-                <a:latin typeface="Abadi" panose="020B0604020104020204" pitchFamily="34" charset="0"/>
-              </a:rPr>
-              <a:t> -v</a:t>
-            </a:r>
-            <a:br>
-              <a:rPr lang="en-US" sz="1200" dirty="0">
-                <a:solidFill>
-                  <a:schemeClr val="accent1"/>
-                </a:solidFill>
-                <a:latin typeface="Abadi" panose="020B0604020104020204" pitchFamily="34" charset="0"/>
-              </a:rPr>
-            </a:br>
-            <a:r>
-              <a:rPr lang="en-US" sz="1200" dirty="0" err="1">
-                <a:solidFill>
-                  <a:schemeClr val="accent1"/>
-                </a:solidFill>
-                <a:latin typeface="Abadi" panose="020B0604020104020204" pitchFamily="34" charset="0"/>
-              </a:rPr>
-              <a:t>canonical_splice_sites.bed</a:t>
-            </a:r>
-            <a:endParaRPr lang="en-US" sz="1200" dirty="0">
-              <a:solidFill>
-                <a:schemeClr val="accent1"/>
-              </a:solidFill>
-              <a:latin typeface="Abadi" panose="020B0604020104020204" pitchFamily="34" charset="0"/>
-            </a:endParaRPr>
-          </a:p>
-          <a:p>
-            <a:pPr algn="ctr"/>
-            <a:r>
-              <a:rPr lang="en-US" sz="1200" dirty="0">
-                <a:solidFill>
-                  <a:schemeClr val="tx1"/>
-                </a:solidFill>
-                <a:latin typeface="Abadi" panose="020B0604020104020204" pitchFamily="34" charset="0"/>
-              </a:rPr>
-              <a:t>== alt5_splice_sites.bed</a:t>
-            </a:r>
-          </a:p>
-        </p:txBody>
-      </p:sp>
-      <p:sp>
-        <p:nvSpPr>
-          <p:cNvPr id="30" name="Rectangle 29">
-            <a:extLst>
-              <a:ext uri="{FF2B5EF4-FFF2-40B4-BE49-F238E27FC236}">
-                <a16:creationId xmlns:a16="http://schemas.microsoft.com/office/drawing/2014/main" id="{BBCDD2FF-01BE-CB9E-D112-F3133CBDA1A6}"/>
-              </a:ext>
-            </a:extLst>
-          </p:cNvPr>
-          <p:cNvSpPr/>
-          <p:nvPr/>
-        </p:nvSpPr>
-        <p:spPr>
-          <a:xfrm>
-            <a:off x="114297" y="10167597"/>
-            <a:ext cx="3879434" cy="1778964"/>
-          </a:xfrm>
-          <a:prstGeom prst="rect">
-            <a:avLst/>
-          </a:prstGeom>
-          <a:solidFill>
-            <a:schemeClr val="accent1">
-              <a:lumMod val="40000"/>
-              <a:lumOff val="60000"/>
-            </a:schemeClr>
-          </a:solidFill>
-        </p:spPr>
-        <p:style>
-          <a:lnRef idx="2">
-            <a:schemeClr val="accent1">
-              <a:shade val="15000"/>
-            </a:schemeClr>
-          </a:lnRef>
-          <a:fillRef idx="1">
-            <a:schemeClr val="accent1"/>
-          </a:fillRef>
-          <a:effectRef idx="0">
-            <a:schemeClr val="accent1"/>
-          </a:effectRef>
-          <a:fontRef idx="minor">
-            <a:schemeClr val="lt1"/>
-          </a:fontRef>
-        </p:style>
-        <p:txBody>
-          <a:bodyPr numCol="1" rtlCol="0" anchor="ctr"/>
-          <a:lstStyle/>
-          <a:p>
-            <a:pPr algn="ctr"/>
-            <a:r>
-              <a:rPr lang="en-US" sz="1200" dirty="0">
-                <a:solidFill>
-                  <a:schemeClr val="tx1"/>
-                </a:solidFill>
-                <a:latin typeface="Abadi" panose="020B0604020104020204" pitchFamily="34" charset="0"/>
-              </a:rPr>
-              <a:t>Create new dataset, intersect </a:t>
-            </a:r>
-            <a:r>
-              <a:rPr lang="en-US" sz="1200" dirty="0" err="1">
-                <a:solidFill>
-                  <a:schemeClr val="tx1"/>
-                </a:solidFill>
-                <a:latin typeface="Abadi" panose="020B0604020104020204" pitchFamily="34" charset="0"/>
-              </a:rPr>
-              <a:t>Canonical_splice_sites.bed</a:t>
-            </a:r>
-            <a:endParaRPr lang="en-US" sz="1200" dirty="0">
-              <a:solidFill>
-                <a:schemeClr val="tx1"/>
-              </a:solidFill>
-              <a:latin typeface="Abadi" panose="020B0604020104020204" pitchFamily="34" charset="0"/>
-            </a:endParaRPr>
-          </a:p>
-          <a:p>
-            <a:pPr algn="ctr"/>
-            <a:r>
-              <a:rPr lang="en-US" sz="1200" dirty="0" err="1">
-                <a:solidFill>
-                  <a:schemeClr val="accent1"/>
-                </a:solidFill>
-                <a:latin typeface="Abadi" panose="020B0604020104020204" pitchFamily="34" charset="0"/>
-              </a:rPr>
-              <a:t>RBPnet</a:t>
-            </a:r>
-            <a:r>
-              <a:rPr lang="en-US" sz="1200" dirty="0">
-                <a:solidFill>
-                  <a:schemeClr val="accent1"/>
-                </a:solidFill>
-                <a:latin typeface="Abadi" panose="020B0604020104020204" pitchFamily="34" charset="0"/>
-              </a:rPr>
-              <a:t> PRPF8 predictions </a:t>
-            </a:r>
-          </a:p>
-          <a:p>
-            <a:pPr algn="ctr"/>
-            <a:r>
-              <a:rPr lang="en-US" sz="1200" dirty="0">
-                <a:solidFill>
-                  <a:schemeClr val="tx1"/>
-                </a:solidFill>
-                <a:latin typeface="Abadi" panose="020B0604020104020204" pitchFamily="34" charset="0"/>
-              </a:rPr>
-              <a:t>and/or </a:t>
-            </a:r>
-            <a:r>
-              <a:rPr lang="en-US" sz="1200" dirty="0">
-                <a:solidFill>
-                  <a:schemeClr val="accent1"/>
-                </a:solidFill>
-                <a:latin typeface="Abadi" panose="020B0604020104020204" pitchFamily="34" charset="0"/>
-              </a:rPr>
-              <a:t>PRPF8 Peaks </a:t>
-            </a:r>
-          </a:p>
-          <a:p>
-            <a:pPr algn="ctr"/>
-            <a:r>
-              <a:rPr lang="en-US" sz="1200" dirty="0">
-                <a:solidFill>
-                  <a:schemeClr val="tx1"/>
-                </a:solidFill>
-                <a:latin typeface="Abadi" panose="020B0604020104020204" pitchFamily="34" charset="0"/>
-              </a:rPr>
-              <a:t>and/or </a:t>
-            </a:r>
-            <a:r>
-              <a:rPr lang="en-US" sz="1200" dirty="0" err="1">
-                <a:solidFill>
-                  <a:schemeClr val="accent1"/>
-                </a:solidFill>
-                <a:latin typeface="Abadi" panose="020B0604020104020204" pitchFamily="34" charset="0"/>
-              </a:rPr>
-              <a:t>SmB</a:t>
-            </a:r>
-            <a:r>
-              <a:rPr lang="en-US" sz="1200" dirty="0">
-                <a:solidFill>
-                  <a:schemeClr val="accent1"/>
-                </a:solidFill>
-                <a:latin typeface="Abadi" panose="020B0604020104020204" pitchFamily="34" charset="0"/>
-              </a:rPr>
-              <a:t> Peaks</a:t>
-            </a:r>
-          </a:p>
-          <a:p>
-            <a:pPr algn="ctr"/>
-            <a:br>
-              <a:rPr lang="en-US" sz="1200" dirty="0">
-                <a:solidFill>
-                  <a:schemeClr val="tx1"/>
-                </a:solidFill>
-                <a:latin typeface="Abadi" panose="020B0604020104020204" pitchFamily="34" charset="0"/>
-              </a:rPr>
-            </a:br>
-            <a:r>
-              <a:rPr lang="en-US" sz="1200" dirty="0">
-                <a:solidFill>
-                  <a:schemeClr val="tx1"/>
-                </a:solidFill>
-                <a:latin typeface="Abadi" panose="020B0604020104020204" pitchFamily="34" charset="0"/>
-              </a:rPr>
-              <a:t>Build overlap with introns and </a:t>
-            </a:r>
-            <a:r>
-              <a:rPr lang="en-US" sz="1200" dirty="0" err="1">
-                <a:solidFill>
-                  <a:schemeClr val="tx1"/>
-                </a:solidFill>
-                <a:latin typeface="Abadi" panose="020B0604020104020204" pitchFamily="34" charset="0"/>
-              </a:rPr>
-              <a:t>GRanges</a:t>
-            </a:r>
-            <a:r>
-              <a:rPr lang="en-US" sz="1200" dirty="0">
-                <a:solidFill>
-                  <a:schemeClr val="tx1"/>
-                </a:solidFill>
-                <a:latin typeface="Abadi" panose="020B0604020104020204" pitchFamily="34" charset="0"/>
-              </a:rPr>
-              <a:t> for </a:t>
-            </a:r>
-            <a:r>
-              <a:rPr lang="en-US" sz="1200" dirty="0" err="1">
-                <a:solidFill>
-                  <a:schemeClr val="tx1"/>
-                </a:solidFill>
-                <a:latin typeface="Abadi" panose="020B0604020104020204" pitchFamily="34" charset="0"/>
-              </a:rPr>
-              <a:t>cryptic_sites.bed</a:t>
-            </a:r>
-            <a:r>
-              <a:rPr lang="en-US" sz="1200" dirty="0">
-                <a:solidFill>
-                  <a:schemeClr val="tx1"/>
-                </a:solidFill>
-                <a:latin typeface="Abadi" panose="020B0604020104020204" pitchFamily="34" charset="0"/>
-              </a:rPr>
-              <a:t> </a:t>
-            </a:r>
-            <a:br>
-              <a:rPr lang="en-US" sz="1200" dirty="0">
-                <a:solidFill>
-                  <a:schemeClr val="accent1"/>
-                </a:solidFill>
-                <a:latin typeface="Abadi" panose="020B0604020104020204" pitchFamily="34" charset="0"/>
-              </a:rPr>
-            </a:br>
-            <a:r>
-              <a:rPr lang="en-US" sz="1200" dirty="0">
-                <a:solidFill>
-                  <a:schemeClr val="tx1">
-                    <a:lumMod val="95000"/>
-                    <a:lumOff val="5000"/>
-                  </a:schemeClr>
-                </a:solidFill>
-                <a:latin typeface="Abadi" panose="020B0604020104020204" pitchFamily="34" charset="0"/>
-              </a:rPr>
-              <a:t>with</a:t>
-            </a:r>
-            <a:r>
-              <a:rPr lang="en-US" sz="1200" dirty="0">
-                <a:solidFill>
-                  <a:schemeClr val="accent1"/>
-                </a:solidFill>
-                <a:latin typeface="Abadi" panose="020B0604020104020204" pitchFamily="34" charset="0"/>
-              </a:rPr>
-              <a:t> </a:t>
-            </a:r>
-            <a:r>
-              <a:rPr lang="en-US" sz="1200" dirty="0" err="1">
-                <a:solidFill>
-                  <a:schemeClr val="accent1"/>
-                </a:solidFill>
-                <a:latin typeface="Abadi" panose="020B0604020104020204" pitchFamily="34" charset="0"/>
-              </a:rPr>
-              <a:t>canonical_supported_sites.bed</a:t>
-            </a:r>
-            <a:endParaRPr lang="en-US" sz="1200" dirty="0">
-              <a:solidFill>
-                <a:schemeClr val="accent1"/>
-              </a:solidFill>
-              <a:latin typeface="Abadi" panose="020B0604020104020204" pitchFamily="34" charset="0"/>
-            </a:endParaRPr>
-          </a:p>
-          <a:p>
-            <a:pPr algn="ctr"/>
-            <a:r>
-              <a:rPr lang="en-US" sz="1200" dirty="0">
-                <a:solidFill>
-                  <a:schemeClr val="accent1"/>
-                </a:solidFill>
-                <a:latin typeface="Abadi" panose="020B0604020104020204" pitchFamily="34" charset="0"/>
-              </a:rPr>
-              <a:t>== </a:t>
-            </a:r>
-            <a:r>
-              <a:rPr lang="en-US" sz="1200" dirty="0" err="1">
-                <a:solidFill>
-                  <a:schemeClr val="accent1"/>
-                </a:solidFill>
-                <a:latin typeface="Abadi" panose="020B0604020104020204" pitchFamily="34" charset="0"/>
-              </a:rPr>
-              <a:t>cryptics_supported.bed</a:t>
-            </a:r>
-            <a:endParaRPr lang="en-US" sz="1200" dirty="0">
-              <a:solidFill>
-                <a:schemeClr val="accent1"/>
-              </a:solidFill>
-              <a:latin typeface="Abadi" panose="020B0604020104020204" pitchFamily="34" charset="0"/>
-            </a:endParaRPr>
-          </a:p>
-        </p:txBody>
-      </p:sp>
-      <p:cxnSp>
-        <p:nvCxnSpPr>
-          <p:cNvPr id="32" name="Connector: Curved 31">
-            <a:extLst>
-              <a:ext uri="{FF2B5EF4-FFF2-40B4-BE49-F238E27FC236}">
-                <a16:creationId xmlns:a16="http://schemas.microsoft.com/office/drawing/2014/main" id="{0F39E967-6144-B1AE-9CD6-F5523B6FE432}"/>
-              </a:ext>
-            </a:extLst>
-          </p:cNvPr>
-          <p:cNvCxnSpPr>
-            <a:cxnSpLocks/>
-          </p:cNvCxnSpPr>
-          <p:nvPr/>
-        </p:nvCxnSpPr>
-        <p:spPr>
-          <a:xfrm rot="16200000" flipH="1">
-            <a:off x="2441276" y="10369849"/>
-            <a:ext cx="1209679" cy="491531"/>
-          </a:xfrm>
-          <a:prstGeom prst="curvedConnector3">
-            <a:avLst>
-              <a:gd name="adj1" fmla="val 50000"/>
-            </a:avLst>
-          </a:prstGeom>
-          <a:ln>
-            <a:tailEnd type="triangle"/>
-          </a:ln>
-        </p:spPr>
-        <p:style>
-          <a:lnRef idx="3">
-            <a:schemeClr val="accent1"/>
-          </a:lnRef>
-          <a:fillRef idx="0">
-            <a:schemeClr val="accent1"/>
-          </a:fillRef>
-          <a:effectRef idx="2">
-            <a:schemeClr val="accent1"/>
-          </a:effectRef>
-          <a:fontRef idx="minor">
-            <a:schemeClr val="tx1"/>
-          </a:fontRef>
-        </p:style>
-      </p:cxnSp>
-      <p:cxnSp>
-        <p:nvCxnSpPr>
-          <p:cNvPr id="40" name="Straight Arrow Connector 39">
-            <a:extLst>
-              <a:ext uri="{FF2B5EF4-FFF2-40B4-BE49-F238E27FC236}">
-                <a16:creationId xmlns:a16="http://schemas.microsoft.com/office/drawing/2014/main" id="{4F7900BE-0022-626E-D64B-2254BD0F9118}"/>
-              </a:ext>
-            </a:extLst>
-          </p:cNvPr>
-          <p:cNvCxnSpPr>
-            <a:cxnSpLocks/>
-          </p:cNvCxnSpPr>
-          <p:nvPr/>
-        </p:nvCxnSpPr>
-        <p:spPr>
-          <a:xfrm>
-            <a:off x="1771649" y="8334375"/>
-            <a:ext cx="0" cy="349301"/>
-          </a:xfrm>
-          <a:prstGeom prst="straightConnector1">
-            <a:avLst/>
-          </a:prstGeom>
-          <a:ln>
-            <a:tailEnd type="triangle"/>
-          </a:ln>
-        </p:spPr>
-        <p:style>
-          <a:lnRef idx="3">
-            <a:schemeClr val="accent1"/>
-          </a:lnRef>
-          <a:fillRef idx="0">
-            <a:schemeClr val="accent1"/>
-          </a:fillRef>
-          <a:effectRef idx="2">
-            <a:schemeClr val="accent1"/>
-          </a:effectRef>
-          <a:fontRef idx="minor">
-            <a:schemeClr val="tx1"/>
-          </a:fontRef>
-        </p:style>
-      </p:cxnSp>
-      <p:cxnSp>
-        <p:nvCxnSpPr>
-          <p:cNvPr id="42" name="Straight Arrow Connector 41">
-            <a:extLst>
-              <a:ext uri="{FF2B5EF4-FFF2-40B4-BE49-F238E27FC236}">
-                <a16:creationId xmlns:a16="http://schemas.microsoft.com/office/drawing/2014/main" id="{DADC1EF0-6792-562E-8FCC-7100A09C72A9}"/>
-              </a:ext>
-            </a:extLst>
-          </p:cNvPr>
-          <p:cNvCxnSpPr>
-            <a:cxnSpLocks/>
-          </p:cNvCxnSpPr>
-          <p:nvPr/>
-        </p:nvCxnSpPr>
-        <p:spPr>
-          <a:xfrm flipH="1">
-            <a:off x="5225456" y="8334375"/>
-            <a:ext cx="9526" cy="313747"/>
-          </a:xfrm>
-          <a:prstGeom prst="straightConnector1">
-            <a:avLst/>
-          </a:prstGeom>
-          <a:ln>
-            <a:tailEnd type="triangle"/>
-          </a:ln>
-        </p:spPr>
-        <p:style>
-          <a:lnRef idx="3">
-            <a:schemeClr val="accent1"/>
-          </a:lnRef>
-          <a:fillRef idx="0">
-            <a:schemeClr val="accent1"/>
-          </a:fillRef>
-          <a:effectRef idx="2">
-            <a:schemeClr val="accent1"/>
-          </a:effectRef>
-          <a:fontRef idx="minor">
-            <a:schemeClr val="tx1"/>
-          </a:fontRef>
-        </p:style>
-      </p:cxnSp>
-      <p:sp>
-        <p:nvSpPr>
-          <p:cNvPr id="44" name="Rectangle 43">
-            <a:extLst>
-              <a:ext uri="{FF2B5EF4-FFF2-40B4-BE49-F238E27FC236}">
-                <a16:creationId xmlns:a16="http://schemas.microsoft.com/office/drawing/2014/main" id="{18BC3F71-301D-B74D-8E87-3247AB52F4BF}"/>
-              </a:ext>
-            </a:extLst>
-          </p:cNvPr>
-          <p:cNvSpPr/>
-          <p:nvPr/>
-        </p:nvSpPr>
-        <p:spPr>
-          <a:xfrm>
-            <a:off x="4332865" y="10147960"/>
-            <a:ext cx="2346918" cy="1778964"/>
-          </a:xfrm>
-          <a:prstGeom prst="rect">
-            <a:avLst/>
-          </a:prstGeom>
-          <a:solidFill>
-            <a:schemeClr val="accent1">
-              <a:lumMod val="40000"/>
-              <a:lumOff val="60000"/>
-            </a:schemeClr>
-          </a:solidFill>
-        </p:spPr>
-        <p:style>
-          <a:lnRef idx="2">
-            <a:schemeClr val="accent1">
-              <a:shade val="15000"/>
-            </a:schemeClr>
-          </a:lnRef>
-          <a:fillRef idx="1">
-            <a:schemeClr val="accent1"/>
-          </a:fillRef>
-          <a:effectRef idx="0">
-            <a:schemeClr val="accent1"/>
-          </a:effectRef>
-          <a:fontRef idx="minor">
-            <a:schemeClr val="lt1"/>
-          </a:fontRef>
-        </p:style>
-        <p:txBody>
-          <a:bodyPr numCol="1" rtlCol="0" anchor="ctr"/>
-          <a:lstStyle/>
-          <a:p>
-            <a:pPr algn="ctr"/>
-            <a:r>
-              <a:rPr lang="en-US" sz="1200" dirty="0">
-                <a:solidFill>
-                  <a:schemeClr val="tx1"/>
-                </a:solidFill>
-                <a:latin typeface="Abadi" panose="020B0604020104020204" pitchFamily="34" charset="0"/>
-              </a:rPr>
-              <a:t>FOUR FINAL DATASETS</a:t>
-            </a:r>
-          </a:p>
-          <a:p>
-            <a:pPr algn="ctr"/>
-            <a:endParaRPr lang="en-US" sz="1200" dirty="0">
-              <a:solidFill>
-                <a:schemeClr val="tx1"/>
-              </a:solidFill>
-              <a:latin typeface="Abadi" panose="020B0604020104020204" pitchFamily="34" charset="0"/>
-            </a:endParaRPr>
-          </a:p>
-          <a:p>
-            <a:pPr marL="228600" indent="-228600">
-              <a:buFont typeface="+mj-lt"/>
-              <a:buAutoNum type="arabicPeriod"/>
-            </a:pPr>
-            <a:r>
-              <a:rPr lang="en-US" sz="1200" dirty="0" err="1">
-                <a:solidFill>
-                  <a:schemeClr val="tx1"/>
-                </a:solidFill>
-                <a:latin typeface="Abadi" panose="020B0604020104020204" pitchFamily="34" charset="0"/>
-              </a:rPr>
-              <a:t>Canonical_splice_sites.bed</a:t>
-            </a:r>
-            <a:endParaRPr lang="en-US" sz="1200" dirty="0">
-              <a:solidFill>
-                <a:schemeClr val="tx1"/>
-              </a:solidFill>
-              <a:latin typeface="Abadi" panose="020B0604020104020204" pitchFamily="34" charset="0"/>
-            </a:endParaRPr>
-          </a:p>
-          <a:p>
-            <a:pPr marL="228600" indent="-228600">
-              <a:buFont typeface="+mj-lt"/>
-              <a:buAutoNum type="arabicPeriod"/>
-            </a:pPr>
-            <a:r>
-              <a:rPr lang="en-US" sz="1200" dirty="0">
-                <a:solidFill>
-                  <a:schemeClr val="tx1"/>
-                </a:solidFill>
-                <a:latin typeface="Abadi" panose="020B0604020104020204" pitchFamily="34" charset="0"/>
-              </a:rPr>
-              <a:t>Alt5_splice_sites.bed</a:t>
-            </a:r>
-          </a:p>
-          <a:p>
-            <a:pPr marL="228600" indent="-228600">
-              <a:buFont typeface="+mj-lt"/>
-              <a:buAutoNum type="arabicPeriod"/>
-            </a:pPr>
-            <a:r>
-              <a:rPr lang="en-US" sz="1200" dirty="0" err="1">
-                <a:solidFill>
-                  <a:schemeClr val="tx1"/>
-                </a:solidFill>
-                <a:latin typeface="Abadi" panose="020B0604020104020204" pitchFamily="34" charset="0"/>
-              </a:rPr>
-              <a:t>Decoys.bed</a:t>
-            </a:r>
-            <a:endParaRPr lang="en-US" sz="1200" dirty="0">
-              <a:solidFill>
-                <a:schemeClr val="tx1"/>
-              </a:solidFill>
-              <a:latin typeface="Abadi" panose="020B0604020104020204" pitchFamily="34" charset="0"/>
-            </a:endParaRPr>
-          </a:p>
-          <a:p>
-            <a:pPr marL="228600" indent="-228600">
-              <a:buFont typeface="+mj-lt"/>
-              <a:buAutoNum type="arabicPeriod"/>
-            </a:pPr>
-            <a:r>
-              <a:rPr lang="en-US" sz="1200" dirty="0" err="1">
-                <a:solidFill>
-                  <a:schemeClr val="tx1"/>
-                </a:solidFill>
-                <a:latin typeface="Abadi" panose="020B0604020104020204" pitchFamily="34" charset="0"/>
-              </a:rPr>
-              <a:t>Cryptics_supported.bed</a:t>
-            </a:r>
-            <a:endParaRPr lang="en-US" sz="1200" dirty="0">
-              <a:solidFill>
-                <a:schemeClr val="tx1"/>
-              </a:solidFill>
-              <a:latin typeface="Abadi" panose="020B0604020104020204" pitchFamily="34" charset="0"/>
-            </a:endParaRPr>
-          </a:p>
-        </p:txBody>
-      </p:sp>
-      <p:sp>
-        <p:nvSpPr>
-          <p:cNvPr id="46" name="Rectangle 45">
-            <a:extLst>
-              <a:ext uri="{FF2B5EF4-FFF2-40B4-BE49-F238E27FC236}">
-                <a16:creationId xmlns:a16="http://schemas.microsoft.com/office/drawing/2014/main" id="{D0EBDD17-E857-FAD9-ECF4-2CDFD6B87B2B}"/>
-              </a:ext>
-            </a:extLst>
-          </p:cNvPr>
-          <p:cNvSpPr/>
-          <p:nvPr/>
-        </p:nvSpPr>
-        <p:spPr>
-          <a:xfrm>
-            <a:off x="4870173" y="9953343"/>
-            <a:ext cx="1272301" cy="393700"/>
-          </a:xfrm>
-          <a:prstGeom prst="rect">
-            <a:avLst/>
-          </a:prstGeom>
-          <a:ln w="19050">
-            <a:solidFill>
-              <a:schemeClr val="tx1"/>
-            </a:solidFill>
-          </a:ln>
-        </p:spPr>
-        <p:style>
-          <a:lnRef idx="2">
-            <a:schemeClr val="accent1"/>
-          </a:lnRef>
-          <a:fillRef idx="1">
-            <a:schemeClr val="lt1"/>
-          </a:fillRef>
-          <a:effectRef idx="0">
-            <a:schemeClr val="accent1"/>
-          </a:effectRef>
-          <a:fontRef idx="minor">
-            <a:schemeClr val="dk1"/>
-          </a:fontRef>
-        </p:style>
-        <p:txBody>
-          <a:bodyPr rtlCol="0" anchor="ctr"/>
-          <a:lstStyle/>
-          <a:p>
-            <a:pPr algn="ctr"/>
-            <a:r>
-              <a:rPr lang="en-US" b="1" dirty="0">
-                <a:latin typeface="Raleway" pitchFamily="2" charset="0"/>
-                <a:cs typeface="Posterama" panose="020B0504020200020000" pitchFamily="34" charset="0"/>
-              </a:rPr>
-              <a:t>Result</a:t>
-            </a:r>
-            <a:endParaRPr lang="en-GB" b="1" dirty="0">
-              <a:latin typeface="Raleway" pitchFamily="2" charset="0"/>
-              <a:cs typeface="Posterama" panose="020B0504020200020000" pitchFamily="34" charset="0"/>
-            </a:endParaRPr>
-          </a:p>
-        </p:txBody>
-      </p:sp>
-      <p:cxnSp>
-        <p:nvCxnSpPr>
-          <p:cNvPr id="47" name="Straight Arrow Connector 46">
-            <a:extLst>
-              <a:ext uri="{FF2B5EF4-FFF2-40B4-BE49-F238E27FC236}">
-                <a16:creationId xmlns:a16="http://schemas.microsoft.com/office/drawing/2014/main" id="{9A29C1C3-045C-E477-9C9C-368BABC9DC23}"/>
-              </a:ext>
-            </a:extLst>
-          </p:cNvPr>
-          <p:cNvCxnSpPr>
-            <a:cxnSpLocks/>
-          </p:cNvCxnSpPr>
-          <p:nvPr/>
-        </p:nvCxnSpPr>
-        <p:spPr>
-          <a:xfrm>
-            <a:off x="5483504" y="9507483"/>
-            <a:ext cx="0" cy="445860"/>
-          </a:xfrm>
-          <a:prstGeom prst="straightConnector1">
-            <a:avLst/>
-          </a:prstGeom>
-          <a:ln>
-            <a:tailEnd type="triangle"/>
-          </a:ln>
-        </p:spPr>
-        <p:style>
-          <a:lnRef idx="3">
-            <a:schemeClr val="accent1"/>
-          </a:lnRef>
-          <a:fillRef idx="0">
-            <a:schemeClr val="accent1"/>
-          </a:fillRef>
-          <a:effectRef idx="2">
-            <a:schemeClr val="accent1"/>
-          </a:effectRef>
-          <a:fontRef idx="minor">
-            <a:schemeClr val="tx1"/>
-          </a:fontRef>
-        </p:style>
-      </p:cxnSp>
-      <p:cxnSp>
-        <p:nvCxnSpPr>
-          <p:cNvPr id="48" name="Straight Arrow Connector 47">
-            <a:extLst>
-              <a:ext uri="{FF2B5EF4-FFF2-40B4-BE49-F238E27FC236}">
-                <a16:creationId xmlns:a16="http://schemas.microsoft.com/office/drawing/2014/main" id="{73DE3673-D041-6C3D-F22F-5B45B2F6FF1B}"/>
-              </a:ext>
-            </a:extLst>
-          </p:cNvPr>
-          <p:cNvCxnSpPr>
-            <a:cxnSpLocks/>
-          </p:cNvCxnSpPr>
-          <p:nvPr/>
-        </p:nvCxnSpPr>
-        <p:spPr>
-          <a:xfrm flipV="1">
-            <a:off x="3046115" y="11499144"/>
-            <a:ext cx="1245754" cy="280073"/>
-          </a:xfrm>
-          <a:prstGeom prst="straightConnector1">
-            <a:avLst/>
-          </a:prstGeom>
-          <a:ln>
-            <a:tailEnd type="triangle"/>
-          </a:ln>
-        </p:spPr>
-        <p:style>
-          <a:lnRef idx="3">
-            <a:schemeClr val="accent1"/>
-          </a:lnRef>
-          <a:fillRef idx="0">
-            <a:schemeClr val="accent1"/>
-          </a:fillRef>
-          <a:effectRef idx="2">
-            <a:schemeClr val="accent1"/>
-          </a:effectRef>
-          <a:fontRef idx="minor">
-            <a:schemeClr val="tx1"/>
-          </a:fontRef>
-        </p:style>
-      </p:cxnSp>
-      <p:sp>
-        <p:nvSpPr>
-          <p:cNvPr id="5" name="TextBox 4">
-            <a:extLst>
-              <a:ext uri="{FF2B5EF4-FFF2-40B4-BE49-F238E27FC236}">
-                <a16:creationId xmlns:a16="http://schemas.microsoft.com/office/drawing/2014/main" id="{D467D879-2CAF-EB74-F0CE-F506D82A7E60}"/>
-              </a:ext>
-            </a:extLst>
-          </p:cNvPr>
-          <p:cNvSpPr txBox="1"/>
-          <p:nvPr/>
-        </p:nvSpPr>
-        <p:spPr>
-          <a:xfrm>
-            <a:off x="0" y="0"/>
-            <a:ext cx="2603500" cy="523220"/>
-          </a:xfrm>
-          <a:prstGeom prst="rect">
-            <a:avLst/>
-          </a:prstGeom>
-          <a:noFill/>
-        </p:spPr>
-        <p:txBody>
-          <a:bodyPr wrap="square" rtlCol="0">
-            <a:spAutoFit/>
-          </a:bodyPr>
-          <a:lstStyle/>
-          <a:p>
-            <a:r>
-              <a:rPr lang="en-US" sz="2800" dirty="0"/>
-              <a:t>NEW Proposal</a:t>
-            </a:r>
-            <a:endParaRPr lang="en-GB" sz="2800" dirty="0"/>
-          </a:p>
-        </p:txBody>
-      </p:sp>
-      <p:sp>
-        <p:nvSpPr>
-          <p:cNvPr id="12" name="Star: 5 Points 11">
-            <a:extLst>
-              <a:ext uri="{FF2B5EF4-FFF2-40B4-BE49-F238E27FC236}">
-                <a16:creationId xmlns:a16="http://schemas.microsoft.com/office/drawing/2014/main" id="{02A84F7B-65EF-C365-CE3B-DA1A4F4310DE}"/>
-              </a:ext>
-            </a:extLst>
-          </p:cNvPr>
-          <p:cNvSpPr/>
-          <p:nvPr/>
-        </p:nvSpPr>
-        <p:spPr>
-          <a:xfrm>
-            <a:off x="431756" y="3971925"/>
-            <a:ext cx="525671" cy="470504"/>
-          </a:xfrm>
-          <a:prstGeom prst="star5">
-            <a:avLst/>
-          </a:prstGeom>
-        </p:spPr>
-        <p:style>
-          <a:lnRef idx="2">
-            <a:schemeClr val="accent1">
-              <a:shade val="15000"/>
-            </a:schemeClr>
-          </a:lnRef>
-          <a:fillRef idx="1">
-            <a:schemeClr val="accent1"/>
-          </a:fillRef>
-          <a:effectRef idx="0">
-            <a:schemeClr val="accent1"/>
-          </a:effectRef>
-          <a:fontRef idx="minor">
-            <a:schemeClr val="lt1"/>
-          </a:fontRef>
-        </p:style>
-        <p:txBody>
-          <a:bodyPr rtlCol="0" anchor="ctr"/>
-          <a:lstStyle/>
-          <a:p>
-            <a:pPr algn="ctr"/>
-            <a:endParaRPr lang="en-GB"/>
-          </a:p>
-        </p:txBody>
-      </p:sp>
-      <p:cxnSp>
-        <p:nvCxnSpPr>
-          <p:cNvPr id="13" name="Straight Arrow Connector 12">
-            <a:extLst>
-              <a:ext uri="{FF2B5EF4-FFF2-40B4-BE49-F238E27FC236}">
-                <a16:creationId xmlns:a16="http://schemas.microsoft.com/office/drawing/2014/main" id="{5F794447-796E-91E8-B98B-2DC0DF124375}"/>
-              </a:ext>
-            </a:extLst>
-          </p:cNvPr>
-          <p:cNvCxnSpPr>
-            <a:cxnSpLocks/>
-          </p:cNvCxnSpPr>
-          <p:nvPr/>
-        </p:nvCxnSpPr>
-        <p:spPr>
-          <a:xfrm>
-            <a:off x="168920" y="497244"/>
-            <a:ext cx="405690" cy="3398924"/>
-          </a:xfrm>
-          <a:prstGeom prst="straightConnector1">
-            <a:avLst/>
-          </a:prstGeom>
-          <a:ln>
-            <a:tailEnd type="triangle"/>
-          </a:ln>
-        </p:spPr>
-        <p:style>
-          <a:lnRef idx="3">
-            <a:schemeClr val="accent1"/>
-          </a:lnRef>
-          <a:fillRef idx="0">
-            <a:schemeClr val="accent1"/>
-          </a:fillRef>
-          <a:effectRef idx="2">
-            <a:schemeClr val="accent1"/>
-          </a:effectRef>
-          <a:fontRef idx="minor">
-            <a:schemeClr val="tx1"/>
-          </a:fontRef>
-        </p:style>
-      </p:cxnSp>
-    </p:spTree>
-    <p:extLst>
-      <p:ext uri="{BB962C8B-B14F-4D97-AF65-F5344CB8AC3E}">
-        <p14:creationId xmlns:p14="http://schemas.microsoft.com/office/powerpoint/2010/main" val="2048028097"/>
-      </p:ext>
-    </p:extLst>
-  </p:cSld>
-  <p:clrMapOvr>
-    <a:masterClrMapping/>
-  </p:clrMapOvr>
-</p:sld>
-</file>
-
-<file path=ppt/slides/slide3.xml><?xml version="1.0" encoding="utf-8"?>
-<p:sld xmlns:a="http://schemas.openxmlformats.org/drawingml/2006/main" xmlns:r="http://schemas.openxmlformats.org/officeDocument/2006/relationships" xmlns:p="http://schemas.openxmlformats.org/presentationml/2006/main">
-  <p:cSld>
-    <p:spTree>
-      <p:nvGrpSpPr>
-        <p:cNvPr id="1" name="">
-          <a:extLst>
-            <a:ext uri="{FF2B5EF4-FFF2-40B4-BE49-F238E27FC236}">
-              <a16:creationId xmlns:a16="http://schemas.microsoft.com/office/drawing/2014/main" id="{5439C57A-A402-852A-5A46-980E0F9068A7}"/>
-            </a:ext>
-          </a:extLst>
-        </p:cNvPr>
-        <p:cNvGrpSpPr/>
-        <p:nvPr/>
-      </p:nvGrpSpPr>
-      <p:grpSpPr>
-        <a:xfrm>
-          <a:off x="0" y="0"/>
-          <a:ext cx="0" cy="0"/>
-          <a:chOff x="0" y="0"/>
-          <a:chExt cx="0" cy="0"/>
-        </a:xfrm>
-      </p:grpSpPr>
       <p:sp>
         <p:nvSpPr>
           <p:cNvPr id="4" name="Rectangle 3">
@@ -10426,19 +7022,19 @@
           <a:p>
             <a:pPr algn="ctr"/>
             <a:r>
-              <a:rPr lang="en-US" sz="1400" dirty="0">
+              <a:rPr lang="en-US" sz="1200" dirty="0">
                 <a:solidFill>
                   <a:sysClr val="windowText" lastClr="000000"/>
                 </a:solidFill>
                 <a:latin typeface="Abadi" panose="020B0604020104020204" pitchFamily="34" charset="0"/>
               </a:rPr>
-              <a:t>Extract 5’ splice sites from PSI-TABLE to filter loci within +-50 bp of 5’ canonical splice site</a:t>
+              <a:t>Extract 5’ splice sites from PSI-TABLE to filter loci within +-50 bp of 5’ canonical splice site (192,965 SS coords each)</a:t>
             </a:r>
           </a:p>
           <a:p>
             <a:pPr algn="ctr"/>
             <a:r>
-              <a:rPr lang="en-US" sz="1400" dirty="0" err="1">
+              <a:rPr lang="en-US" sz="1200" dirty="0" err="1">
                 <a:solidFill>
                   <a:schemeClr val="accent1"/>
                 </a:solidFill>
@@ -10446,7 +7042,7 @@
               </a:rPr>
               <a:t>Canonical_splice_sites.bed</a:t>
             </a:r>
-            <a:endParaRPr lang="en-US" sz="1400" dirty="0">
+            <a:endParaRPr lang="en-US" sz="1200" dirty="0">
               <a:solidFill>
                 <a:schemeClr val="accent1"/>
               </a:solidFill>
@@ -10456,7 +7052,7 @@
           <a:p>
             <a:pPr algn="ctr"/>
             <a:r>
-              <a:rPr lang="en-US" sz="1400" dirty="0" err="1">
+              <a:rPr lang="en-US" sz="1200" dirty="0" err="1">
                 <a:solidFill>
                   <a:schemeClr val="accent1"/>
                 </a:solidFill>
@@ -10464,7 +7060,7 @@
               </a:rPr>
               <a:t>Wide_canonical_splice_sites.bed</a:t>
             </a:r>
-            <a:endParaRPr lang="en-US" sz="1400" dirty="0">
+            <a:endParaRPr lang="en-US" sz="1200" dirty="0">
               <a:solidFill>
                 <a:schemeClr val="accent1"/>
               </a:solidFill>
@@ -10629,20 +7225,26 @@
           <a:p>
             <a:pPr algn="ctr"/>
             <a:r>
-              <a:rPr lang="en-US" sz="1400" dirty="0" err="1">
+              <a:rPr lang="en-US" sz="1400" dirty="0">
                 <a:solidFill>
                   <a:schemeClr val="accent1"/>
                 </a:solidFill>
                 <a:latin typeface="Abadi" panose="020B0604020104020204" pitchFamily="34" charset="0"/>
               </a:rPr>
-              <a:t>Protein_coding_sites.bed</a:t>
-            </a:r>
-            <a:endParaRPr lang="en-US" sz="1400" dirty="0">
-              <a:solidFill>
-                <a:schemeClr val="accent1"/>
-              </a:solidFill>
-              <a:latin typeface="Abadi" panose="020B0604020104020204" pitchFamily="34" charset="0"/>
-            </a:endParaRPr>
+              <a:t>spliceai_05min_proteincoding.bed</a:t>
+            </a:r>
+          </a:p>
+          <a:p>
+            <a:pPr algn="ctr"/>
+            <a:r>
+              <a:rPr lang="en-US" sz="1400" dirty="0">
+                <a:solidFill>
+                  <a:schemeClr val="tx1"/>
+                </a:solidFill>
+                <a:latin typeface="Abadi" panose="020B0604020104020204" pitchFamily="34" charset="0"/>
+              </a:rPr>
+              <a:t>550,282 splice site inferences</a:t>
+            </a:r>
           </a:p>
         </p:txBody>
       </p:sp>
@@ -10660,7 +7262,7 @@
         </p:nvSpPr>
         <p:spPr>
           <a:xfrm>
-            <a:off x="2127250" y="1843456"/>
+            <a:off x="2127250" y="1805356"/>
             <a:ext cx="2603500" cy="393700"/>
           </a:xfrm>
           <a:prstGeom prst="rect">
@@ -10754,7 +7356,7 @@
           <a:p>
             <a:pPr algn="ctr"/>
             <a:r>
-              <a:rPr lang="en-GB" sz="1400" dirty="0">
+              <a:rPr lang="en-GB" sz="1100" dirty="0">
                 <a:solidFill>
                   <a:sysClr val="windowText" lastClr="000000"/>
                 </a:solidFill>
@@ -10764,7 +7366,7 @@
               <a:t>bedtools intersect -v (no overlap) </a:t>
             </a:r>
             <a:r>
-              <a:rPr lang="en-GB" sz="1400" dirty="0" err="1">
+              <a:rPr lang="en-GB" sz="1100" dirty="0" err="1">
                 <a:solidFill>
                   <a:sysClr val="windowText" lastClr="000000"/>
                 </a:solidFill>
@@ -10774,7 +7376,7 @@
               <a:t>Wide_canonical_splice_sites.bed</a:t>
             </a:r>
             <a:br>
-              <a:rPr lang="en-GB" sz="1400" dirty="0">
+              <a:rPr lang="en-GB" sz="1100" dirty="0">
                 <a:solidFill>
                   <a:sysClr val="windowText" lastClr="000000"/>
                 </a:solidFill>
@@ -10783,7 +7385,7 @@
               </a:rPr>
             </a:br>
             <a:r>
-              <a:rPr lang="en-GB" sz="1400" dirty="0">
+              <a:rPr lang="en-GB" sz="1100" dirty="0">
                 <a:solidFill>
                   <a:sysClr val="windowText" lastClr="000000"/>
                 </a:solidFill>
@@ -10793,7 +7395,7 @@
               <a:t>== </a:t>
             </a:r>
             <a:r>
-              <a:rPr lang="en-GB" sz="1400" dirty="0" err="1">
+              <a:rPr lang="en-GB" sz="1100" dirty="0" err="1">
                 <a:solidFill>
                   <a:schemeClr val="accent1"/>
                 </a:solidFill>
@@ -10802,9 +7404,9 @@
               </a:rPr>
               <a:t>deep_intronic_sites.bed</a:t>
             </a:r>
-            <a:endParaRPr lang="en-GB" sz="1400" dirty="0">
+            <a:endParaRPr lang="en-GB" sz="1100" dirty="0">
               <a:solidFill>
-                <a:sysClr val="windowText" lastClr="000000"/>
+                <a:schemeClr val="accent1"/>
               </a:solidFill>
               <a:latin typeface="SimHei" panose="020B0503020204020204" pitchFamily="49" charset="-122"/>
               <a:ea typeface="SimHei" panose="020B0503020204020204" pitchFamily="49" charset="-122"/>
@@ -10813,7 +7415,26 @@
           <a:p>
             <a:pPr algn="ctr"/>
             <a:r>
-              <a:rPr lang="en-GB" sz="1400" dirty="0">
+              <a:rPr lang="en-US" sz="1100" dirty="0">
+                <a:solidFill>
+                  <a:sysClr val="windowText" lastClr="000000"/>
+                </a:solidFill>
+                <a:latin typeface="Abadi" panose="020B0604020104020204" pitchFamily="34" charset="0"/>
+              </a:rPr>
+              <a:t>367,089 splice site inferences</a:t>
+            </a:r>
+            <a:endParaRPr lang="en-GB" sz="1100" dirty="0">
+              <a:solidFill>
+                <a:schemeClr val="tx1"/>
+              </a:solidFill>
+              <a:latin typeface="SimHei" panose="020B0503020204020204" pitchFamily="49" charset="-122"/>
+              <a:ea typeface="SimHei" panose="020B0503020204020204" pitchFamily="49" charset="-122"/>
+            </a:endParaRPr>
+          </a:p>
+          <a:p>
+            <a:pPr algn="ctr"/>
+            <a:r>
+              <a:rPr lang="en-GB" sz="1100" dirty="0">
                 <a:solidFill>
                   <a:sysClr val="windowText" lastClr="000000"/>
                 </a:solidFill>
@@ -10823,7 +7444,7 @@
               <a:t>bedtools intersect -c (does overlap) </a:t>
             </a:r>
             <a:r>
-              <a:rPr lang="en-GB" sz="1400" dirty="0" err="1">
+              <a:rPr lang="en-GB" sz="1100" dirty="0" err="1">
                 <a:solidFill>
                   <a:sysClr val="windowText" lastClr="000000"/>
                 </a:solidFill>
@@ -10833,7 +7454,7 @@
               <a:t>Wide_canonical_splice_sites.bed</a:t>
             </a:r>
             <a:br>
-              <a:rPr lang="en-GB" sz="1400" dirty="0">
+              <a:rPr lang="en-GB" sz="1100" dirty="0">
                 <a:solidFill>
                   <a:sysClr val="windowText" lastClr="000000"/>
                 </a:solidFill>
@@ -10842,7 +7463,7 @@
               </a:rPr>
             </a:br>
             <a:r>
-              <a:rPr lang="en-GB" sz="1400" dirty="0">
+              <a:rPr lang="en-GB" sz="1100" dirty="0">
                 <a:solidFill>
                   <a:sysClr val="windowText" lastClr="000000"/>
                 </a:solidFill>
@@ -10852,7 +7473,7 @@
               <a:t>== </a:t>
             </a:r>
             <a:r>
-              <a:rPr lang="en-GB" sz="1400" dirty="0" err="1">
+              <a:rPr lang="en-GB" sz="1100" dirty="0" err="1">
                 <a:solidFill>
                   <a:schemeClr val="accent1"/>
                 </a:solidFill>
@@ -10861,9 +7482,28 @@
               </a:rPr>
               <a:t>exonic.bed</a:t>
             </a:r>
-            <a:endParaRPr lang="en-US" sz="1400" dirty="0">
+            <a:endParaRPr lang="en-GB" sz="1100" dirty="0">
               <a:solidFill>
                 <a:schemeClr val="accent1"/>
+              </a:solidFill>
+              <a:latin typeface="SimHei" panose="020B0503020204020204" pitchFamily="49" charset="-122"/>
+              <a:ea typeface="SimHei" panose="020B0503020204020204" pitchFamily="49" charset="-122"/>
+            </a:endParaRPr>
+          </a:p>
+          <a:p>
+            <a:pPr algn="ctr"/>
+            <a:r>
+              <a:rPr lang="en-US" sz="1100" dirty="0">
+                <a:solidFill>
+                  <a:sysClr val="windowText" lastClr="000000"/>
+                </a:solidFill>
+                <a:latin typeface="Abadi" panose="020B0604020104020204" pitchFamily="34" charset="0"/>
+              </a:rPr>
+              <a:t>183,193 splice site inferences</a:t>
+            </a:r>
+            <a:endParaRPr lang="en-GB" sz="1100" dirty="0">
+              <a:solidFill>
+                <a:sysClr val="windowText" lastClr="000000"/>
               </a:solidFill>
               <a:latin typeface="Abadi" panose="020B0604020104020204" pitchFamily="34" charset="0"/>
             </a:endParaRPr>
@@ -10884,7 +7524,7 @@
         </p:nvSpPr>
         <p:spPr>
           <a:xfrm>
-            <a:off x="2127250" y="5045458"/>
+            <a:off x="2127250" y="5007358"/>
             <a:ext cx="2603500" cy="393700"/>
           </a:xfrm>
           <a:prstGeom prst="rect">
@@ -11002,8 +7642,8 @@
         </p:nvSpPr>
         <p:spPr>
           <a:xfrm>
-            <a:off x="192410" y="6734386"/>
-            <a:ext cx="6473179" cy="1132482"/>
+            <a:off x="192410" y="6583419"/>
+            <a:ext cx="6473179" cy="1283449"/>
           </a:xfrm>
           <a:prstGeom prst="rect">
             <a:avLst/>
@@ -11161,12 +7801,27 @@
               </a:rPr>
               <a:t>decoys.bed</a:t>
             </a:r>
-            <a:endParaRPr lang="en-US" sz="1200" dirty="0">
-              <a:solidFill>
-                <a:schemeClr val="tx1"/>
-              </a:solidFill>
-              <a:latin typeface="Abadi" panose="020B0604020104020204" pitchFamily="34" charset="0"/>
-            </a:endParaRPr>
+            <a:r>
+              <a:rPr lang="en-US" sz="1200" dirty="0">
+                <a:solidFill>
+                  <a:schemeClr val="tx1"/>
+                </a:solidFill>
+                <a:latin typeface="Abadi" panose="020B0604020104020204" pitchFamily="34" charset="0"/>
+              </a:rPr>
+              <a:t> </a:t>
+            </a:r>
+          </a:p>
+          <a:p>
+            <a:pPr algn="ctr"/>
+            <a:r>
+              <a:rPr lang="en-US" sz="1200" dirty="0">
+                <a:solidFill>
+                  <a:schemeClr val="tx1"/>
+                </a:solidFill>
+                <a:latin typeface="Abadi" panose="020B0604020104020204" pitchFamily="34" charset="0"/>
+              </a:rPr>
+              <a:t>19,942 decoy sites</a:t>
+            </a:r>
           </a:p>
           <a:p>
             <a:pPr algn="ctr"/>
@@ -11295,12 +7950,23 @@
               </a:rPr>
               <a:t>cryptic_sites.bed</a:t>
             </a:r>
-            <a:endParaRPr lang="en-US" sz="1200" dirty="0">
-              <a:solidFill>
-                <a:schemeClr val="tx1"/>
-              </a:solidFill>
-              <a:latin typeface="Abadi" panose="020B0604020104020204" pitchFamily="34" charset="0"/>
-            </a:endParaRPr>
+            <a:br>
+              <a:rPr lang="en-US" sz="1200" dirty="0">
+                <a:solidFill>
+                  <a:schemeClr val="tx1"/>
+                </a:solidFill>
+                <a:latin typeface="Abadi" panose="020B0604020104020204" pitchFamily="34" charset="0"/>
+              </a:rPr>
+            </a:br>
+            <a:r>
+              <a:rPr lang="en-US" sz="1200" dirty="0">
+                <a:solidFill>
+                  <a:schemeClr val="tx1"/>
+                </a:solidFill>
+                <a:latin typeface="Abadi" panose="020B0604020104020204" pitchFamily="34" charset="0"/>
+              </a:rPr>
+              <a:t>267,309 splice sites</a:t>
+            </a:r>
           </a:p>
         </p:txBody>
       </p:sp>
@@ -11318,8 +7984,8 @@
         </p:nvSpPr>
         <p:spPr>
           <a:xfrm>
-            <a:off x="1388756" y="8188935"/>
-            <a:ext cx="4391691" cy="1876706"/>
+            <a:off x="1057103" y="8043538"/>
+            <a:ext cx="5256572" cy="1688347"/>
           </a:xfrm>
           <a:prstGeom prst="rect">
             <a:avLst/>
@@ -11397,9 +8063,6 @@
               </a:rPr>
               <a:t> PRPF8 predictions </a:t>
             </a:r>
-          </a:p>
-          <a:p>
-            <a:pPr algn="ctr"/>
             <a:r>
               <a:rPr lang="en-US" sz="1200" dirty="0">
                 <a:solidFill>
@@ -11418,9 +8081,6 @@
               </a:rPr>
               <a:t>PRPF8 Peaks </a:t>
             </a:r>
-          </a:p>
-          <a:p>
-            <a:pPr algn="ctr"/>
             <a:r>
               <a:rPr lang="en-US" sz="1200" dirty="0">
                 <a:solidFill>
@@ -11604,6 +8264,24 @@
                 <a:latin typeface="Abadi" panose="020B0604020104020204" pitchFamily="34" charset="0"/>
               </a:rPr>
               <a:t>cryptics_supported.bed</a:t>
+            </a:r>
+            <a:endParaRPr lang="en-US" sz="1200" dirty="0">
+              <a:solidFill>
+                <a:schemeClr val="accent1"/>
+              </a:solidFill>
+              <a:latin typeface="Abadi" panose="020B0604020104020204" pitchFamily="34" charset="0"/>
+            </a:endParaRPr>
+          </a:p>
+          <a:p>
+            <a:pPr algn="ctr"/>
+            <a:r>
+              <a:rPr lang="en-US" sz="1200" dirty="0">
+                <a:solidFill>
+                  <a:schemeClr val="tx1"/>
+                </a:solidFill>
+                <a:latin typeface="Abadi" panose="020B0604020104020204" pitchFamily="34" charset="0"/>
+              </a:rPr>
+              <a:t>191,904 splice sites</a:t>
             </a:r>
             <a:endParaRPr lang="en-US" sz="1200" dirty="0">
               <a:solidFill>
@@ -11631,7 +8309,7 @@
         <p:spPr>
           <a:xfrm>
             <a:off x="2717800" y="6270146"/>
-            <a:ext cx="622300" cy="641477"/>
+            <a:ext cx="125138" cy="373965"/>
           </a:xfrm>
           <a:prstGeom prst="straightConnector1">
             <a:avLst/>
@@ -11669,8 +8347,8 @@
         </p:nvSpPr>
         <p:spPr>
           <a:xfrm>
-            <a:off x="2438455" y="10896599"/>
-            <a:ext cx="2292295" cy="993725"/>
+            <a:off x="192411" y="10394835"/>
+            <a:ext cx="2284090" cy="1606665"/>
           </a:xfrm>
           <a:prstGeom prst="rect">
             <a:avLst/>
@@ -11714,7 +8392,31 @@
             </a:r>
           </a:p>
           <a:p>
-            <a:pPr algn="ctr"/>
+            <a:pPr marL="228600" indent="-228600">
+              <a:buFont typeface="+mj-lt"/>
+              <a:buAutoNum type="arabicPeriod"/>
+            </a:pPr>
+            <a:r>
+              <a:rPr lang="en-US" sz="1200" dirty="0">
+                <a:solidFill>
+                  <a:schemeClr val="tx1"/>
+                </a:solidFill>
+                <a:latin typeface="Abadi" panose="020B0604020104020204" pitchFamily="34" charset="0"/>
+              </a:rPr>
+              <a:t>Loci Feature Table</a:t>
+            </a:r>
+          </a:p>
+          <a:p>
+            <a:pPr lvl="1"/>
+            <a:r>
+              <a:rPr lang="en-US" sz="1200" dirty="0" err="1">
+                <a:solidFill>
+                  <a:schemeClr val="tx1"/>
+                </a:solidFill>
+                <a:latin typeface="Abadi" panose="020B0604020104020204" pitchFamily="34" charset="0"/>
+              </a:rPr>
+              <a:t>Decoys.bed</a:t>
+            </a:r>
             <a:endParaRPr lang="en-US" sz="1200" dirty="0">
               <a:solidFill>
                 <a:schemeClr val="tx1"/>
@@ -11723,10 +8425,7 @@
             </a:endParaRPr>
           </a:p>
           <a:p>
-            <a:pPr marL="228600" indent="-228600">
-              <a:buFont typeface="+mj-lt"/>
-              <a:buAutoNum type="arabicPeriod"/>
-            </a:pPr>
+            <a:pPr lvl="1"/>
             <a:r>
               <a:rPr lang="en-US" sz="1200" dirty="0" err="1">
                 <a:solidFill>
@@ -11734,7 +8433,7 @@
                 </a:solidFill>
                 <a:latin typeface="Abadi" panose="020B0604020104020204" pitchFamily="34" charset="0"/>
               </a:rPr>
-              <a:t>Decoys.bed</a:t>
+              <a:t>Cryptics_supported.bed</a:t>
             </a:r>
             <a:endParaRPr lang="en-US" sz="1200" dirty="0">
               <a:solidFill>
@@ -11749,20 +8448,26 @@
               <a:buAutoNum type="arabicPeriod"/>
             </a:pPr>
             <a:r>
-              <a:rPr lang="en-US" sz="1200" dirty="0" err="1">
+              <a:rPr lang="en-US" sz="1200" dirty="0">
                 <a:solidFill>
                   <a:schemeClr val="tx1"/>
                 </a:solidFill>
                 <a:latin typeface="Abadi" panose="020B0604020104020204" pitchFamily="34" charset="0"/>
               </a:rPr>
-              <a:t>Cryptics_supported.bed</a:t>
-            </a:r>
-            <a:endParaRPr lang="en-US" sz="1200" dirty="0">
-              <a:solidFill>
-                <a:schemeClr val="tx1"/>
-              </a:solidFill>
-              <a:latin typeface="Abadi" panose="020B0604020104020204" pitchFamily="34" charset="0"/>
-            </a:endParaRPr>
+              <a:t>Retained Introns Table</a:t>
+            </a:r>
+          </a:p>
+          <a:p>
+            <a:pPr lvl="1"/>
+            <a:r>
+              <a:rPr lang="en-US" sz="1200" dirty="0">
+                <a:solidFill>
+                  <a:schemeClr val="tx1"/>
+                </a:solidFill>
+                <a:latin typeface="Abadi" panose="020B0604020104020204" pitchFamily="34" charset="0"/>
+              </a:rPr>
+              <a:t>Subgroups (has decoy, has cryptic, neither, both)</a:t>
+            </a:r>
           </a:p>
         </p:txBody>
       </p:sp>
@@ -11780,7 +8485,7 @@
         </p:nvSpPr>
         <p:spPr>
           <a:xfrm>
-            <a:off x="2952943" y="10574533"/>
+            <a:off x="624292" y="10066340"/>
             <a:ext cx="1272301" cy="393700"/>
           </a:xfrm>
           <a:prstGeom prst="rect">
@@ -11840,9 +8545,9 @@
           <p:nvPr/>
         </p:nvCxnSpPr>
         <p:spPr>
-          <a:xfrm>
-            <a:off x="3587804" y="10128673"/>
-            <a:ext cx="0" cy="445860"/>
+          <a:xfrm flipH="1">
+            <a:off x="2373243" y="11341834"/>
+            <a:ext cx="689114" cy="91032"/>
           </a:xfrm>
           <a:prstGeom prst="straightConnector1">
             <a:avLst/>
@@ -11882,8 +8587,8 @@
         </p:nvCxnSpPr>
         <p:spPr>
           <a:xfrm flipH="1">
-            <a:off x="5001413" y="7813171"/>
-            <a:ext cx="154787" cy="1624796"/>
+            <a:off x="5709285" y="7862014"/>
+            <a:ext cx="454123" cy="1047167"/>
           </a:xfrm>
           <a:prstGeom prst="straightConnector1">
             <a:avLst/>
@@ -11907,6 +8612,262 @@
           </a:fontRef>
         </p:style>
       </p:cxnSp>
+      <p:cxnSp>
+        <p:nvCxnSpPr>
+          <p:cNvPr id="3" name="Straight Arrow Connector 2">
+            <a:extLst>
+              <a:ext uri="{FF2B5EF4-FFF2-40B4-BE49-F238E27FC236}">
+                <a16:creationId xmlns:a16="http://schemas.microsoft.com/office/drawing/2014/main" id="{8FD840B3-0833-6599-1CDA-16C7AE8F42FA}"/>
+              </a:ext>
+            </a:extLst>
+          </p:cNvPr>
+          <p:cNvCxnSpPr>
+            <a:cxnSpLocks/>
+          </p:cNvCxnSpPr>
+          <p:nvPr/>
+        </p:nvCxnSpPr>
+        <p:spPr>
+          <a:xfrm>
+            <a:off x="2717800" y="6270146"/>
+            <a:ext cx="1808480" cy="353669"/>
+          </a:xfrm>
+          <a:prstGeom prst="straightConnector1">
+            <a:avLst/>
+          </a:prstGeom>
+          <a:ln>
+            <a:tailEnd type="triangle"/>
+          </a:ln>
+        </p:spPr>
+        <p:style>
+          <a:lnRef idx="3">
+            <a:schemeClr val="accent1"/>
+          </a:lnRef>
+          <a:fillRef idx="0">
+            <a:schemeClr val="accent1"/>
+          </a:fillRef>
+          <a:effectRef idx="2">
+            <a:schemeClr val="accent1"/>
+          </a:effectRef>
+          <a:fontRef idx="minor">
+            <a:schemeClr val="tx1"/>
+          </a:fontRef>
+        </p:style>
+      </p:cxnSp>
+      <p:sp>
+        <p:nvSpPr>
+          <p:cNvPr id="12" name="Rectangle 11">
+            <a:extLst>
+              <a:ext uri="{FF2B5EF4-FFF2-40B4-BE49-F238E27FC236}">
+                <a16:creationId xmlns:a16="http://schemas.microsoft.com/office/drawing/2014/main" id="{C5FEDBBF-5393-D218-FC43-C104DCAF2975}"/>
+              </a:ext>
+            </a:extLst>
+          </p:cNvPr>
+          <p:cNvSpPr/>
+          <p:nvPr/>
+        </p:nvSpPr>
+        <p:spPr>
+          <a:xfrm>
+            <a:off x="2842938" y="10151695"/>
+            <a:ext cx="3822651" cy="1954028"/>
+          </a:xfrm>
+          <a:prstGeom prst="rect">
+            <a:avLst/>
+          </a:prstGeom>
+          <a:solidFill>
+            <a:schemeClr val="accent1">
+              <a:lumMod val="40000"/>
+              <a:lumOff val="60000"/>
+            </a:schemeClr>
+          </a:solidFill>
+        </p:spPr>
+        <p:style>
+          <a:lnRef idx="2">
+            <a:schemeClr val="accent1">
+              <a:shade val="15000"/>
+            </a:schemeClr>
+          </a:lnRef>
+          <a:fillRef idx="1">
+            <a:schemeClr val="accent1"/>
+          </a:fillRef>
+          <a:effectRef idx="0">
+            <a:schemeClr val="accent1"/>
+          </a:effectRef>
+          <a:fontRef idx="minor">
+            <a:schemeClr val="lt1"/>
+          </a:fontRef>
+        </p:style>
+        <p:txBody>
+          <a:bodyPr rtlCol="0" anchor="ctr"/>
+          <a:lstStyle/>
+          <a:p>
+            <a:pPr algn="ctr"/>
+            <a:r>
+              <a:rPr lang="en-US" sz="1200" dirty="0">
+                <a:solidFill>
+                  <a:sysClr val="windowText" lastClr="000000"/>
+                </a:solidFill>
+                <a:latin typeface="Abadi" panose="020B0604020104020204" pitchFamily="34" charset="0"/>
+              </a:rPr>
+              <a:t>Pull FASTA using BED coordinates with SpliceAI_Inference.py to re-score inferences over ±24nt window surrounding the loci, &gt; 0.1 Donor Score</a:t>
+            </a:r>
+          </a:p>
+          <a:p>
+            <a:pPr algn="ctr"/>
+            <a:r>
+              <a:rPr lang="en-US" sz="1200" dirty="0">
+                <a:solidFill>
+                  <a:sysClr val="windowText" lastClr="000000"/>
+                </a:solidFill>
+                <a:latin typeface="Abadi" panose="020B0604020104020204" pitchFamily="34" charset="0"/>
+              </a:rPr>
+              <a:t>7,021 Predicted Decoy Sites </a:t>
+            </a:r>
+          </a:p>
+          <a:p>
+            <a:pPr algn="ctr"/>
+            <a:r>
+              <a:rPr lang="en-US" sz="1200" dirty="0">
+                <a:solidFill>
+                  <a:sysClr val="windowText" lastClr="000000"/>
+                </a:solidFill>
+                <a:latin typeface="Abadi" panose="020B0604020104020204" pitchFamily="34" charset="0"/>
+              </a:rPr>
+              <a:t>18,808 Predicted Cryptic Sites</a:t>
+            </a:r>
+          </a:p>
+          <a:p>
+            <a:pPr marL="171450" indent="-171450" algn="ctr">
+              <a:buFont typeface="Arial" panose="020B0604020202020204" pitchFamily="34" charset="0"/>
+              <a:buChar char="•"/>
+            </a:pPr>
+            <a:endParaRPr lang="en-US" sz="1200" dirty="0">
+              <a:solidFill>
+                <a:sysClr val="windowText" lastClr="000000"/>
+              </a:solidFill>
+              <a:latin typeface="Abadi" panose="020B0604020104020204" pitchFamily="34" charset="0"/>
+            </a:endParaRPr>
+          </a:p>
+          <a:p>
+            <a:pPr algn="ctr"/>
+            <a:r>
+              <a:rPr lang="en-US" sz="1200" dirty="0">
+                <a:solidFill>
+                  <a:schemeClr val="tx1"/>
+                </a:solidFill>
+                <a:latin typeface="Abadi" panose="020B0604020104020204" pitchFamily="34" charset="0"/>
+              </a:rPr>
+              <a:t>Finally</a:t>
+            </a:r>
+            <a:r>
+              <a:rPr lang="en-US" sz="1200" dirty="0">
+                <a:solidFill>
+                  <a:schemeClr val="accent1"/>
+                </a:solidFill>
+                <a:latin typeface="Abadi" panose="020B0604020104020204" pitchFamily="34" charset="0"/>
+              </a:rPr>
+              <a:t> </a:t>
+            </a:r>
+            <a:r>
+              <a:rPr lang="en-US" sz="1200" dirty="0">
+                <a:solidFill>
+                  <a:schemeClr val="tx1"/>
+                </a:solidFill>
+                <a:latin typeface="Abadi" panose="020B0604020104020204" pitchFamily="34" charset="0"/>
+              </a:rPr>
+              <a:t>overlap to remove alternative 5’SS (VAST-DB PSI-TABLE) from both</a:t>
+            </a:r>
+          </a:p>
+          <a:p>
+            <a:pPr algn="ctr"/>
+            <a:r>
+              <a:rPr lang="en-US" sz="1200" dirty="0">
+                <a:solidFill>
+                  <a:schemeClr val="tx1"/>
+                </a:solidFill>
+                <a:latin typeface="Abadi" panose="020B0604020104020204" pitchFamily="34" charset="0"/>
+              </a:rPr>
+              <a:t>Decoys kept 6,506 /  </a:t>
+            </a:r>
+            <a:r>
+              <a:rPr lang="en-US" sz="1200" dirty="0" err="1">
+                <a:solidFill>
+                  <a:schemeClr val="tx1"/>
+                </a:solidFill>
+                <a:latin typeface="Abadi" panose="020B0604020104020204" pitchFamily="34" charset="0"/>
+              </a:rPr>
+              <a:t>Cryptics</a:t>
+            </a:r>
+            <a:r>
+              <a:rPr lang="en-US" sz="1200" dirty="0">
+                <a:solidFill>
+                  <a:schemeClr val="tx1"/>
+                </a:solidFill>
+                <a:latin typeface="Abadi" panose="020B0604020104020204" pitchFamily="34" charset="0"/>
+              </a:rPr>
+              <a:t> kept 17,721</a:t>
+            </a:r>
+          </a:p>
+        </p:txBody>
+      </p:sp>
+      <p:sp>
+        <p:nvSpPr>
+          <p:cNvPr id="14" name="Rectangle 13">
+            <a:extLst>
+              <a:ext uri="{FF2B5EF4-FFF2-40B4-BE49-F238E27FC236}">
+                <a16:creationId xmlns:a16="http://schemas.microsoft.com/office/drawing/2014/main" id="{075A2A3E-627D-B882-477F-0B33901699FE}"/>
+              </a:ext>
+            </a:extLst>
+          </p:cNvPr>
+          <p:cNvSpPr/>
+          <p:nvPr/>
+        </p:nvSpPr>
+        <p:spPr>
+          <a:xfrm>
+            <a:off x="3685389" y="9838422"/>
+            <a:ext cx="2090721" cy="397108"/>
+          </a:xfrm>
+          <a:prstGeom prst="rect">
+            <a:avLst/>
+          </a:prstGeom>
+          <a:ln w="19050">
+            <a:solidFill>
+              <a:schemeClr val="tx1"/>
+            </a:solidFill>
+          </a:ln>
+        </p:spPr>
+        <p:style>
+          <a:lnRef idx="2">
+            <a:schemeClr val="accent1"/>
+          </a:lnRef>
+          <a:fillRef idx="1">
+            <a:schemeClr val="lt1"/>
+          </a:fillRef>
+          <a:effectRef idx="0">
+            <a:schemeClr val="accent1"/>
+          </a:effectRef>
+          <a:fontRef idx="minor">
+            <a:schemeClr val="dk1"/>
+          </a:fontRef>
+        </p:style>
+        <p:txBody>
+          <a:bodyPr rtlCol="0" anchor="ctr"/>
+          <a:lstStyle/>
+          <a:p>
+            <a:pPr algn="ctr"/>
+            <a:r>
+              <a:rPr lang="en-US" b="1" dirty="0">
+                <a:latin typeface="Raleway" pitchFamily="2" charset="0"/>
+                <a:cs typeface="Posterama" panose="020B0504020200020000" pitchFamily="34" charset="0"/>
+              </a:rPr>
+              <a:t>Rescore locus</a:t>
+            </a:r>
+            <a:endParaRPr lang="en-GB" b="1" dirty="0">
+              <a:latin typeface="Raleway" pitchFamily="2" charset="0"/>
+              <a:cs typeface="Posterama" panose="020B0504020200020000" pitchFamily="34" charset="0"/>
+            </a:endParaRPr>
+          </a:p>
+        </p:txBody>
+      </p:sp>
     </p:spTree>
     <p:extLst>
       <p:ext uri="{BB962C8B-B14F-4D97-AF65-F5344CB8AC3E}">

--- a/figures/datasetgenerationflowchart.pptx
+++ b/figures/datasetgenerationflowchart.pptx
@@ -261,7 +261,7 @@
           <a:p>
             <a:fld id="{0DAF61AA-5A98-4049-A93E-477E5505141A}" type="datetimeFigureOut">
               <a:rPr lang="en-US" smtClean="0"/>
-              <a:t>9/22/2026</a:t>
+              <a:t>9/29/2026</a:t>
             </a:fld>
             <a:endParaRPr lang="en-US" dirty="0"/>
           </a:p>
@@ -461,7 +461,7 @@
           <a:p>
             <a:fld id="{0DAF61AA-5A98-4049-A93E-477E5505141A}" type="datetimeFigureOut">
               <a:rPr lang="en-US" smtClean="0"/>
-              <a:t>9/22/2026</a:t>
+              <a:t>9/29/2026</a:t>
             </a:fld>
             <a:endParaRPr lang="en-US"/>
           </a:p>
@@ -671,7 +671,7 @@
           <a:p>
             <a:fld id="{0DAF61AA-5A98-4049-A93E-477E5505141A}" type="datetimeFigureOut">
               <a:rPr lang="en-US" smtClean="0"/>
-              <a:t>9/22/2026</a:t>
+              <a:t>9/29/2026</a:t>
             </a:fld>
             <a:endParaRPr lang="en-US"/>
           </a:p>
@@ -871,7 +871,7 @@
           <a:p>
             <a:fld id="{0DAF61AA-5A98-4049-A93E-477E5505141A}" type="datetimeFigureOut">
               <a:rPr lang="en-US" smtClean="0"/>
-              <a:t>9/22/2026</a:t>
+              <a:t>9/29/2026</a:t>
             </a:fld>
             <a:endParaRPr lang="en-US"/>
           </a:p>
@@ -1147,7 +1147,7 @@
           <a:p>
             <a:fld id="{0DAF61AA-5A98-4049-A93E-477E5505141A}" type="datetimeFigureOut">
               <a:rPr lang="en-US" smtClean="0"/>
-              <a:t>9/22/2026</a:t>
+              <a:t>9/29/2026</a:t>
             </a:fld>
             <a:endParaRPr lang="en-US"/>
           </a:p>
@@ -1415,7 +1415,7 @@
           <a:p>
             <a:fld id="{0DAF61AA-5A98-4049-A93E-477E5505141A}" type="datetimeFigureOut">
               <a:rPr lang="en-US" smtClean="0"/>
-              <a:t>9/22/2026</a:t>
+              <a:t>9/29/2026</a:t>
             </a:fld>
             <a:endParaRPr lang="en-US"/>
           </a:p>
@@ -1830,7 +1830,7 @@
           <a:p>
             <a:fld id="{0DAF61AA-5A98-4049-A93E-477E5505141A}" type="datetimeFigureOut">
               <a:rPr lang="en-US" smtClean="0"/>
-              <a:t>9/22/2026</a:t>
+              <a:t>9/29/2026</a:t>
             </a:fld>
             <a:endParaRPr lang="en-US"/>
           </a:p>
@@ -1972,7 +1972,7 @@
           <a:p>
             <a:fld id="{0DAF61AA-5A98-4049-A93E-477E5505141A}" type="datetimeFigureOut">
               <a:rPr lang="en-US" smtClean="0"/>
-              <a:t>9/22/2026</a:t>
+              <a:t>9/29/2026</a:t>
             </a:fld>
             <a:endParaRPr lang="en-US"/>
           </a:p>
@@ -2085,7 +2085,7 @@
           <a:p>
             <a:fld id="{0DAF61AA-5A98-4049-A93E-477E5505141A}" type="datetimeFigureOut">
               <a:rPr lang="en-US" smtClean="0"/>
-              <a:t>9/22/2026</a:t>
+              <a:t>9/29/2026</a:t>
             </a:fld>
             <a:endParaRPr lang="en-US"/>
           </a:p>
@@ -2398,7 +2398,7 @@
           <a:p>
             <a:fld id="{0DAF61AA-5A98-4049-A93E-477E5505141A}" type="datetimeFigureOut">
               <a:rPr lang="en-US" smtClean="0"/>
-              <a:t>9/22/2026</a:t>
+              <a:t>9/29/2026</a:t>
             </a:fld>
             <a:endParaRPr lang="en-US"/>
           </a:p>
@@ -2691,7 +2691,7 @@
           <a:p>
             <a:fld id="{0DAF61AA-5A98-4049-A93E-477E5505141A}" type="datetimeFigureOut">
               <a:rPr lang="en-US" smtClean="0"/>
-              <a:t>9/22/2026</a:t>
+              <a:t>9/29/2026</a:t>
             </a:fld>
             <a:endParaRPr lang="en-US"/>
           </a:p>
@@ -6404,7 +6404,7 @@
             <a:fld id="{0DAF61AA-5A98-4049-A93E-477E5505141A}" type="datetimeFigureOut">
               <a:rPr lang="en-US" smtClean="0"/>
               <a:pPr/>
-              <a:t>9/22/2026</a:t>
+              <a:t>9/29/2026</a:t>
             </a:fld>
             <a:endParaRPr lang="en-US" dirty="0"/>
           </a:p>
@@ -8736,18 +8736,6 @@
             </a:r>
           </a:p>
           <a:p>
-            <a:pPr marL="171450" indent="-171450" algn="ctr">
-              <a:buFont typeface="Arial" panose="020B0604020202020204" pitchFamily="34" charset="0"/>
-              <a:buChar char="•"/>
-            </a:pPr>
-            <a:endParaRPr lang="en-US" sz="1200" dirty="0">
-              <a:solidFill>
-                <a:sysClr val="windowText" lastClr="000000"/>
-              </a:solidFill>
-              <a:latin typeface="Abadi" panose="020B0604020104020204" pitchFamily="34" charset="0"/>
-            </a:endParaRPr>
-          </a:p>
-          <a:p>
             <a:pPr algn="ctr"/>
             <a:r>
               <a:rPr lang="en-US" sz="1200" dirty="0">
@@ -8805,6 +8793,66 @@
                 <a:latin typeface="Abadi" panose="020B0604020104020204" pitchFamily="34" charset="0"/>
               </a:rPr>
               <a:t> kept 17,721</a:t>
+            </a:r>
+          </a:p>
+          <a:p>
+            <a:pPr algn="ctr"/>
+            <a:r>
+              <a:rPr lang="en-US" sz="1200" dirty="0">
+                <a:solidFill>
+                  <a:schemeClr val="tx1"/>
+                </a:solidFill>
+                <a:latin typeface="Abadi" panose="020B0604020104020204" pitchFamily="34" charset="0"/>
+              </a:rPr>
+              <a:t>Then remove 3’SS 100 </a:t>
+            </a:r>
+            <a:r>
+              <a:rPr lang="en-US" sz="1200" dirty="0" err="1">
+                <a:solidFill>
+                  <a:schemeClr val="tx1"/>
+                </a:solidFill>
+                <a:latin typeface="Abadi" panose="020B0604020104020204" pitchFamily="34" charset="0"/>
+              </a:rPr>
+              <a:t>nt</a:t>
+            </a:r>
+            <a:r>
+              <a:rPr lang="en-US" sz="1200" dirty="0">
+                <a:solidFill>
+                  <a:schemeClr val="tx1"/>
+                </a:solidFill>
+                <a:latin typeface="Abadi" panose="020B0604020104020204" pitchFamily="34" charset="0"/>
+              </a:rPr>
+              <a:t> BP region</a:t>
+            </a:r>
+          </a:p>
+          <a:p>
+            <a:pPr algn="ctr"/>
+            <a:r>
+              <a:rPr lang="en-US" sz="1200" dirty="0">
+                <a:solidFill>
+                  <a:schemeClr val="tx1"/>
+                </a:solidFill>
+                <a:latin typeface="Abadi" panose="020B0604020104020204" pitchFamily="34" charset="0"/>
+              </a:rPr>
+              <a:t>Decoys kept 5,689 / </a:t>
+            </a:r>
+            <a:r>
+              <a:rPr lang="en-US" sz="1200" dirty="0" err="1">
+                <a:solidFill>
+                  <a:schemeClr val="tx1"/>
+                </a:solidFill>
+                <a:latin typeface="Abadi" panose="020B0604020104020204" pitchFamily="34" charset="0"/>
+              </a:rPr>
+              <a:t>Cryptics</a:t>
+            </a:r>
+            <a:r>
+              <a:rPr lang="en-US" sz="1200" dirty="0">
+                <a:solidFill>
+                  <a:schemeClr val="tx1"/>
+                </a:solidFill>
+                <a:latin typeface="Abadi" panose="020B0604020104020204" pitchFamily="34" charset="0"/>
+              </a:rPr>
+              <a:t> 16,295</a:t>
             </a:r>
           </a:p>
         </p:txBody>
